--- a/presentacion/storymaker-deck.pptx
+++ b/presentacion/storymaker-deck.pptx
@@ -2461,7 +2461,7 @@
           <a:p>
             <a:r>
               <a:rPr lang="en-US" dirty="0"/>
-              <a:t>[4:55–5:45 · 50 s] La evidencia: cinco briefs contra cada puerta, con Claude real. El de ejemplo, con Opus 5.5, llega a la novela completa: diez de diez capítulos, rúbrica media 4,5 y Lean pasa con 115 eventos; el juez rechazó 6 de 16 intentos. 41,47 dólares. En el adversarial, el entrevistador detecta las tres inyecciones, el canario no aparece y la continuidad para el capítulo 3 por un fallo real. Jubilación se para en el capítulo 3 en el juez, con 4 rechazos de 6. Boda e incoherencia las repetimos con Sonnet 5: la puerta 1 obligó a rehacer la estructura y el juez rechazó 5 de 6 intentos, 4 por clichés. El editor no rebaja el listón por usar un modelo más barato. Total de las evals: 86,92 dólares.</a:t>
+              <a:t>[4:55–5:45 · 50 s] La evidencia, de un vistazo: cinco briefs con Claude real, tres con Opus 5.5 y dos repetidos con Sonnet 5. Naranja es que pasa, borde rojo es que el validador rechaza, punteado es que no llegó a ejecutarse. El brief de ejemplo completa los diez capítulos, con rúbrica 4,5 y Lean en verde con 115 eventos; el juez rechazó 6 de 16 intentos por el camino. En el adversarial, el entrevistador detecta las tres inyecciones y la continuidad para el capítulo 3 por un fallo real. Jubilación se para en el capítulo 3 en el juez. Con Sonnet 5, la puerta 1 obligó a rehacer la estructura y el juez rechazó 5 de 6 intentos, 4 por clichés: el editor no rebaja el listón por usar un modelo más barato. Todo costó 86,92 dólares; la tabla completa está en el anexo A2.</a:t>
             </a:r>
             <a:endParaRPr lang="en-US" dirty="0"/>
           </a:p>
@@ -3301,7 +3301,7 @@
                 <a:ea typeface="Manrope" pitchFamily="34" charset="-122"/>
                 <a:cs typeface="Manrope" pitchFamily="34" charset="-120"/>
               </a:rPr>
-              <a:t>Propuesta para </a:t>
+              <a:t>Propuesta para Xesca World</a:t>
             </a:r>
             <a:r>
               <a:rPr lang="en-US" sz="1800" b="1" dirty="0">
@@ -3312,7 +3312,7 @@
                 <a:ea typeface="Manrope" pitchFamily="34" charset="-122"/>
                 <a:cs typeface="Manrope" pitchFamily="34" charset="-120"/>
               </a:rPr>
-              <a:t>Faro Regalos, S.L.</a:t>
+              <a:t>, S.L.</a:t>
             </a:r>
             <a:endParaRPr lang="en-US" sz="1800" dirty="0"/>
           </a:p>
@@ -8610,62 +8610,7 @@
       </p:sp>
       <p:sp>
         <p:nvSpPr>
-          <p:cNvPr id="7" name="Text 3"/>
-          <p:cNvSpPr/>
-          <p:nvPr/>
-        </p:nvSpPr>
-        <p:spPr>
-          <a:xfrm>
-            <a:off x="812800" y="5308538"/>
-            <a:ext cx="5755640" cy="238720"/>
-          </a:xfrm>
-          <a:prstGeom prst="rect">
-            <a:avLst/>
-          </a:prstGeom>
-          <a:noFill/>
-          <a:ln/>
-        </p:spPr>
-        <p:txBody>
-          <a:bodyPr wrap="square" lIns="0" tIns="0" rIns="0" bIns="0" rtlCol="0" anchor="t">
-            <a:normAutofit/>
-          </a:bodyPr>
-          <a:lstStyle/>
-          <a:p>
-            <a:pPr algn="l" indent="0" marL="0">
-              <a:lnSpc>
-                <a:spcPts val="1680"/>
-              </a:lnSpc>
-              <a:buNone/>
-            </a:pPr>
-            <a:r>
-              <a:rPr lang="en-US" sz="1200" dirty="0">
-                <a:solidFill>
-                  <a:srgbClr val="A9A4B5"/>
-                </a:solidFill>
-                <a:latin typeface="Manrope" pitchFamily="34" charset="0"/>
-                <a:ea typeface="Manrope" pitchFamily="34" charset="-122"/>
-                <a:cs typeface="Manrope" pitchFamily="34" charset="-120"/>
-              </a:rPr>
-              <a:t>Vídeo de la demo: </a:t>
-            </a:r>
-            <a:r>
-              <a:rPr lang="en-US" sz="1200" dirty="0">
-                <a:solidFill>
-                  <a:srgbClr val="E0975A"/>
-                </a:solidFill>
-                <a:latin typeface="Manrope" pitchFamily="34" charset="0"/>
-                <a:ea typeface="Manrope" pitchFamily="34" charset="-122"/>
-                <a:cs typeface="Manrope" pitchFamily="34" charset="-120"/>
-              </a:rPr>
-              <a:t>[AUTOR]</a:t>
-            </a:r>
-            <a:endParaRPr lang="en-US" sz="1200" dirty="0"/>
-          </a:p>
-        </p:txBody>
-      </p:sp>
-      <p:sp>
-        <p:nvSpPr>
-          <p:cNvPr id="8" name="Shape 4"/>
+          <p:cNvPr id="7" name="Shape 3"/>
           <p:cNvSpPr/>
           <p:nvPr/>
         </p:nvSpPr>
@@ -8687,7 +8632,7 @@
       </p:sp>
       <p:sp>
         <p:nvSpPr>
-          <p:cNvPr id="9" name="Shape 5"/>
+          <p:cNvPr id="8" name="Shape 4"/>
           <p:cNvSpPr/>
           <p:nvPr/>
         </p:nvSpPr>
@@ -8735,7 +8680,7 @@
       </p:sp>
       <p:sp>
         <p:nvSpPr>
-          <p:cNvPr id="10" name="Text 6"/>
+          <p:cNvPr id="9" name="Text 5"/>
           <p:cNvSpPr/>
           <p:nvPr/>
         </p:nvSpPr>
@@ -8779,7 +8724,7 @@
       </p:sp>
       <p:sp>
         <p:nvSpPr>
-          <p:cNvPr id="11" name="Text 7"/>
+          <p:cNvPr id="10" name="Text 6"/>
           <p:cNvSpPr/>
           <p:nvPr/>
         </p:nvSpPr>
@@ -8866,7 +8811,7 @@
       </p:sp>
       <p:sp>
         <p:nvSpPr>
-          <p:cNvPr id="12" name="Shape 8"/>
+          <p:cNvPr id="11" name="Shape 7"/>
           <p:cNvSpPr/>
           <p:nvPr/>
         </p:nvSpPr>
@@ -8888,7 +8833,7 @@
       </p:sp>
       <p:sp>
         <p:nvSpPr>
-          <p:cNvPr id="13" name="Shape 9"/>
+          <p:cNvPr id="12" name="Shape 8"/>
           <p:cNvSpPr/>
           <p:nvPr/>
         </p:nvSpPr>
@@ -8936,7 +8881,7 @@
       </p:sp>
       <p:sp>
         <p:nvSpPr>
-          <p:cNvPr id="14" name="Text 10"/>
+          <p:cNvPr id="13" name="Text 9"/>
           <p:cNvSpPr/>
           <p:nvPr/>
         </p:nvSpPr>
@@ -8980,7 +8925,7 @@
       </p:sp>
       <p:sp>
         <p:nvSpPr>
-          <p:cNvPr id="15" name="Text 11"/>
+          <p:cNvPr id="14" name="Text 10"/>
           <p:cNvSpPr/>
           <p:nvPr/>
         </p:nvSpPr>
@@ -9067,7 +9012,7 @@
       </p:sp>
       <p:pic>
         <p:nvPicPr>
-          <p:cNvPr id="16" name="Image 2" descr="SpaceMaker">    </p:cNvPr>
+          <p:cNvPr id="15" name="Image 2" descr="SpaceMaker">    </p:cNvPr>
           <p:cNvPicPr>
             <a:picLocks noChangeAspect="1"/>
           </p:cNvPicPr>
@@ -9090,7 +9035,7 @@
       </p:pic>
       <p:sp>
         <p:nvSpPr>
-          <p:cNvPr id="17" name="Text 12"/>
+          <p:cNvPr id="16" name="Text 11"/>
           <p:cNvSpPr/>
           <p:nvPr/>
         </p:nvSpPr>
@@ -9134,7 +9079,7 @@
       </p:sp>
       <p:pic>
         <p:nvPicPr>
-          <p:cNvPr id="18" name="Image 3" descr="Tres destellos">    </p:cNvPr>
+          <p:cNvPr id="17" name="Image 3" descr="Tres destellos">    </p:cNvPr>
           <p:cNvPicPr>
             <a:picLocks noChangeAspect="1"/>
           </p:cNvPicPr>
@@ -9157,7 +9102,7 @@
       </p:pic>
       <p:sp>
         <p:nvSpPr>
-          <p:cNvPr id="19" name="Text 13"/>
+          <p:cNvPr id="18" name="Text 12"/>
           <p:cNvSpPr/>
           <p:nvPr/>
         </p:nvSpPr>
@@ -36817,8 +36762,8 @@
         </p:nvSpPr>
         <p:spPr>
           <a:xfrm>
-            <a:off x="812800" y="774700"/>
-            <a:ext cx="3072809" cy="472414"/>
+            <a:off x="812800" y="711200"/>
+            <a:ext cx="10883392" cy="472414"/>
           </a:xfrm>
           <a:prstGeom prst="rect">
             <a:avLst/>
@@ -36827,7 +36772,7 @@
           <a:ln/>
         </p:spPr>
         <p:txBody>
-          <a:bodyPr wrap="none" lIns="0" tIns="0" rIns="0" bIns="0" rtlCol="0" anchor="t">
+          <a:bodyPr wrap="square" lIns="0" tIns="0" rIns="0" bIns="0" rtlCol="0" anchor="t">
             <a:normAutofit/>
           </a:bodyPr>
           <a:lstStyle/>
@@ -36866,36 +36811,532 @@
       </p:sp>
       <p:sp>
         <p:nvSpPr>
-          <p:cNvPr id="4" name="Shape 1"/>
-          <p:cNvSpPr/>
-          <p:nvPr/>
-        </p:nvSpPr>
-        <p:spPr>
-          <a:xfrm>
-            <a:off x="4100909" y="711200"/>
-            <a:ext cx="7278291" cy="574014"/>
+          <p:cNvPr id="4" name="Text 1"/>
+          <p:cNvSpPr/>
+          <p:nvPr/>
+        </p:nvSpPr>
+        <p:spPr>
+          <a:xfrm>
+            <a:off x="812800" y="1209015"/>
+            <a:ext cx="10883392" cy="238720"/>
+          </a:xfrm>
+          <a:prstGeom prst="rect">
+            <a:avLst/>
+          </a:prstGeom>
+          <a:noFill/>
+          <a:ln/>
+        </p:spPr>
+        <p:txBody>
+          <a:bodyPr wrap="square" lIns="0" tIns="0" rIns="0" bIns="0" rtlCol="0" anchor="t">
+            <a:normAutofit/>
+          </a:bodyPr>
+          <a:lstStyle/>
+          <a:p>
+            <a:pPr algn="l" indent="0" marL="0">
+              <a:lnSpc>
+                <a:spcPts val="1680"/>
+              </a:lnSpc>
+              <a:buNone/>
+            </a:pPr>
+            <a:r>
+              <a:rPr lang="en-US" sz="1200" dirty="0">
+                <a:solidFill>
+                  <a:srgbClr val="A9A4B5"/>
+                </a:solidFill>
+                <a:latin typeface="Manrope" pitchFamily="34" charset="0"/>
+                <a:ea typeface="Manrope" pitchFamily="34" charset="-122"/>
+                <a:cs typeface="Manrope" pitchFamily="34" charset="-120"/>
+              </a:rPr>
+              <a:t>Claude real · coste total 86,92 $ · tabla completa en el anexo A2</a:t>
+            </a:r>
+            <a:endParaRPr lang="en-US" sz="1200" dirty="0"/>
+          </a:p>
+        </p:txBody>
+      </p:sp>
+      <p:sp>
+        <p:nvSpPr>
+          <p:cNvPr id="5" name="Shape 2"/>
+          <p:cNvSpPr/>
+          <p:nvPr/>
+        </p:nvSpPr>
+        <p:spPr>
+          <a:xfrm>
+            <a:off x="2136775" y="1670183"/>
+            <a:ext cx="3295650" cy="266237"/>
           </a:xfrm>
           <a:prstGeom prst="roundRect">
             <a:avLst>
-              <a:gd name="adj" fmla="val 13275"/>
+              <a:gd name="adj" fmla="val 50000"/>
             </a:avLst>
           </a:prstGeom>
           <a:solidFill>
             <a:srgbClr val="211E28"/>
           </a:solidFill>
-          <a:ln/>
-        </p:spPr>
-      </p:sp>
-      <p:sp>
-        <p:nvSpPr>
-          <p:cNvPr id="5" name="Shape 2"/>
-          <p:cNvSpPr/>
-          <p:nvPr/>
-        </p:nvSpPr>
-        <p:spPr>
-          <a:xfrm>
-            <a:off x="4100909" y="711200"/>
-            <a:ext cx="7278291" cy="574014"/>
+          <a:ln w="6350">
+            <a:solidFill>
+              <a:srgbClr val="E0975A"/>
+            </a:solidFill>
+            <a:prstDash val="solid"/>
+          </a:ln>
+        </p:spPr>
+      </p:sp>
+      <p:sp>
+        <p:nvSpPr>
+          <p:cNvPr id="6" name="Text 3"/>
+          <p:cNvSpPr/>
+          <p:nvPr/>
+        </p:nvSpPr>
+        <p:spPr>
+          <a:xfrm>
+            <a:off x="2193078" y="1696642"/>
+            <a:ext cx="3183043" cy="238720"/>
+          </a:xfrm>
+          <a:prstGeom prst="rect">
+            <a:avLst/>
+          </a:prstGeom>
+          <a:noFill/>
+          <a:ln/>
+        </p:spPr>
+        <p:txBody>
+          <a:bodyPr wrap="square" lIns="0" tIns="0" rIns="0" bIns="0" rtlCol="0" anchor="t">
+            <a:normAutofit/>
+          </a:bodyPr>
+          <a:lstStyle/>
+          <a:p>
+            <a:pPr algn="ctr" indent="0" marL="0">
+              <a:lnSpc>
+                <a:spcPts val="1680"/>
+              </a:lnSpc>
+              <a:buNone/>
+            </a:pPr>
+            <a:r>
+              <a:rPr lang="en-US" sz="1200" b="1" dirty="0">
+                <a:solidFill>
+                  <a:srgbClr val="E0975A"/>
+                </a:solidFill>
+                <a:latin typeface="Manrope" pitchFamily="34" charset="0"/>
+                <a:ea typeface="Manrope" pitchFamily="34" charset="-122"/>
+                <a:cs typeface="Manrope" pitchFamily="34" charset="-120"/>
+              </a:rPr>
+              <a:t>Opus 5.5</a:t>
+            </a:r>
+            <a:endParaRPr lang="en-US" sz="1200" dirty="0"/>
+          </a:p>
+        </p:txBody>
+      </p:sp>
+      <p:sp>
+        <p:nvSpPr>
+          <p:cNvPr id="7" name="Shape 4"/>
+          <p:cNvSpPr/>
+          <p:nvPr/>
+        </p:nvSpPr>
+        <p:spPr>
+          <a:xfrm>
+            <a:off x="5486400" y="1671241"/>
+            <a:ext cx="2184400" cy="264120"/>
+          </a:xfrm>
+          <a:prstGeom prst="roundRect">
+            <a:avLst>
+              <a:gd name="adj" fmla="val 50000"/>
+            </a:avLst>
+          </a:prstGeom>
+          <a:solidFill>
+            <a:srgbClr val="5B5078"/>
+          </a:solidFill>
+          <a:ln/>
+        </p:spPr>
+      </p:sp>
+      <p:sp>
+        <p:nvSpPr>
+          <p:cNvPr id="8" name="Text 5"/>
+          <p:cNvSpPr/>
+          <p:nvPr/>
+        </p:nvSpPr>
+        <p:spPr>
+          <a:xfrm>
+            <a:off x="5558282" y="1696641"/>
+            <a:ext cx="2040636" cy="238720"/>
+          </a:xfrm>
+          <a:prstGeom prst="rect">
+            <a:avLst/>
+          </a:prstGeom>
+          <a:noFill/>
+          <a:ln/>
+        </p:spPr>
+        <p:txBody>
+          <a:bodyPr wrap="square" lIns="0" tIns="0" rIns="0" bIns="0" rtlCol="0" anchor="t">
+            <a:normAutofit/>
+          </a:bodyPr>
+          <a:lstStyle/>
+          <a:p>
+            <a:pPr algn="ctr" indent="0" marL="0">
+              <a:lnSpc>
+                <a:spcPts val="1680"/>
+              </a:lnSpc>
+              <a:buNone/>
+            </a:pPr>
+            <a:r>
+              <a:rPr lang="en-US" sz="1200" b="1" dirty="0">
+                <a:solidFill>
+                  <a:srgbClr val="ECEAF0"/>
+                </a:solidFill>
+                <a:latin typeface="Manrope" pitchFamily="34" charset="0"/>
+                <a:ea typeface="Manrope" pitchFamily="34" charset="-122"/>
+                <a:cs typeface="Manrope" pitchFamily="34" charset="-120"/>
+              </a:rPr>
+              <a:t>Sonnet 5</a:t>
+            </a:r>
+            <a:endParaRPr lang="en-US" sz="1200" dirty="0"/>
+          </a:p>
+        </p:txBody>
+      </p:sp>
+      <p:sp>
+        <p:nvSpPr>
+          <p:cNvPr id="9" name="Shape 6"/>
+          <p:cNvSpPr/>
+          <p:nvPr/>
+        </p:nvSpPr>
+        <p:spPr>
+          <a:xfrm>
+            <a:off x="812800" y="2282760"/>
+            <a:ext cx="6858000" cy="0"/>
+          </a:xfrm>
+          <a:prstGeom prst="line">
+            <a:avLst/>
+          </a:prstGeom>
+          <a:noFill/>
+          <a:ln w="6350">
+            <a:solidFill>
+              <a:srgbClr val="5B5078"/>
+            </a:solidFill>
+            <a:prstDash val="solid"/>
+          </a:ln>
+        </p:spPr>
+      </p:sp>
+      <p:sp>
+        <p:nvSpPr>
+          <p:cNvPr id="10" name="Text 7"/>
+          <p:cNvSpPr/>
+          <p:nvPr/>
+        </p:nvSpPr>
+        <p:spPr>
+          <a:xfrm>
+            <a:off x="2133600" y="2012026"/>
+            <a:ext cx="1117600" cy="238720"/>
+          </a:xfrm>
+          <a:prstGeom prst="rect">
+            <a:avLst/>
+          </a:prstGeom>
+          <a:noFill/>
+          <a:ln/>
+        </p:spPr>
+        <p:txBody>
+          <a:bodyPr wrap="square" lIns="0" tIns="0" rIns="0" bIns="0" rtlCol="0" anchor="t">
+            <a:normAutofit/>
+          </a:bodyPr>
+          <a:lstStyle/>
+          <a:p>
+            <a:pPr algn="l" indent="0" marL="0">
+              <a:lnSpc>
+                <a:spcPts val="1680"/>
+              </a:lnSpc>
+              <a:buNone/>
+            </a:pPr>
+            <a:r>
+              <a:rPr lang="en-US" sz="1200" b="1" dirty="0">
+                <a:solidFill>
+                  <a:srgbClr val="ECEAF0"/>
+                </a:solidFill>
+                <a:latin typeface="Manrope" pitchFamily="34" charset="0"/>
+                <a:ea typeface="Manrope" pitchFamily="34" charset="-122"/>
+                <a:cs typeface="Manrope" pitchFamily="34" charset="-120"/>
+              </a:rPr>
+              <a:t>Ejemplo</a:t>
+            </a:r>
+            <a:endParaRPr lang="en-US" sz="1200" dirty="0"/>
+          </a:p>
+        </p:txBody>
+      </p:sp>
+      <p:sp>
+        <p:nvSpPr>
+          <p:cNvPr id="11" name="Text 8"/>
+          <p:cNvSpPr/>
+          <p:nvPr/>
+        </p:nvSpPr>
+        <p:spPr>
+          <a:xfrm>
+            <a:off x="3251200" y="2012026"/>
+            <a:ext cx="1117600" cy="238720"/>
+          </a:xfrm>
+          <a:prstGeom prst="rect">
+            <a:avLst/>
+          </a:prstGeom>
+          <a:noFill/>
+          <a:ln/>
+        </p:spPr>
+        <p:txBody>
+          <a:bodyPr wrap="square" lIns="0" tIns="0" rIns="0" bIns="0" rtlCol="0" anchor="t">
+            <a:normAutofit/>
+          </a:bodyPr>
+          <a:lstStyle/>
+          <a:p>
+            <a:pPr algn="l" indent="0" marL="0">
+              <a:lnSpc>
+                <a:spcPts val="1680"/>
+              </a:lnSpc>
+              <a:buNone/>
+            </a:pPr>
+            <a:r>
+              <a:rPr lang="en-US" sz="1200" b="1" dirty="0">
+                <a:solidFill>
+                  <a:srgbClr val="ECEAF0"/>
+                </a:solidFill>
+                <a:latin typeface="Manrope" pitchFamily="34" charset="0"/>
+                <a:ea typeface="Manrope" pitchFamily="34" charset="-122"/>
+                <a:cs typeface="Manrope" pitchFamily="34" charset="-120"/>
+              </a:rPr>
+              <a:t>Adversarial</a:t>
+            </a:r>
+            <a:endParaRPr lang="en-US" sz="1200" dirty="0"/>
+          </a:p>
+        </p:txBody>
+      </p:sp>
+      <p:sp>
+        <p:nvSpPr>
+          <p:cNvPr id="12" name="Text 9"/>
+          <p:cNvSpPr/>
+          <p:nvPr/>
+        </p:nvSpPr>
+        <p:spPr>
+          <a:xfrm>
+            <a:off x="4368800" y="2012026"/>
+            <a:ext cx="1117600" cy="238720"/>
+          </a:xfrm>
+          <a:prstGeom prst="rect">
+            <a:avLst/>
+          </a:prstGeom>
+          <a:noFill/>
+          <a:ln/>
+        </p:spPr>
+        <p:txBody>
+          <a:bodyPr wrap="square" lIns="0" tIns="0" rIns="0" bIns="0" rtlCol="0" anchor="t">
+            <a:normAutofit/>
+          </a:bodyPr>
+          <a:lstStyle/>
+          <a:p>
+            <a:pPr algn="l" indent="0" marL="0">
+              <a:lnSpc>
+                <a:spcPts val="1680"/>
+              </a:lnSpc>
+              <a:buNone/>
+            </a:pPr>
+            <a:r>
+              <a:rPr lang="en-US" sz="1200" b="1" dirty="0">
+                <a:solidFill>
+                  <a:srgbClr val="ECEAF0"/>
+                </a:solidFill>
+                <a:latin typeface="Manrope" pitchFamily="34" charset="0"/>
+                <a:ea typeface="Manrope" pitchFamily="34" charset="-122"/>
+                <a:cs typeface="Manrope" pitchFamily="34" charset="-120"/>
+              </a:rPr>
+              <a:t>Jubilación</a:t>
+            </a:r>
+            <a:endParaRPr lang="en-US" sz="1200" dirty="0"/>
+          </a:p>
+        </p:txBody>
+      </p:sp>
+      <p:sp>
+        <p:nvSpPr>
+          <p:cNvPr id="13" name="Text 10"/>
+          <p:cNvSpPr/>
+          <p:nvPr/>
+        </p:nvSpPr>
+        <p:spPr>
+          <a:xfrm>
+            <a:off x="5486400" y="2012026"/>
+            <a:ext cx="1117600" cy="238720"/>
+          </a:xfrm>
+          <a:prstGeom prst="rect">
+            <a:avLst/>
+          </a:prstGeom>
+          <a:noFill/>
+          <a:ln/>
+        </p:spPr>
+        <p:txBody>
+          <a:bodyPr wrap="square" lIns="0" tIns="0" rIns="0" bIns="0" rtlCol="0" anchor="t">
+            <a:normAutofit/>
+          </a:bodyPr>
+          <a:lstStyle/>
+          <a:p>
+            <a:pPr algn="l" indent="0" marL="0">
+              <a:lnSpc>
+                <a:spcPts val="1680"/>
+              </a:lnSpc>
+              <a:buNone/>
+            </a:pPr>
+            <a:r>
+              <a:rPr lang="en-US" sz="1200" b="1" dirty="0">
+                <a:solidFill>
+                  <a:srgbClr val="ECEAF0"/>
+                </a:solidFill>
+                <a:latin typeface="Manrope" pitchFamily="34" charset="0"/>
+                <a:ea typeface="Manrope" pitchFamily="34" charset="-122"/>
+                <a:cs typeface="Manrope" pitchFamily="34" charset="-120"/>
+              </a:rPr>
+              <a:t>Boda</a:t>
+            </a:r>
+            <a:endParaRPr lang="en-US" sz="1200" dirty="0"/>
+          </a:p>
+        </p:txBody>
+      </p:sp>
+      <p:sp>
+        <p:nvSpPr>
+          <p:cNvPr id="14" name="Text 11"/>
+          <p:cNvSpPr/>
+          <p:nvPr/>
+        </p:nvSpPr>
+        <p:spPr>
+          <a:xfrm>
+            <a:off x="6604000" y="2012026"/>
+            <a:ext cx="1117600" cy="238720"/>
+          </a:xfrm>
+          <a:prstGeom prst="rect">
+            <a:avLst/>
+          </a:prstGeom>
+          <a:noFill/>
+          <a:ln/>
+        </p:spPr>
+        <p:txBody>
+          <a:bodyPr wrap="square" lIns="0" tIns="0" rIns="0" bIns="0" rtlCol="0" anchor="t">
+            <a:normAutofit/>
+          </a:bodyPr>
+          <a:lstStyle/>
+          <a:p>
+            <a:pPr algn="l" indent="0" marL="0">
+              <a:lnSpc>
+                <a:spcPts val="1680"/>
+              </a:lnSpc>
+              <a:buNone/>
+            </a:pPr>
+            <a:r>
+              <a:rPr lang="en-US" sz="1200" b="1" dirty="0">
+                <a:solidFill>
+                  <a:srgbClr val="ECEAF0"/>
+                </a:solidFill>
+                <a:latin typeface="Manrope" pitchFamily="34" charset="0"/>
+                <a:ea typeface="Manrope" pitchFamily="34" charset="-122"/>
+                <a:cs typeface="Manrope" pitchFamily="34" charset="-120"/>
+              </a:rPr>
+              <a:t>Incoherencia</a:t>
+            </a:r>
+            <a:endParaRPr lang="en-US" sz="1200" dirty="0"/>
+          </a:p>
+        </p:txBody>
+      </p:sp>
+      <p:sp>
+        <p:nvSpPr>
+          <p:cNvPr id="15" name="Shape 12"/>
+          <p:cNvSpPr/>
+          <p:nvPr/>
+        </p:nvSpPr>
+        <p:spPr>
+          <a:xfrm>
+            <a:off x="812800" y="2651060"/>
+            <a:ext cx="6858000" cy="0"/>
+          </a:xfrm>
+          <a:prstGeom prst="line">
+            <a:avLst/>
+          </a:prstGeom>
+          <a:noFill/>
+          <a:ln w="6350">
+            <a:solidFill>
+              <a:srgbClr val="211E28"/>
+            </a:solidFill>
+            <a:prstDash val="solid"/>
+          </a:ln>
+        </p:spPr>
+      </p:sp>
+      <p:sp>
+        <p:nvSpPr>
+          <p:cNvPr id="16" name="Text 13"/>
+          <p:cNvSpPr/>
+          <p:nvPr/>
+        </p:nvSpPr>
+        <p:spPr>
+          <a:xfrm>
+            <a:off x="812800" y="2361276"/>
+            <a:ext cx="1320800" cy="238720"/>
+          </a:xfrm>
+          <a:prstGeom prst="rect">
+            <a:avLst/>
+          </a:prstGeom>
+          <a:noFill/>
+          <a:ln/>
+        </p:spPr>
+        <p:txBody>
+          <a:bodyPr wrap="square" lIns="0" tIns="0" rIns="0" bIns="0" rtlCol="0" anchor="t">
+            <a:normAutofit/>
+          </a:bodyPr>
+          <a:lstStyle/>
+          <a:p>
+            <a:pPr algn="l" indent="0" marL="0">
+              <a:lnSpc>
+                <a:spcPts val="1680"/>
+              </a:lnSpc>
+              <a:buNone/>
+            </a:pPr>
+            <a:r>
+              <a:rPr lang="en-US" sz="1200" dirty="0">
+                <a:solidFill>
+                  <a:srgbClr val="A9A4B5"/>
+                </a:solidFill>
+                <a:latin typeface="Manrope" pitchFamily="34" charset="0"/>
+                <a:ea typeface="Manrope" pitchFamily="34" charset="-122"/>
+                <a:cs typeface="Manrope" pitchFamily="34" charset="-120"/>
+              </a:rPr>
+              <a:t>Capítulos</a:t>
+            </a:r>
+            <a:endParaRPr lang="en-US" sz="1200" dirty="0"/>
+          </a:p>
+        </p:txBody>
+      </p:sp>
+      <p:sp>
+        <p:nvSpPr>
+          <p:cNvPr id="17" name="Shape 14"/>
+          <p:cNvSpPr/>
+          <p:nvPr/>
+        </p:nvSpPr>
+        <p:spPr>
+          <a:xfrm>
+            <a:off x="2136775" y="2432977"/>
+            <a:ext cx="450850" cy="69850"/>
+          </a:xfrm>
+          <a:prstGeom prst="roundRect">
+            <a:avLst>
+              <a:gd name="adj" fmla="val 50000"/>
+            </a:avLst>
+          </a:prstGeom>
+          <a:solidFill>
+            <a:srgbClr val="211E28"/>
+          </a:solidFill>
+          <a:ln w="6350">
+            <a:solidFill>
+              <a:srgbClr val="5B5078"/>
+            </a:solidFill>
+            <a:prstDash val="solid"/>
+          </a:ln>
+        </p:spPr>
+      </p:sp>
+      <p:sp>
+        <p:nvSpPr>
+          <p:cNvPr id="18" name="Shape 15"/>
+          <p:cNvSpPr/>
+          <p:nvPr/>
+        </p:nvSpPr>
+        <p:spPr>
+          <a:xfrm>
+            <a:off x="2137833" y="2434034"/>
+            <a:ext cx="457200" cy="76200"/>
           </a:xfrm>
           <a:custGeom>
             <a:avLst/>
@@ -36904,26 +37345,20 @@
             <a:cxnLst/>
             <a:rect l="l" t="t" r="r" b="b"/>
             <a:pathLst>
-              <a:path w="7278291" h="574014">
+              <a:path w="457200" h="76200">
                 <a:moveTo>
-                  <a:pt x="76200" y="574014"/>
+                  <a:pt x="0" y="33867"/>
                 </a:moveTo>
+                <a:arcTo hR="33867" wR="33867" stAng="10800000" swAng="5400000"/>
                 <a:lnTo>
-                  <a:pt x="76200" y="574014"/>
+                  <a:pt x="457200" y="0"/>
                 </a:lnTo>
-                <a:arcTo hR="76200" wR="76200" stAng="5400000" swAng="5400000"/>
+                <a:lnTo>
+                  <a:pt x="457200" y="76200"/>
+                </a:lnTo>
                 <a:lnTo>
                   <a:pt x="0" y="76200"/>
                 </a:lnTo>
-                <a:arcTo hR="76200" wR="76200" stAng="10800000" swAng="5400000"/>
-                <a:lnTo>
-                  <a:pt x="76200" y="0"/>
-                </a:lnTo>
-                <a:arcTo hR="76200" wR="50800" stAng="16200000" swAng="-5400000"/>
-                <a:lnTo>
-                  <a:pt x="25400" y="497814"/>
-                </a:lnTo>
-                <a:arcTo hR="76200" wR="50800" stAng="10800000" swAng="-5400000"/>
                 <a:close/>
               </a:path>
             </a:pathLst>
@@ -36936,14 +37371,14 @@
       </p:sp>
       <p:sp>
         <p:nvSpPr>
-          <p:cNvPr id="6" name="Text 3"/>
-          <p:cNvSpPr/>
-          <p:nvPr/>
-        </p:nvSpPr>
-        <p:spPr>
-          <a:xfrm>
-            <a:off x="4278709" y="800100"/>
-            <a:ext cx="7156533" cy="421614"/>
+          <p:cNvPr id="19" name="Text 16"/>
+          <p:cNvSpPr/>
+          <p:nvPr/>
+        </p:nvSpPr>
+        <p:spPr>
+          <a:xfrm>
+            <a:off x="2654300" y="2361276"/>
+            <a:ext cx="414668" cy="238720"/>
           </a:xfrm>
           <a:prstGeom prst="rect">
             <a:avLst/>
@@ -36959,7 +37394,7 @@
           <a:p>
             <a:pPr algn="l" indent="0" marL="0">
               <a:lnSpc>
-                <a:spcPts val="1560"/>
+                <a:spcPts val="1680"/>
               </a:lnSpc>
               <a:buNone/>
             </a:pPr>
@@ -36972,4595 +37407,204 @@
                 <a:ea typeface="Manrope" pitchFamily="34" charset="-122"/>
                 <a:cs typeface="Manrope" pitchFamily="34" charset="-120"/>
               </a:rPr>
-              <a:t>Con Sonnet 5, el juez rechazó 5 de 6 intentos (4 por clichés): </a:t>
-            </a:r>
+              <a:t>10/10</a:t>
+            </a:r>
+            <a:endParaRPr lang="en-US" sz="1200" dirty="0"/>
+          </a:p>
+        </p:txBody>
+      </p:sp>
+      <p:sp>
+        <p:nvSpPr>
+          <p:cNvPr id="20" name="Shape 17"/>
+          <p:cNvSpPr/>
+          <p:nvPr/>
+        </p:nvSpPr>
+        <p:spPr>
+          <a:xfrm>
+            <a:off x="3254375" y="2432977"/>
+            <a:ext cx="450850" cy="69850"/>
+          </a:xfrm>
+          <a:prstGeom prst="roundRect">
+            <a:avLst>
+              <a:gd name="adj" fmla="val 50000"/>
+            </a:avLst>
+          </a:prstGeom>
+          <a:solidFill>
+            <a:srgbClr val="211E28"/>
+          </a:solidFill>
+          <a:ln w="6350">
+            <a:solidFill>
+              <a:srgbClr val="5B5078"/>
+            </a:solidFill>
+            <a:prstDash val="solid"/>
+          </a:ln>
+        </p:spPr>
+      </p:sp>
+      <p:sp>
+        <p:nvSpPr>
+          <p:cNvPr id="21" name="Shape 18"/>
+          <p:cNvSpPr/>
+          <p:nvPr/>
+        </p:nvSpPr>
+        <p:spPr>
+          <a:xfrm>
+            <a:off x="3255433" y="2434034"/>
+            <a:ext cx="304800" cy="76200"/>
+          </a:xfrm>
+          <a:custGeom>
+            <a:avLst/>
+            <a:gdLst/>
+            <a:ahLst/>
+            <a:cxnLst/>
+            <a:rect l="l" t="t" r="r" b="b"/>
+            <a:pathLst>
+              <a:path w="304800" h="76200">
+                <a:moveTo>
+                  <a:pt x="0" y="33867"/>
+                </a:moveTo>
+                <a:arcTo hR="33867" wR="33867" stAng="10800000" swAng="5400000"/>
+                <a:lnTo>
+                  <a:pt x="304800" y="0"/>
+                </a:lnTo>
+                <a:lnTo>
+                  <a:pt x="304800" y="76200"/>
+                </a:lnTo>
+                <a:lnTo>
+                  <a:pt x="0" y="76200"/>
+                </a:lnTo>
+                <a:close/>
+              </a:path>
+            </a:pathLst>
+          </a:custGeom>
+          <a:solidFill>
+            <a:srgbClr val="E0975A"/>
+          </a:solidFill>
+          <a:ln/>
+        </p:spPr>
+      </p:sp>
+      <p:sp>
+        <p:nvSpPr>
+          <p:cNvPr id="22" name="Text 19"/>
+          <p:cNvSpPr/>
+          <p:nvPr/>
+        </p:nvSpPr>
+        <p:spPr>
+          <a:xfrm>
+            <a:off x="3771900" y="2361276"/>
+            <a:ext cx="281054" cy="238720"/>
+          </a:xfrm>
+          <a:prstGeom prst="rect">
+            <a:avLst/>
+          </a:prstGeom>
+          <a:noFill/>
+          <a:ln/>
+        </p:spPr>
+        <p:txBody>
+          <a:bodyPr wrap="square" lIns="0" tIns="0" rIns="0" bIns="0" rtlCol="0" anchor="t">
+            <a:normAutofit/>
+          </a:bodyPr>
+          <a:lstStyle/>
+          <a:p>
+            <a:pPr algn="l" indent="0" marL="0">
+              <a:lnSpc>
+                <a:spcPts val="1680"/>
+              </a:lnSpc>
+              <a:buNone/>
+            </a:pPr>
             <a:r>
               <a:rPr lang="en-US" sz="1200" dirty="0">
                 <a:solidFill>
-                  <a:srgbClr val="E0975A"/>
+                  <a:srgbClr val="ECEAF0"/>
                 </a:solidFill>
                 <a:latin typeface="Manrope" pitchFamily="34" charset="0"/>
                 <a:ea typeface="Manrope" pitchFamily="34" charset="-122"/>
                 <a:cs typeface="Manrope" pitchFamily="34" charset="-120"/>
               </a:rPr>
-              <a:t>el editor no rebaja el listón por usar un modelo más barato.</a:t>
+              <a:t>2/3</a:t>
             </a:r>
             <a:endParaRPr lang="en-US" sz="1200" dirty="0"/>
           </a:p>
         </p:txBody>
       </p:sp>
-      <p:graphicFrame>
-        <p:nvGraphicFramePr>
-          <p:cNvPr id="7" name="Table 0"/>
-          <p:cNvGraphicFramePr>
-            <a:graphicFrameLocks noGrp="1"/>
-          </p:cNvGraphicFramePr>
-          <p:nvPr>
-            <p:extLst>
-              <p:ext uri="{D42A27DB-BD31-4B8C-83A1-F6EECF244321}">
-                <p14:modId xmlns:p14="http://schemas.microsoft.com/office/powerpoint/2010/main" val="1579011935"/>
-              </p:ext>
-            </p:extLst>
-          </p:nvPr>
-        </p:nvGraphicFramePr>
-        <p:xfrm>
-          <a:off x="825500" y="1424915"/>
-          <a:ext cx="10553700" cy="3502025"/>
-        </p:xfrm>
-        <a:graphic>
-          <a:graphicData uri="http://schemas.openxmlformats.org/drawingml/2006/table">
-            <a:tbl>
-              <a:tblPr/>
-              <a:tblGrid>
-                <a:gridCol w="1899666"/>
-                <a:gridCol w="2005203"/>
-                <a:gridCol w="1794129"/>
-                <a:gridCol w="1688592"/>
-                <a:gridCol w="1583055"/>
-                <a:gridCol w="1583055"/>
-              </a:tblGrid>
-              <a:tr h="413941">
-                <a:tc>
-                  <a:txBody>
-                    <a:bodyPr/>
-                    <a:lstStyle/>
-                    <a:p>
-                      <a:pPr indent="0" marL="0">
-                        <a:lnSpc>
-                          <a:spcPts val="1680"/>
-                        </a:lnSpc>
-                        <a:buNone/>
-                      </a:pPr>
-                      <a:r>
-                        <a:rPr lang="en-US" sz="1200" b="1" dirty="0">
-                          <a:solidFill>
-                            <a:srgbClr val="A9A4B5"/>
-                          </a:solidFill>
-                          <a:latin typeface="Manrope" pitchFamily="34" charset="0"/>
-                          <a:ea typeface="Manrope" pitchFamily="34" charset="-122"/>
-                          <a:cs typeface="Manrope" pitchFamily="34" charset="-120"/>
-                        </a:rPr>
-                        <a:t>Validador</a:t>
-                      </a:r>
-                      <a:endParaRPr lang="en-US" sz="1200" dirty="0">
-                        <a:latin typeface="Manrope" charset="0"/>
-                        <a:ea typeface="Manrope" charset="0"/>
-                        <a:cs typeface="Manrope" charset="0"/>
-                      </a:endParaRPr>
-                    </a:p>
-                  </a:txBody>
-                  <a:tcPr marL="76200" marR="76200" marT="25400" marB="25400" anchor="t">
-                    <a:lnL w="12700" cap="flat" cmpd="sng" algn="ctr">
-                      <a:solidFill>
-                        <a:srgbClr val="48464B"/>
-                      </a:solidFill>
-                      <a:prstDash val="solid"/>
-                      <a:round/>
-                      <a:headEnd type="none" w="med" len="med"/>
-                      <a:tailEnd type="none" w="med" len="med"/>
-                    </a:lnL>
-                    <a:lnR w="12700" cap="flat" cmpd="sng" algn="ctr">
-                      <a:solidFill>
-                        <a:srgbClr val="514E55"/>
-                      </a:solidFill>
-                      <a:prstDash val="solid"/>
-                      <a:round/>
-                      <a:headEnd type="none" w="med" len="med"/>
-                      <a:tailEnd type="none" w="med" len="med"/>
-                    </a:lnR>
-                    <a:lnT w="12700" cap="flat" cmpd="sng" algn="ctr">
-                      <a:solidFill>
-                        <a:srgbClr val="48464B"/>
-                      </a:solidFill>
-                      <a:prstDash val="solid"/>
-                      <a:round/>
-                      <a:headEnd type="none" w="med" len="med"/>
-                      <a:tailEnd type="none" w="med" len="med"/>
-                    </a:lnT>
-                    <a:lnB w="12700" cap="flat" cmpd="sng" algn="ctr">
-                      <a:solidFill>
-                        <a:srgbClr val="514E55"/>
-                      </a:solidFill>
-                      <a:prstDash val="solid"/>
-                      <a:round/>
-                      <a:headEnd type="none" w="med" len="med"/>
-                      <a:tailEnd type="none" w="med" len="med"/>
-                    </a:lnB>
-                    <a:solidFill>
-                      <a:srgbClr val="211E28"/>
-                    </a:solidFill>
-                  </a:tcPr>
-                </a:tc>
-                <a:tc>
-                  <a:txBody>
-                    <a:bodyPr/>
-                    <a:lstStyle/>
-                    <a:p>
-                      <a:pPr indent="0" marL="0">
-                        <a:lnSpc>
-                          <a:spcPts val="1680"/>
-                        </a:lnSpc>
-                        <a:buNone/>
-                      </a:pPr>
-                      <a:r>
-                        <a:rPr lang="en-US" sz="1200" b="1" dirty="0">
-                          <a:solidFill>
-                            <a:srgbClr val="ECEAF0"/>
-                          </a:solidFill>
-                          <a:latin typeface="Manrope" pitchFamily="34" charset="0"/>
-                          <a:ea typeface="Manrope" pitchFamily="34" charset="-122"/>
-                          <a:cs typeface="Manrope" pitchFamily="34" charset="-120"/>
-                        </a:rPr>
-                        <a:t>Ejemplo</a:t>
-                      </a:r>
-                      <a:endParaRPr lang="en-US" sz="1200" dirty="0">
-                        <a:latin typeface="Manrope" charset="0"/>
-                        <a:ea typeface="Manrope" charset="0"/>
-                        <a:cs typeface="Manrope" charset="0"/>
-                      </a:endParaRPr>
-                    </a:p>
-                  </a:txBody>
-                  <a:tcPr marL="76200" marR="76200" marT="25400" marB="25400" anchor="t">
-                    <a:lnL w="12700" cap="flat" cmpd="sng" algn="ctr">
-                      <a:solidFill>
-                        <a:srgbClr val="514E55"/>
-                      </a:solidFill>
-                      <a:prstDash val="solid"/>
-                      <a:round/>
-                      <a:headEnd type="none" w="med" len="med"/>
-                      <a:tailEnd type="none" w="med" len="med"/>
-                    </a:lnL>
-                    <a:lnR w="12700" cap="flat" cmpd="sng" algn="ctr">
-                      <a:solidFill>
-                        <a:srgbClr val="514E55"/>
-                      </a:solidFill>
-                      <a:prstDash val="solid"/>
-                      <a:round/>
-                      <a:headEnd type="none" w="med" len="med"/>
-                      <a:tailEnd type="none" w="med" len="med"/>
-                    </a:lnR>
-                    <a:lnT w="12700" cap="flat" cmpd="sng" algn="ctr">
-                      <a:solidFill>
-                        <a:srgbClr val="48464B"/>
-                      </a:solidFill>
-                      <a:prstDash val="solid"/>
-                      <a:round/>
-                      <a:headEnd type="none" w="med" len="med"/>
-                      <a:tailEnd type="none" w="med" len="med"/>
-                    </a:lnT>
-                    <a:lnB w="12700" cap="flat" cmpd="sng" algn="ctr">
-                      <a:solidFill>
-                        <a:srgbClr val="514E55"/>
-                      </a:solidFill>
-                      <a:prstDash val="solid"/>
-                      <a:round/>
-                      <a:headEnd type="none" w="med" len="med"/>
-                      <a:tailEnd type="none" w="med" len="med"/>
-                    </a:lnB>
-                    <a:solidFill>
-                      <a:srgbClr val="211E28"/>
-                    </a:solidFill>
-                  </a:tcPr>
-                </a:tc>
-                <a:tc>
-                  <a:txBody>
-                    <a:bodyPr/>
-                    <a:lstStyle/>
-                    <a:p>
-                      <a:pPr indent="0" marL="0">
-                        <a:lnSpc>
-                          <a:spcPts val="1680"/>
-                        </a:lnSpc>
-                        <a:buNone/>
-                      </a:pPr>
-                      <a:r>
-                        <a:rPr lang="en-US" sz="1200" b="1" dirty="0">
-                          <a:solidFill>
-                            <a:srgbClr val="ECEAF0"/>
-                          </a:solidFill>
-                          <a:latin typeface="Manrope" pitchFamily="34" charset="0"/>
-                          <a:ea typeface="Manrope" pitchFamily="34" charset="-122"/>
-                          <a:cs typeface="Manrope" pitchFamily="34" charset="-120"/>
-                        </a:rPr>
-                        <a:t>Adversarial</a:t>
-                      </a:r>
-                      <a:endParaRPr lang="en-US" sz="1200" dirty="0">
-                        <a:latin typeface="Manrope" charset="0"/>
-                        <a:ea typeface="Manrope" charset="0"/>
-                        <a:cs typeface="Manrope" charset="0"/>
-                      </a:endParaRPr>
-                    </a:p>
-                  </a:txBody>
-                  <a:tcPr marL="76200" marR="76200" marT="25400" marB="25400" anchor="t">
-                    <a:lnL w="12700" cap="flat" cmpd="sng" algn="ctr">
-                      <a:solidFill>
-                        <a:srgbClr val="514E55"/>
-                      </a:solidFill>
-                      <a:prstDash val="solid"/>
-                      <a:round/>
-                      <a:headEnd type="none" w="med" len="med"/>
-                      <a:tailEnd type="none" w="med" len="med"/>
-                    </a:lnL>
-                    <a:lnR w="12700" cap="flat" cmpd="sng" algn="ctr">
-                      <a:solidFill>
-                        <a:srgbClr val="514E55"/>
-                      </a:solidFill>
-                      <a:prstDash val="solid"/>
-                      <a:round/>
-                      <a:headEnd type="none" w="med" len="med"/>
-                      <a:tailEnd type="none" w="med" len="med"/>
-                    </a:lnR>
-                    <a:lnT w="12700" cap="flat" cmpd="sng" algn="ctr">
-                      <a:solidFill>
-                        <a:srgbClr val="48464B"/>
-                      </a:solidFill>
-                      <a:prstDash val="solid"/>
-                      <a:round/>
-                      <a:headEnd type="none" w="med" len="med"/>
-                      <a:tailEnd type="none" w="med" len="med"/>
-                    </a:lnT>
-                    <a:lnB w="12700" cap="flat" cmpd="sng" algn="ctr">
-                      <a:solidFill>
-                        <a:srgbClr val="514E55"/>
-                      </a:solidFill>
-                      <a:prstDash val="solid"/>
-                      <a:round/>
-                      <a:headEnd type="none" w="med" len="med"/>
-                      <a:tailEnd type="none" w="med" len="med"/>
-                    </a:lnB>
-                    <a:solidFill>
-                      <a:srgbClr val="211E28"/>
-                    </a:solidFill>
-                  </a:tcPr>
-                </a:tc>
-                <a:tc>
-                  <a:txBody>
-                    <a:bodyPr/>
-                    <a:lstStyle/>
-                    <a:p>
-                      <a:pPr indent="0" marL="0">
-                        <a:lnSpc>
-                          <a:spcPts val="1680"/>
-                        </a:lnSpc>
-                        <a:buNone/>
-                      </a:pPr>
-                      <a:r>
-                        <a:rPr lang="en-US" sz="1200" b="1" dirty="0">
-                          <a:solidFill>
-                            <a:srgbClr val="ECEAF0"/>
-                          </a:solidFill>
-                          <a:latin typeface="Manrope" pitchFamily="34" charset="0"/>
-                          <a:ea typeface="Manrope" pitchFamily="34" charset="-122"/>
-                          <a:cs typeface="Manrope" pitchFamily="34" charset="-120"/>
-                        </a:rPr>
-                        <a:t>Jubilación</a:t>
-                      </a:r>
-                      <a:endParaRPr lang="en-US" sz="1200" dirty="0">
-                        <a:latin typeface="Manrope" charset="0"/>
-                        <a:ea typeface="Manrope" charset="0"/>
-                        <a:cs typeface="Manrope" charset="0"/>
-                      </a:endParaRPr>
-                    </a:p>
-                  </a:txBody>
-                  <a:tcPr marL="76200" marR="76200" marT="25400" marB="25400" anchor="t">
-                    <a:lnL w="12700" cap="flat" cmpd="sng" algn="ctr">
-                      <a:solidFill>
-                        <a:srgbClr val="514E55"/>
-                      </a:solidFill>
-                      <a:prstDash val="solid"/>
-                      <a:round/>
-                      <a:headEnd type="none" w="med" len="med"/>
-                      <a:tailEnd type="none" w="med" len="med"/>
-                    </a:lnL>
-                    <a:lnR w="12700" cap="flat" cmpd="sng" algn="ctr">
-                      <a:solidFill>
-                        <a:srgbClr val="514E55"/>
-                      </a:solidFill>
-                      <a:prstDash val="solid"/>
-                      <a:round/>
-                      <a:headEnd type="none" w="med" len="med"/>
-                      <a:tailEnd type="none" w="med" len="med"/>
-                    </a:lnR>
-                    <a:lnT w="12700" cap="flat" cmpd="sng" algn="ctr">
-                      <a:solidFill>
-                        <a:srgbClr val="48464B"/>
-                      </a:solidFill>
-                      <a:prstDash val="solid"/>
-                      <a:round/>
-                      <a:headEnd type="none" w="med" len="med"/>
-                      <a:tailEnd type="none" w="med" len="med"/>
-                    </a:lnT>
-                    <a:lnB w="12700" cap="flat" cmpd="sng" algn="ctr">
-                      <a:solidFill>
-                        <a:srgbClr val="514E55"/>
-                      </a:solidFill>
-                      <a:prstDash val="solid"/>
-                      <a:round/>
-                      <a:headEnd type="none" w="med" len="med"/>
-                      <a:tailEnd type="none" w="med" len="med"/>
-                    </a:lnB>
-                    <a:solidFill>
-                      <a:srgbClr val="211E28"/>
-                    </a:solidFill>
-                  </a:tcPr>
-                </a:tc>
-                <a:tc>
-                  <a:txBody>
-                    <a:bodyPr/>
-                    <a:lstStyle/>
-                    <a:p>
-                      <a:pPr indent="0" marL="0">
-                        <a:lnSpc>
-                          <a:spcPts val="1680"/>
-                        </a:lnSpc>
-                        <a:buNone/>
-                      </a:pPr>
-                      <a:r>
-                        <a:rPr lang="en-US" sz="1200" b="1" dirty="0">
-                          <a:solidFill>
-                            <a:srgbClr val="ECEAF0"/>
-                          </a:solidFill>
-                          <a:latin typeface="Manrope" pitchFamily="34" charset="0"/>
-                          <a:ea typeface="Manrope" pitchFamily="34" charset="-122"/>
-                          <a:cs typeface="Manrope" pitchFamily="34" charset="-120"/>
-                        </a:rPr>
-                        <a:t>Boda</a:t>
-                      </a:r>
-                      <a:endParaRPr lang="en-US" sz="1200" dirty="0">
-                        <a:latin typeface="Manrope" charset="0"/>
-                        <a:ea typeface="Manrope" charset="0"/>
-                        <a:cs typeface="Manrope" charset="0"/>
-                      </a:endParaRPr>
-                    </a:p>
-                  </a:txBody>
-                  <a:tcPr marL="76200" marR="76200" marT="25400" marB="25400" anchor="t">
-                    <a:lnL w="12700" cap="flat" cmpd="sng" algn="ctr">
-                      <a:solidFill>
-                        <a:srgbClr val="514E55"/>
-                      </a:solidFill>
-                      <a:prstDash val="solid"/>
-                      <a:round/>
-                      <a:headEnd type="none" w="med" len="med"/>
-                      <a:tailEnd type="none" w="med" len="med"/>
-                    </a:lnL>
-                    <a:lnR w="12700" cap="flat" cmpd="sng" algn="ctr">
-                      <a:solidFill>
-                        <a:srgbClr val="514E55"/>
-                      </a:solidFill>
-                      <a:prstDash val="solid"/>
-                      <a:round/>
-                      <a:headEnd type="none" w="med" len="med"/>
-                      <a:tailEnd type="none" w="med" len="med"/>
-                    </a:lnR>
-                    <a:lnT w="12700" cap="flat" cmpd="sng" algn="ctr">
-                      <a:solidFill>
-                        <a:srgbClr val="48464B"/>
-                      </a:solidFill>
-                      <a:prstDash val="solid"/>
-                      <a:round/>
-                      <a:headEnd type="none" w="med" len="med"/>
-                      <a:tailEnd type="none" w="med" len="med"/>
-                    </a:lnT>
-                    <a:lnB w="12700" cap="flat" cmpd="sng" algn="ctr">
-                      <a:solidFill>
-                        <a:srgbClr val="514E55"/>
-                      </a:solidFill>
-                      <a:prstDash val="solid"/>
-                      <a:round/>
-                      <a:headEnd type="none" w="med" len="med"/>
-                      <a:tailEnd type="none" w="med" len="med"/>
-                    </a:lnB>
-                    <a:solidFill>
-                      <a:srgbClr val="211E28"/>
-                    </a:solidFill>
-                  </a:tcPr>
-                </a:tc>
-                <a:tc>
-                  <a:txBody>
-                    <a:bodyPr/>
-                    <a:lstStyle/>
-                    <a:p>
-                      <a:pPr indent="0" marL="0">
-                        <a:lnSpc>
-                          <a:spcPts val="1680"/>
-                        </a:lnSpc>
-                        <a:buNone/>
-                      </a:pPr>
-                      <a:r>
-                        <a:rPr lang="en-US" sz="1200" b="1" dirty="0">
-                          <a:solidFill>
-                            <a:srgbClr val="ECEAF0"/>
-                          </a:solidFill>
-                          <a:latin typeface="Manrope" pitchFamily="34" charset="0"/>
-                          <a:ea typeface="Manrope" pitchFamily="34" charset="-122"/>
-                          <a:cs typeface="Manrope" pitchFamily="34" charset="-120"/>
-                        </a:rPr>
-                        <a:t>Incoherencia temporal</a:t>
-                      </a:r>
-                      <a:endParaRPr lang="en-US" sz="1200" dirty="0">
-                        <a:latin typeface="Manrope" charset="0"/>
-                        <a:ea typeface="Manrope" charset="0"/>
-                        <a:cs typeface="Manrope" charset="0"/>
-                      </a:endParaRPr>
-                    </a:p>
-                  </a:txBody>
-                  <a:tcPr marL="76200" marR="76200" marT="25400" marB="25400" anchor="t">
-                    <a:lnL w="12700" cap="flat" cmpd="sng" algn="ctr">
-                      <a:solidFill>
-                        <a:srgbClr val="514E55"/>
-                      </a:solidFill>
-                      <a:prstDash val="solid"/>
-                      <a:round/>
-                      <a:headEnd type="none" w="med" len="med"/>
-                      <a:tailEnd type="none" w="med" len="med"/>
-                    </a:lnL>
-                    <a:lnR w="12700" cap="flat" cmpd="sng" algn="ctr">
-                      <a:solidFill>
-                        <a:srgbClr val="514E55"/>
-                      </a:solidFill>
-                      <a:prstDash val="solid"/>
-                      <a:round/>
-                      <a:headEnd type="none" w="med" len="med"/>
-                      <a:tailEnd type="none" w="med" len="med"/>
-                    </a:lnR>
-                    <a:lnT w="12700" cap="flat" cmpd="sng" algn="ctr">
-                      <a:solidFill>
-                        <a:srgbClr val="48464B"/>
-                      </a:solidFill>
-                      <a:prstDash val="solid"/>
-                      <a:round/>
-                      <a:headEnd type="none" w="med" len="med"/>
-                      <a:tailEnd type="none" w="med" len="med"/>
-                    </a:lnT>
-                    <a:lnB w="12700" cap="flat" cmpd="sng" algn="ctr">
-                      <a:solidFill>
-                        <a:srgbClr val="514E55"/>
-                      </a:solidFill>
-                      <a:prstDash val="solid"/>
-                      <a:round/>
-                      <a:headEnd type="none" w="med" len="med"/>
-                      <a:tailEnd type="none" w="med" len="med"/>
-                    </a:lnB>
-                    <a:solidFill>
-                      <a:srgbClr val="211E28"/>
-                    </a:solidFill>
-                  </a:tcPr>
-                </a:tc>
-              </a:tr>
-              <a:tr h="238720">
-                <a:tc>
-                  <a:txBody>
-                    <a:bodyPr/>
-                    <a:lstStyle/>
-                    <a:p>
-                      <a:pPr indent="0" marL="0">
-                        <a:lnSpc>
-                          <a:spcPts val="1680"/>
-                        </a:lnSpc>
-                        <a:buNone/>
-                      </a:pPr>
-                      <a:r>
-                        <a:rPr lang="en-US" sz="1200" dirty="0">
-                          <a:solidFill>
-                            <a:srgbClr val="A9A4B5"/>
-                          </a:solidFill>
-                          <a:latin typeface="Manrope" pitchFamily="34" charset="0"/>
-                          <a:ea typeface="Manrope" pitchFamily="34" charset="-122"/>
-                          <a:cs typeface="Manrope" pitchFamily="34" charset="-120"/>
-                        </a:rPr>
-                        <a:t>Modelo</a:t>
-                      </a:r>
-                      <a:endParaRPr lang="en-US" sz="1200" dirty="0">
-                        <a:latin typeface="Manrope" charset="0"/>
-                        <a:ea typeface="Manrope" charset="0"/>
-                        <a:cs typeface="Manrope" charset="0"/>
-                      </a:endParaRPr>
-                    </a:p>
-                  </a:txBody>
-                  <a:tcPr marL="76200" marR="76200" marT="25400" marB="25400" anchor="t">
-                    <a:lnL w="12700" cap="flat" cmpd="sng" algn="ctr">
-                      <a:solidFill>
-                        <a:srgbClr val="48464B"/>
-                      </a:solidFill>
-                      <a:prstDash val="solid"/>
-                      <a:round/>
-                      <a:headEnd type="none" w="med" len="med"/>
-                      <a:tailEnd type="none" w="med" len="med"/>
-                    </a:lnL>
-                    <a:lnR w="12700" cap="flat" cmpd="sng" algn="ctr">
-                      <a:solidFill>
-                        <a:srgbClr val="48464B"/>
-                      </a:solidFill>
-                      <a:prstDash val="solid"/>
-                      <a:round/>
-                      <a:headEnd type="none" w="med" len="med"/>
-                      <a:tailEnd type="none" w="med" len="med"/>
-                    </a:lnR>
-                    <a:lnT w="12700" cap="flat" cmpd="sng" algn="ctr">
-                      <a:solidFill>
-                        <a:srgbClr val="514E55"/>
-                      </a:solidFill>
-                      <a:prstDash val="solid"/>
-                      <a:round/>
-                      <a:headEnd type="none" w="med" len="med"/>
-                      <a:tailEnd type="none" w="med" len="med"/>
-                    </a:lnT>
-                    <a:lnB w="12700" cap="flat" cmpd="sng" algn="ctr">
-                      <a:solidFill>
-                        <a:srgbClr val="48464B"/>
-                      </a:solidFill>
-                      <a:prstDash val="solid"/>
-                      <a:round/>
-                      <a:headEnd type="none" w="med" len="med"/>
-                      <a:tailEnd type="none" w="med" len="med"/>
-                    </a:lnB>
-                  </a:tcPr>
-                </a:tc>
-                <a:tc>
-                  <a:txBody>
-                    <a:bodyPr/>
-                    <a:lstStyle/>
-                    <a:p>
-                      <a:pPr indent="0" marL="0">
-                        <a:lnSpc>
-                          <a:spcPts val="1680"/>
-                        </a:lnSpc>
-                        <a:buNone/>
-                      </a:pPr>
-                      <a:r>
-                        <a:rPr lang="en-US" sz="1200" dirty="0">
-                          <a:solidFill>
-                            <a:srgbClr val="ECEAF0"/>
-                          </a:solidFill>
-                          <a:latin typeface="Manrope" pitchFamily="34" charset="0"/>
-                          <a:ea typeface="Manrope" pitchFamily="34" charset="-122"/>
-                          <a:cs typeface="Manrope" pitchFamily="34" charset="-120"/>
-                        </a:rPr>
-                        <a:t>Opus 5.5</a:t>
-                      </a:r>
-                      <a:endParaRPr lang="en-US" sz="1200" dirty="0">
-                        <a:latin typeface="Manrope" charset="0"/>
-                        <a:ea typeface="Manrope" charset="0"/>
-                        <a:cs typeface="Manrope" charset="0"/>
-                      </a:endParaRPr>
-                    </a:p>
-                  </a:txBody>
-                  <a:tcPr marL="76200" marR="76200" marT="25400" marB="25400" anchor="t">
-                    <a:lnL w="12700" cap="flat" cmpd="sng" algn="ctr">
-                      <a:solidFill>
-                        <a:srgbClr val="48464B"/>
-                      </a:solidFill>
-                      <a:prstDash val="solid"/>
-                      <a:round/>
-                      <a:headEnd type="none" w="med" len="med"/>
-                      <a:tailEnd type="none" w="med" len="med"/>
-                    </a:lnL>
-                    <a:lnR w="12700" cap="flat" cmpd="sng" algn="ctr">
-                      <a:solidFill>
-                        <a:srgbClr val="48464B"/>
-                      </a:solidFill>
-                      <a:prstDash val="solid"/>
-                      <a:round/>
-                      <a:headEnd type="none" w="med" len="med"/>
-                      <a:tailEnd type="none" w="med" len="med"/>
-                    </a:lnR>
-                    <a:lnT w="12700" cap="flat" cmpd="sng" algn="ctr">
-                      <a:solidFill>
-                        <a:srgbClr val="514E55"/>
-                      </a:solidFill>
-                      <a:prstDash val="solid"/>
-                      <a:round/>
-                      <a:headEnd type="none" w="med" len="med"/>
-                      <a:tailEnd type="none" w="med" len="med"/>
-                    </a:lnT>
-                    <a:lnB w="12700" cap="flat" cmpd="sng" algn="ctr">
-                      <a:solidFill>
-                        <a:srgbClr val="48464B"/>
-                      </a:solidFill>
-                      <a:prstDash val="solid"/>
-                      <a:round/>
-                      <a:headEnd type="none" w="med" len="med"/>
-                      <a:tailEnd type="none" w="med" len="med"/>
-                    </a:lnB>
-                  </a:tcPr>
-                </a:tc>
-                <a:tc>
-                  <a:txBody>
-                    <a:bodyPr/>
-                    <a:lstStyle/>
-                    <a:p>
-                      <a:pPr indent="0" marL="0">
-                        <a:lnSpc>
-                          <a:spcPts val="1680"/>
-                        </a:lnSpc>
-                        <a:buNone/>
-                      </a:pPr>
-                      <a:r>
-                        <a:rPr lang="en-US" sz="1200" dirty="0">
-                          <a:solidFill>
-                            <a:srgbClr val="ECEAF0"/>
-                          </a:solidFill>
-                          <a:latin typeface="Manrope" pitchFamily="34" charset="0"/>
-                          <a:ea typeface="Manrope" pitchFamily="34" charset="-122"/>
-                          <a:cs typeface="Manrope" pitchFamily="34" charset="-120"/>
-                        </a:rPr>
-                        <a:t>Opus 5.5</a:t>
-                      </a:r>
-                      <a:endParaRPr lang="en-US" sz="1200" dirty="0">
-                        <a:latin typeface="Manrope" charset="0"/>
-                        <a:ea typeface="Manrope" charset="0"/>
-                        <a:cs typeface="Manrope" charset="0"/>
-                      </a:endParaRPr>
-                    </a:p>
-                  </a:txBody>
-                  <a:tcPr marL="76200" marR="76200" marT="25400" marB="25400" anchor="t">
-                    <a:lnL w="12700" cap="flat" cmpd="sng" algn="ctr">
-                      <a:solidFill>
-                        <a:srgbClr val="48464B"/>
-                      </a:solidFill>
-                      <a:prstDash val="solid"/>
-                      <a:round/>
-                      <a:headEnd type="none" w="med" len="med"/>
-                      <a:tailEnd type="none" w="med" len="med"/>
-                    </a:lnL>
-                    <a:lnR w="12700" cap="flat" cmpd="sng" algn="ctr">
-                      <a:solidFill>
-                        <a:srgbClr val="48464B"/>
-                      </a:solidFill>
-                      <a:prstDash val="solid"/>
-                      <a:round/>
-                      <a:headEnd type="none" w="med" len="med"/>
-                      <a:tailEnd type="none" w="med" len="med"/>
-                    </a:lnR>
-                    <a:lnT w="12700" cap="flat" cmpd="sng" algn="ctr">
-                      <a:solidFill>
-                        <a:srgbClr val="514E55"/>
-                      </a:solidFill>
-                      <a:prstDash val="solid"/>
-                      <a:round/>
-                      <a:headEnd type="none" w="med" len="med"/>
-                      <a:tailEnd type="none" w="med" len="med"/>
-                    </a:lnT>
-                    <a:lnB w="12700" cap="flat" cmpd="sng" algn="ctr">
-                      <a:solidFill>
-                        <a:srgbClr val="48464B"/>
-                      </a:solidFill>
-                      <a:prstDash val="solid"/>
-                      <a:round/>
-                      <a:headEnd type="none" w="med" len="med"/>
-                      <a:tailEnd type="none" w="med" len="med"/>
-                    </a:lnB>
-                  </a:tcPr>
-                </a:tc>
-                <a:tc>
-                  <a:txBody>
-                    <a:bodyPr/>
-                    <a:lstStyle/>
-                    <a:p>
-                      <a:pPr indent="0" marL="0">
-                        <a:lnSpc>
-                          <a:spcPts val="1680"/>
-                        </a:lnSpc>
-                        <a:buNone/>
-                      </a:pPr>
-                      <a:r>
-                        <a:rPr lang="en-US" sz="1200" dirty="0">
-                          <a:solidFill>
-                            <a:srgbClr val="ECEAF0"/>
-                          </a:solidFill>
-                          <a:latin typeface="Manrope" pitchFamily="34" charset="0"/>
-                          <a:ea typeface="Manrope" pitchFamily="34" charset="-122"/>
-                          <a:cs typeface="Manrope" pitchFamily="34" charset="-120"/>
-                        </a:rPr>
-                        <a:t>Opus 5.5</a:t>
-                      </a:r>
-                      <a:endParaRPr lang="en-US" sz="1200" dirty="0">
-                        <a:latin typeface="Manrope" charset="0"/>
-                        <a:ea typeface="Manrope" charset="0"/>
-                        <a:cs typeface="Manrope" charset="0"/>
-                      </a:endParaRPr>
-                    </a:p>
-                  </a:txBody>
-                  <a:tcPr marL="76200" marR="76200" marT="25400" marB="25400" anchor="t">
-                    <a:lnL w="12700" cap="flat" cmpd="sng" algn="ctr">
-                      <a:solidFill>
-                        <a:srgbClr val="48464B"/>
-                      </a:solidFill>
-                      <a:prstDash val="solid"/>
-                      <a:round/>
-                      <a:headEnd type="none" w="med" len="med"/>
-                      <a:tailEnd type="none" w="med" len="med"/>
-                    </a:lnL>
-                    <a:lnR w="12700" cap="flat" cmpd="sng" algn="ctr">
-                      <a:solidFill>
-                        <a:srgbClr val="48464B"/>
-                      </a:solidFill>
-                      <a:prstDash val="solid"/>
-                      <a:round/>
-                      <a:headEnd type="none" w="med" len="med"/>
-                      <a:tailEnd type="none" w="med" len="med"/>
-                    </a:lnR>
-                    <a:lnT w="12700" cap="flat" cmpd="sng" algn="ctr">
-                      <a:solidFill>
-                        <a:srgbClr val="514E55"/>
-                      </a:solidFill>
-                      <a:prstDash val="solid"/>
-                      <a:round/>
-                      <a:headEnd type="none" w="med" len="med"/>
-                      <a:tailEnd type="none" w="med" len="med"/>
-                    </a:lnT>
-                    <a:lnB w="12700" cap="flat" cmpd="sng" algn="ctr">
-                      <a:solidFill>
-                        <a:srgbClr val="48464B"/>
-                      </a:solidFill>
-                      <a:prstDash val="solid"/>
-                      <a:round/>
-                      <a:headEnd type="none" w="med" len="med"/>
-                      <a:tailEnd type="none" w="med" len="med"/>
-                    </a:lnB>
-                  </a:tcPr>
-                </a:tc>
-                <a:tc>
-                  <a:txBody>
-                    <a:bodyPr/>
-                    <a:lstStyle/>
-                    <a:p>
-                      <a:pPr indent="0" marL="0">
-                        <a:lnSpc>
-                          <a:spcPts val="1680"/>
-                        </a:lnSpc>
-                        <a:buNone/>
-                      </a:pPr>
-                      <a:r>
-                        <a:rPr lang="en-US" sz="1200" dirty="0">
-                          <a:solidFill>
-                            <a:srgbClr val="ECEAF0"/>
-                          </a:solidFill>
-                          <a:latin typeface="Manrope" pitchFamily="34" charset="0"/>
-                          <a:ea typeface="Manrope" pitchFamily="34" charset="-122"/>
-                          <a:cs typeface="Manrope" pitchFamily="34" charset="-120"/>
-                        </a:rPr>
-                        <a:t>Sonnet 5</a:t>
-                      </a:r>
-                      <a:endParaRPr lang="en-US" sz="1200" dirty="0">
-                        <a:latin typeface="Manrope" charset="0"/>
-                        <a:ea typeface="Manrope" charset="0"/>
-                        <a:cs typeface="Manrope" charset="0"/>
-                      </a:endParaRPr>
-                    </a:p>
-                  </a:txBody>
-                  <a:tcPr marL="76200" marR="76200" marT="25400" marB="25400" anchor="t">
-                    <a:lnL w="12700" cap="flat" cmpd="sng" algn="ctr">
-                      <a:solidFill>
-                        <a:srgbClr val="48464B"/>
-                      </a:solidFill>
-                      <a:prstDash val="solid"/>
-                      <a:round/>
-                      <a:headEnd type="none" w="med" len="med"/>
-                      <a:tailEnd type="none" w="med" len="med"/>
-                    </a:lnL>
-                    <a:lnR w="12700" cap="flat" cmpd="sng" algn="ctr">
-                      <a:solidFill>
-                        <a:srgbClr val="48464B"/>
-                      </a:solidFill>
-                      <a:prstDash val="solid"/>
-                      <a:round/>
-                      <a:headEnd type="none" w="med" len="med"/>
-                      <a:tailEnd type="none" w="med" len="med"/>
-                    </a:lnR>
-                    <a:lnT w="12700" cap="flat" cmpd="sng" algn="ctr">
-                      <a:solidFill>
-                        <a:srgbClr val="514E55"/>
-                      </a:solidFill>
-                      <a:prstDash val="solid"/>
-                      <a:round/>
-                      <a:headEnd type="none" w="med" len="med"/>
-                      <a:tailEnd type="none" w="med" len="med"/>
-                    </a:lnT>
-                    <a:lnB w="12700" cap="flat" cmpd="sng" algn="ctr">
-                      <a:solidFill>
-                        <a:srgbClr val="48464B"/>
-                      </a:solidFill>
-                      <a:prstDash val="solid"/>
-                      <a:round/>
-                      <a:headEnd type="none" w="med" len="med"/>
-                      <a:tailEnd type="none" w="med" len="med"/>
-                    </a:lnB>
-                  </a:tcPr>
-                </a:tc>
-                <a:tc>
-                  <a:txBody>
-                    <a:bodyPr/>
-                    <a:lstStyle/>
-                    <a:p>
-                      <a:pPr indent="0" marL="0">
-                        <a:lnSpc>
-                          <a:spcPts val="1680"/>
-                        </a:lnSpc>
-                        <a:buNone/>
-                      </a:pPr>
-                      <a:r>
-                        <a:rPr lang="en-US" sz="1200" dirty="0">
-                          <a:solidFill>
-                            <a:srgbClr val="ECEAF0"/>
-                          </a:solidFill>
-                          <a:latin typeface="Manrope" pitchFamily="34" charset="0"/>
-                          <a:ea typeface="Manrope" pitchFamily="34" charset="-122"/>
-                          <a:cs typeface="Manrope" pitchFamily="34" charset="-120"/>
-                        </a:rPr>
-                        <a:t>Sonnet 5</a:t>
-                      </a:r>
-                      <a:endParaRPr lang="en-US" sz="1200" dirty="0">
-                        <a:latin typeface="Manrope" charset="0"/>
-                        <a:ea typeface="Manrope" charset="0"/>
-                        <a:cs typeface="Manrope" charset="0"/>
-                      </a:endParaRPr>
-                    </a:p>
-                  </a:txBody>
-                  <a:tcPr marL="76200" marR="76200" marT="25400" marB="25400" anchor="t">
-                    <a:lnL w="12700" cap="flat" cmpd="sng" algn="ctr">
-                      <a:solidFill>
-                        <a:srgbClr val="48464B"/>
-                      </a:solidFill>
-                      <a:prstDash val="solid"/>
-                      <a:round/>
-                      <a:headEnd type="none" w="med" len="med"/>
-                      <a:tailEnd type="none" w="med" len="med"/>
-                    </a:lnL>
-                    <a:lnR w="12700" cap="flat" cmpd="sng" algn="ctr">
-                      <a:solidFill>
-                        <a:srgbClr val="48464B"/>
-                      </a:solidFill>
-                      <a:prstDash val="solid"/>
-                      <a:round/>
-                      <a:headEnd type="none" w="med" len="med"/>
-                      <a:tailEnd type="none" w="med" len="med"/>
-                    </a:lnR>
-                    <a:lnT w="12700" cap="flat" cmpd="sng" algn="ctr">
-                      <a:solidFill>
-                        <a:srgbClr val="514E55"/>
-                      </a:solidFill>
-                      <a:prstDash val="solid"/>
-                      <a:round/>
-                      <a:headEnd type="none" w="med" len="med"/>
-                      <a:tailEnd type="none" w="med" len="med"/>
-                    </a:lnT>
-                    <a:lnB w="12700" cap="flat" cmpd="sng" algn="ctr">
-                      <a:solidFill>
-                        <a:srgbClr val="48464B"/>
-                      </a:solidFill>
-                      <a:prstDash val="solid"/>
-                      <a:round/>
-                      <a:headEnd type="none" w="med" len="med"/>
-                      <a:tailEnd type="none" w="med" len="med"/>
-                    </a:lnB>
-                  </a:tcPr>
-                </a:tc>
-              </a:tr>
-              <a:tr h="413941">
-                <a:tc>
-                  <a:txBody>
-                    <a:bodyPr/>
-                    <a:lstStyle/>
-                    <a:p>
-                      <a:pPr indent="0" marL="0">
-                        <a:lnSpc>
-                          <a:spcPts val="1680"/>
-                        </a:lnSpc>
-                        <a:buNone/>
-                      </a:pPr>
-                      <a:r>
-                        <a:rPr lang="en-US" sz="1200" dirty="0">
-                          <a:solidFill>
-                            <a:srgbClr val="A9A4B5"/>
-                          </a:solidFill>
-                          <a:latin typeface="Manrope" pitchFamily="34" charset="0"/>
-                          <a:ea typeface="Manrope" pitchFamily="34" charset="-122"/>
-                          <a:cs typeface="Manrope" pitchFamily="34" charset="-120"/>
-                        </a:rPr>
-                        <a:t>Capítulos</a:t>
-                      </a:r>
-                      <a:endParaRPr lang="en-US" sz="1200" dirty="0">
-                        <a:latin typeface="Manrope" charset="0"/>
-                        <a:ea typeface="Manrope" charset="0"/>
-                        <a:cs typeface="Manrope" charset="0"/>
-                      </a:endParaRPr>
-                    </a:p>
-                  </a:txBody>
-                  <a:tcPr marL="76200" marR="76200" marT="25400" marB="25400" anchor="t">
-                    <a:lnL w="12700" cap="flat" cmpd="sng" algn="ctr">
-                      <a:solidFill>
-                        <a:srgbClr val="48464B"/>
-                      </a:solidFill>
-                      <a:prstDash val="solid"/>
-                      <a:round/>
-                      <a:headEnd type="none" w="med" len="med"/>
-                      <a:tailEnd type="none" w="med" len="med"/>
-                    </a:lnL>
-                    <a:lnR w="12700" cap="flat" cmpd="sng" algn="ctr">
-                      <a:solidFill>
-                        <a:srgbClr val="48464B"/>
-                      </a:solidFill>
-                      <a:prstDash val="solid"/>
-                      <a:round/>
-                      <a:headEnd type="none" w="med" len="med"/>
-                      <a:tailEnd type="none" w="med" len="med"/>
-                    </a:lnR>
-                    <a:lnT w="12700" cap="flat" cmpd="sng" algn="ctr">
-                      <a:solidFill>
-                        <a:srgbClr val="48464B"/>
-                      </a:solidFill>
-                      <a:prstDash val="solid"/>
-                      <a:round/>
-                      <a:headEnd type="none" w="med" len="med"/>
-                      <a:tailEnd type="none" w="med" len="med"/>
-                    </a:lnT>
-                    <a:lnB w="12700" cap="flat" cmpd="sng" algn="ctr">
-                      <a:solidFill>
-                        <a:srgbClr val="48464B"/>
-                      </a:solidFill>
-                      <a:prstDash val="solid"/>
-                      <a:round/>
-                      <a:headEnd type="none" w="med" len="med"/>
-                      <a:tailEnd type="none" w="med" len="med"/>
-                    </a:lnB>
-                  </a:tcPr>
-                </a:tc>
-                <a:tc>
-                  <a:txBody>
-                    <a:bodyPr/>
-                    <a:lstStyle/>
-                    <a:p>
-                      <a:pPr indent="0" marL="0">
-                        <a:lnSpc>
-                          <a:spcPts val="1680"/>
-                        </a:lnSpc>
-                        <a:buNone/>
-                      </a:pPr>
-                      <a:r>
-                        <a:rPr lang="en-US" sz="1200" dirty="0">
-                          <a:solidFill>
-                            <a:srgbClr val="ECEAF0"/>
-                          </a:solidFill>
-                          <a:latin typeface="Manrope" pitchFamily="34" charset="0"/>
-                          <a:ea typeface="Manrope" pitchFamily="34" charset="-122"/>
-                          <a:cs typeface="Manrope" pitchFamily="34" charset="-120"/>
-                        </a:rPr>
-                        <a:t>10/10</a:t>
-                      </a:r>
-                      <a:endParaRPr lang="en-US" sz="1200" dirty="0">
-                        <a:latin typeface="Manrope" charset="0"/>
-                        <a:ea typeface="Manrope" charset="0"/>
-                        <a:cs typeface="Manrope" charset="0"/>
-                      </a:endParaRPr>
-                    </a:p>
-                  </a:txBody>
-                  <a:tcPr marL="76200" marR="76200" marT="25400" marB="25400" anchor="t">
-                    <a:lnL w="12700" cap="flat" cmpd="sng" algn="ctr">
-                      <a:solidFill>
-                        <a:srgbClr val="48464B"/>
-                      </a:solidFill>
-                      <a:prstDash val="solid"/>
-                      <a:round/>
-                      <a:headEnd type="none" w="med" len="med"/>
-                      <a:tailEnd type="none" w="med" len="med"/>
-                    </a:lnL>
-                    <a:lnR w="12700" cap="flat" cmpd="sng" algn="ctr">
-                      <a:solidFill>
-                        <a:srgbClr val="48464B"/>
-                      </a:solidFill>
-                      <a:prstDash val="solid"/>
-                      <a:round/>
-                      <a:headEnd type="none" w="med" len="med"/>
-                      <a:tailEnd type="none" w="med" len="med"/>
-                    </a:lnR>
-                    <a:lnT w="12700" cap="flat" cmpd="sng" algn="ctr">
-                      <a:solidFill>
-                        <a:srgbClr val="48464B"/>
-                      </a:solidFill>
-                      <a:prstDash val="solid"/>
-                      <a:round/>
-                      <a:headEnd type="none" w="med" len="med"/>
-                      <a:tailEnd type="none" w="med" len="med"/>
-                    </a:lnT>
-                    <a:lnB w="12700" cap="flat" cmpd="sng" algn="ctr">
-                      <a:solidFill>
-                        <a:srgbClr val="48464B"/>
-                      </a:solidFill>
-                      <a:prstDash val="solid"/>
-                      <a:round/>
-                      <a:headEnd type="none" w="med" len="med"/>
-                      <a:tailEnd type="none" w="med" len="med"/>
-                    </a:lnB>
-                  </a:tcPr>
-                </a:tc>
-                <a:tc>
-                  <a:txBody>
-                    <a:bodyPr/>
-                    <a:lstStyle/>
-                    <a:p>
-                      <a:pPr indent="0" marL="0">
-                        <a:lnSpc>
-                          <a:spcPts val="1680"/>
-                        </a:lnSpc>
-                        <a:buNone/>
-                      </a:pPr>
-                      <a:r>
-                        <a:rPr lang="en-US" sz="1200" dirty="0">
-                          <a:solidFill>
-                            <a:srgbClr val="ECEAF0"/>
-                          </a:solidFill>
-                          <a:latin typeface="Manrope" pitchFamily="34" charset="0"/>
-                          <a:ea typeface="Manrope" pitchFamily="34" charset="-122"/>
-                          <a:cs typeface="Manrope" pitchFamily="34" charset="-120"/>
-                        </a:rPr>
-                        <a:t>2/3 · parada en el cap. 3</a:t>
-                      </a:r>
-                      <a:endParaRPr lang="en-US" sz="1200" dirty="0">
-                        <a:latin typeface="Manrope" charset="0"/>
-                        <a:ea typeface="Manrope" charset="0"/>
-                        <a:cs typeface="Manrope" charset="0"/>
-                      </a:endParaRPr>
-                    </a:p>
-                  </a:txBody>
-                  <a:tcPr marL="76200" marR="76200" marT="25400" marB="25400" anchor="t">
-                    <a:lnL w="12700" cap="flat" cmpd="sng" algn="ctr">
-                      <a:solidFill>
-                        <a:srgbClr val="48464B"/>
-                      </a:solidFill>
-                      <a:prstDash val="solid"/>
-                      <a:round/>
-                      <a:headEnd type="none" w="med" len="med"/>
-                      <a:tailEnd type="none" w="med" len="med"/>
-                    </a:lnL>
-                    <a:lnR w="12700" cap="flat" cmpd="sng" algn="ctr">
-                      <a:solidFill>
-                        <a:srgbClr val="48464B"/>
-                      </a:solidFill>
-                      <a:prstDash val="solid"/>
-                      <a:round/>
-                      <a:headEnd type="none" w="med" len="med"/>
-                      <a:tailEnd type="none" w="med" len="med"/>
-                    </a:lnR>
-                    <a:lnT w="12700" cap="flat" cmpd="sng" algn="ctr">
-                      <a:solidFill>
-                        <a:srgbClr val="48464B"/>
-                      </a:solidFill>
-                      <a:prstDash val="solid"/>
-                      <a:round/>
-                      <a:headEnd type="none" w="med" len="med"/>
-                      <a:tailEnd type="none" w="med" len="med"/>
-                    </a:lnT>
-                    <a:lnB w="12700" cap="flat" cmpd="sng" algn="ctr">
-                      <a:solidFill>
-                        <a:srgbClr val="48464B"/>
-                      </a:solidFill>
-                      <a:prstDash val="solid"/>
-                      <a:round/>
-                      <a:headEnd type="none" w="med" len="med"/>
-                      <a:tailEnd type="none" w="med" len="med"/>
-                    </a:lnB>
-                  </a:tcPr>
-                </a:tc>
-                <a:tc>
-                  <a:txBody>
-                    <a:bodyPr/>
-                    <a:lstStyle/>
-                    <a:p>
-                      <a:pPr indent="0" marL="0">
-                        <a:lnSpc>
-                          <a:spcPts val="1680"/>
-                        </a:lnSpc>
-                        <a:buNone/>
-                      </a:pPr>
-                      <a:r>
-                        <a:rPr lang="en-US" sz="1200" dirty="0">
-                          <a:solidFill>
-                            <a:srgbClr val="ECEAF0"/>
-                          </a:solidFill>
-                          <a:latin typeface="Manrope" pitchFamily="34" charset="0"/>
-                          <a:ea typeface="Manrope" pitchFamily="34" charset="-122"/>
-                          <a:cs typeface="Manrope" pitchFamily="34" charset="-120"/>
-                        </a:rPr>
-                        <a:t>2/3 · parada en el cap. 3</a:t>
-                      </a:r>
-                      <a:endParaRPr lang="en-US" sz="1200" dirty="0">
-                        <a:latin typeface="Manrope" charset="0"/>
-                        <a:ea typeface="Manrope" charset="0"/>
-                        <a:cs typeface="Manrope" charset="0"/>
-                      </a:endParaRPr>
-                    </a:p>
-                  </a:txBody>
-                  <a:tcPr marL="76200" marR="76200" marT="25400" marB="25400" anchor="t">
-                    <a:lnL w="12700" cap="flat" cmpd="sng" algn="ctr">
-                      <a:solidFill>
-                        <a:srgbClr val="48464B"/>
-                      </a:solidFill>
-                      <a:prstDash val="solid"/>
-                      <a:round/>
-                      <a:headEnd type="none" w="med" len="med"/>
-                      <a:tailEnd type="none" w="med" len="med"/>
-                    </a:lnL>
-                    <a:lnR w="12700" cap="flat" cmpd="sng" algn="ctr">
-                      <a:solidFill>
-                        <a:srgbClr val="48464B"/>
-                      </a:solidFill>
-                      <a:prstDash val="solid"/>
-                      <a:round/>
-                      <a:headEnd type="none" w="med" len="med"/>
-                      <a:tailEnd type="none" w="med" len="med"/>
-                    </a:lnR>
-                    <a:lnT w="12700" cap="flat" cmpd="sng" algn="ctr">
-                      <a:solidFill>
-                        <a:srgbClr val="48464B"/>
-                      </a:solidFill>
-                      <a:prstDash val="solid"/>
-                      <a:round/>
-                      <a:headEnd type="none" w="med" len="med"/>
-                      <a:tailEnd type="none" w="med" len="med"/>
-                    </a:lnT>
-                    <a:lnB w="12700" cap="flat" cmpd="sng" algn="ctr">
-                      <a:solidFill>
-                        <a:srgbClr val="48464B"/>
-                      </a:solidFill>
-                      <a:prstDash val="solid"/>
-                      <a:round/>
-                      <a:headEnd type="none" w="med" len="med"/>
-                      <a:tailEnd type="none" w="med" len="med"/>
-                    </a:lnB>
-                  </a:tcPr>
-                </a:tc>
-                <a:tc>
-                  <a:txBody>
-                    <a:bodyPr/>
-                    <a:lstStyle/>
-                    <a:p>
-                      <a:pPr indent="0" marL="0">
-                        <a:lnSpc>
-                          <a:spcPts val="1680"/>
-                        </a:lnSpc>
-                        <a:buNone/>
-                      </a:pPr>
-                      <a:r>
-                        <a:rPr lang="en-US" sz="1200" dirty="0">
-                          <a:solidFill>
-                            <a:srgbClr val="ECEAF0"/>
-                          </a:solidFill>
-                          <a:latin typeface="Manrope" pitchFamily="34" charset="0"/>
-                          <a:ea typeface="Manrope" pitchFamily="34" charset="-122"/>
-                          <a:cs typeface="Manrope" pitchFamily="34" charset="-120"/>
-                        </a:rPr>
-                        <a:t>0/4 · parada en el cap. 1</a:t>
-                      </a:r>
-                      <a:endParaRPr lang="en-US" sz="1200" dirty="0">
-                        <a:latin typeface="Manrope" charset="0"/>
-                        <a:ea typeface="Manrope" charset="0"/>
-                        <a:cs typeface="Manrope" charset="0"/>
-                      </a:endParaRPr>
-                    </a:p>
-                  </a:txBody>
-                  <a:tcPr marL="76200" marR="76200" marT="25400" marB="25400" anchor="t">
-                    <a:lnL w="12700" cap="flat" cmpd="sng" algn="ctr">
-                      <a:solidFill>
-                        <a:srgbClr val="48464B"/>
-                      </a:solidFill>
-                      <a:prstDash val="solid"/>
-                      <a:round/>
-                      <a:headEnd type="none" w="med" len="med"/>
-                      <a:tailEnd type="none" w="med" len="med"/>
-                    </a:lnL>
-                    <a:lnR w="12700" cap="flat" cmpd="sng" algn="ctr">
-                      <a:solidFill>
-                        <a:srgbClr val="48464B"/>
-                      </a:solidFill>
-                      <a:prstDash val="solid"/>
-                      <a:round/>
-                      <a:headEnd type="none" w="med" len="med"/>
-                      <a:tailEnd type="none" w="med" len="med"/>
-                    </a:lnR>
-                    <a:lnT w="12700" cap="flat" cmpd="sng" algn="ctr">
-                      <a:solidFill>
-                        <a:srgbClr val="48464B"/>
-                      </a:solidFill>
-                      <a:prstDash val="solid"/>
-                      <a:round/>
-                      <a:headEnd type="none" w="med" len="med"/>
-                      <a:tailEnd type="none" w="med" len="med"/>
-                    </a:lnT>
-                    <a:lnB w="12700" cap="flat" cmpd="sng" algn="ctr">
-                      <a:solidFill>
-                        <a:srgbClr val="48464B"/>
-                      </a:solidFill>
-                      <a:prstDash val="solid"/>
-                      <a:round/>
-                      <a:headEnd type="none" w="med" len="med"/>
-                      <a:tailEnd type="none" w="med" len="med"/>
-                    </a:lnB>
-                  </a:tcPr>
-                </a:tc>
-                <a:tc>
-                  <a:txBody>
-                    <a:bodyPr/>
-                    <a:lstStyle/>
-                    <a:p>
-                      <a:pPr indent="0" marL="0">
-                        <a:lnSpc>
-                          <a:spcPts val="1680"/>
-                        </a:lnSpc>
-                        <a:buNone/>
-                      </a:pPr>
-                      <a:r>
-                        <a:rPr lang="en-US" sz="1200" dirty="0">
-                          <a:solidFill>
-                            <a:srgbClr val="ECEAF0"/>
-                          </a:solidFill>
-                          <a:latin typeface="Manrope" pitchFamily="34" charset="0"/>
-                          <a:ea typeface="Manrope" pitchFamily="34" charset="-122"/>
-                          <a:cs typeface="Manrope" pitchFamily="34" charset="-120"/>
-                        </a:rPr>
-                        <a:t>1/4 · parada en el cap. 2</a:t>
-                      </a:r>
-                      <a:endParaRPr lang="en-US" sz="1200" dirty="0">
-                        <a:latin typeface="Manrope" charset="0"/>
-                        <a:ea typeface="Manrope" charset="0"/>
-                        <a:cs typeface="Manrope" charset="0"/>
-                      </a:endParaRPr>
-                    </a:p>
-                  </a:txBody>
-                  <a:tcPr marL="76200" marR="76200" marT="25400" marB="25400" anchor="t">
-                    <a:lnL w="12700" cap="flat" cmpd="sng" algn="ctr">
-                      <a:solidFill>
-                        <a:srgbClr val="48464B"/>
-                      </a:solidFill>
-                      <a:prstDash val="solid"/>
-                      <a:round/>
-                      <a:headEnd type="none" w="med" len="med"/>
-                      <a:tailEnd type="none" w="med" len="med"/>
-                    </a:lnL>
-                    <a:lnR w="12700" cap="flat" cmpd="sng" algn="ctr">
-                      <a:solidFill>
-                        <a:srgbClr val="48464B"/>
-                      </a:solidFill>
-                      <a:prstDash val="solid"/>
-                      <a:round/>
-                      <a:headEnd type="none" w="med" len="med"/>
-                      <a:tailEnd type="none" w="med" len="med"/>
-                    </a:lnR>
-                    <a:lnT w="12700" cap="flat" cmpd="sng" algn="ctr">
-                      <a:solidFill>
-                        <a:srgbClr val="48464B"/>
-                      </a:solidFill>
-                      <a:prstDash val="solid"/>
-                      <a:round/>
-                      <a:headEnd type="none" w="med" len="med"/>
-                      <a:tailEnd type="none" w="med" len="med"/>
-                    </a:lnT>
-                    <a:lnB w="12700" cap="flat" cmpd="sng" algn="ctr">
-                      <a:solidFill>
-                        <a:srgbClr val="48464B"/>
-                      </a:solidFill>
-                      <a:prstDash val="solid"/>
-                      <a:round/>
-                      <a:headEnd type="none" w="med" len="med"/>
-                      <a:tailEnd type="none" w="med" len="med"/>
-                    </a:lnB>
-                  </a:tcPr>
-                </a:tc>
-              </a:tr>
-              <a:tr h="238720">
-                <a:tc>
-                  <a:txBody>
-                    <a:bodyPr/>
-                    <a:lstStyle/>
-                    <a:p>
-                      <a:pPr indent="0" marL="0">
-                        <a:lnSpc>
-                          <a:spcPts val="1680"/>
-                        </a:lnSpc>
-                        <a:buNone/>
-                      </a:pPr>
-                      <a:r>
-                        <a:rPr lang="en-US" sz="1200" dirty="0">
-                          <a:solidFill>
-                            <a:srgbClr val="A9A4B5"/>
-                          </a:solidFill>
-                          <a:latin typeface="Manrope" pitchFamily="34" charset="0"/>
-                          <a:ea typeface="Manrope" pitchFamily="34" charset="-122"/>
-                          <a:cs typeface="Manrope" pitchFamily="34" charset="-120"/>
-                        </a:rPr>
-                        <a:t>Entrevistador · inyección</a:t>
-                      </a:r>
-                      <a:endParaRPr lang="en-US" sz="1200" dirty="0">
-                        <a:latin typeface="Manrope" charset="0"/>
-                        <a:ea typeface="Manrope" charset="0"/>
-                        <a:cs typeface="Manrope" charset="0"/>
-                      </a:endParaRPr>
-                    </a:p>
-                  </a:txBody>
-                  <a:tcPr marL="76200" marR="76200" marT="25400" marB="25400" anchor="t">
-                    <a:lnL w="12700" cap="flat" cmpd="sng" algn="ctr">
-                      <a:solidFill>
-                        <a:srgbClr val="48464B"/>
-                      </a:solidFill>
-                      <a:prstDash val="solid"/>
-                      <a:round/>
-                      <a:headEnd type="none" w="med" len="med"/>
-                      <a:tailEnd type="none" w="med" len="med"/>
-                    </a:lnL>
-                    <a:lnR w="12700" cap="flat" cmpd="sng" algn="ctr">
-                      <a:solidFill>
-                        <a:srgbClr val="48464B"/>
-                      </a:solidFill>
-                      <a:prstDash val="solid"/>
-                      <a:round/>
-                      <a:headEnd type="none" w="med" len="med"/>
-                      <a:tailEnd type="none" w="med" len="med"/>
-                    </a:lnR>
-                    <a:lnT w="12700" cap="flat" cmpd="sng" algn="ctr">
-                      <a:solidFill>
-                        <a:srgbClr val="48464B"/>
-                      </a:solidFill>
-                      <a:prstDash val="solid"/>
-                      <a:round/>
-                      <a:headEnd type="none" w="med" len="med"/>
-                      <a:tailEnd type="none" w="med" len="med"/>
-                    </a:lnT>
-                    <a:lnB w="12700" cap="flat" cmpd="sng" algn="ctr">
-                      <a:solidFill>
-                        <a:srgbClr val="48464B"/>
-                      </a:solidFill>
-                      <a:prstDash val="solid"/>
-                      <a:round/>
-                      <a:headEnd type="none" w="med" len="med"/>
-                      <a:tailEnd type="none" w="med" len="med"/>
-                    </a:lnB>
-                  </a:tcPr>
-                </a:tc>
-                <a:tc>
-                  <a:txBody>
-                    <a:bodyPr/>
-                    <a:lstStyle/>
-                    <a:p>
-                      <a:pPr indent="0" marL="0">
-                        <a:lnSpc>
-                          <a:spcPts val="1680"/>
-                        </a:lnSpc>
-                        <a:buNone/>
-                      </a:pPr>
-                      <a:r>
-                        <a:rPr lang="en-US" sz="1200" dirty="0">
-                          <a:solidFill>
-                            <a:srgbClr val="A9A4B5"/>
-                          </a:solidFill>
-                          <a:latin typeface="Manrope" pitchFamily="34" charset="0"/>
-                          <a:ea typeface="Manrope" pitchFamily="34" charset="-122"/>
-                          <a:cs typeface="Manrope" pitchFamily="34" charset="-120"/>
-                        </a:rPr>
-                        <a:t>no aplica</a:t>
-                      </a:r>
-                      <a:endParaRPr lang="en-US" sz="1200" dirty="0">
-                        <a:latin typeface="Manrope" charset="0"/>
-                        <a:ea typeface="Manrope" charset="0"/>
-                        <a:cs typeface="Manrope" charset="0"/>
-                      </a:endParaRPr>
-                    </a:p>
-                  </a:txBody>
-                  <a:tcPr marL="76200" marR="76200" marT="25400" marB="25400" anchor="t">
-                    <a:lnL w="12700" cap="flat" cmpd="sng" algn="ctr">
-                      <a:solidFill>
-                        <a:srgbClr val="48464B"/>
-                      </a:solidFill>
-                      <a:prstDash val="solid"/>
-                      <a:round/>
-                      <a:headEnd type="none" w="med" len="med"/>
-                      <a:tailEnd type="none" w="med" len="med"/>
-                    </a:lnL>
-                    <a:lnR w="12700" cap="flat" cmpd="sng" algn="ctr">
-                      <a:solidFill>
-                        <a:srgbClr val="48464B"/>
-                      </a:solidFill>
-                      <a:prstDash val="solid"/>
-                      <a:round/>
-                      <a:headEnd type="none" w="med" len="med"/>
-                      <a:tailEnd type="none" w="med" len="med"/>
-                    </a:lnR>
-                    <a:lnT w="12700" cap="flat" cmpd="sng" algn="ctr">
-                      <a:solidFill>
-                        <a:srgbClr val="48464B"/>
-                      </a:solidFill>
-                      <a:prstDash val="solid"/>
-                      <a:round/>
-                      <a:headEnd type="none" w="med" len="med"/>
-                      <a:tailEnd type="none" w="med" len="med"/>
-                    </a:lnT>
-                    <a:lnB w="12700" cap="flat" cmpd="sng" algn="ctr">
-                      <a:solidFill>
-                        <a:srgbClr val="48464B"/>
-                      </a:solidFill>
-                      <a:prstDash val="solid"/>
-                      <a:round/>
-                      <a:headEnd type="none" w="med" len="med"/>
-                      <a:tailEnd type="none" w="med" len="med"/>
-                    </a:lnB>
-                  </a:tcPr>
-                </a:tc>
-                <a:tc>
-                  <a:txBody>
-                    <a:bodyPr/>
-                    <a:lstStyle/>
-                    <a:p>
-                      <a:pPr indent="0" marL="0">
-                        <a:lnSpc>
-                          <a:spcPts val="1680"/>
-                        </a:lnSpc>
-                        <a:buNone/>
-                      </a:pPr>
-                      <a:r>
-                        <a:rPr lang="en-US" sz="1200" dirty="0">
-                          <a:solidFill>
-                            <a:srgbClr val="E0975A"/>
-                          </a:solidFill>
-                          <a:latin typeface="Manrope" pitchFamily="34" charset="0"/>
-                          <a:ea typeface="Manrope" pitchFamily="34" charset="-122"/>
-                          <a:cs typeface="Manrope" pitchFamily="34" charset="-120"/>
-                        </a:rPr>
-                        <a:t>✓ detecta 3/3</a:t>
-                      </a:r>
-                      <a:endParaRPr lang="en-US" sz="1200" dirty="0">
-                        <a:latin typeface="Manrope" charset="0"/>
-                        <a:ea typeface="Manrope" charset="0"/>
-                        <a:cs typeface="Manrope" charset="0"/>
-                      </a:endParaRPr>
-                    </a:p>
-                  </a:txBody>
-                  <a:tcPr marL="76200" marR="76200" marT="25400" marB="25400" anchor="t">
-                    <a:lnL w="12700" cap="flat" cmpd="sng" algn="ctr">
-                      <a:solidFill>
-                        <a:srgbClr val="48464B"/>
-                      </a:solidFill>
-                      <a:prstDash val="solid"/>
-                      <a:round/>
-                      <a:headEnd type="none" w="med" len="med"/>
-                      <a:tailEnd type="none" w="med" len="med"/>
-                    </a:lnL>
-                    <a:lnR w="12700" cap="flat" cmpd="sng" algn="ctr">
-                      <a:solidFill>
-                        <a:srgbClr val="48464B"/>
-                      </a:solidFill>
-                      <a:prstDash val="solid"/>
-                      <a:round/>
-                      <a:headEnd type="none" w="med" len="med"/>
-                      <a:tailEnd type="none" w="med" len="med"/>
-                    </a:lnR>
-                    <a:lnT w="12700" cap="flat" cmpd="sng" algn="ctr">
-                      <a:solidFill>
-                        <a:srgbClr val="48464B"/>
-                      </a:solidFill>
-                      <a:prstDash val="solid"/>
-                      <a:round/>
-                      <a:headEnd type="none" w="med" len="med"/>
-                      <a:tailEnd type="none" w="med" len="med"/>
-                    </a:lnT>
-                    <a:lnB w="12700" cap="flat" cmpd="sng" algn="ctr">
-                      <a:solidFill>
-                        <a:srgbClr val="48464B"/>
-                      </a:solidFill>
-                      <a:prstDash val="solid"/>
-                      <a:round/>
-                      <a:headEnd type="none" w="med" len="med"/>
-                      <a:tailEnd type="none" w="med" len="med"/>
-                    </a:lnB>
-                  </a:tcPr>
-                </a:tc>
-                <a:tc>
-                  <a:txBody>
-                    <a:bodyPr/>
-                    <a:lstStyle/>
-                    <a:p>
-                      <a:pPr indent="0" marL="0">
-                        <a:lnSpc>
-                          <a:spcPts val="1680"/>
-                        </a:lnSpc>
-                        <a:buNone/>
-                      </a:pPr>
-                      <a:r>
-                        <a:rPr lang="en-US" sz="1200" dirty="0">
-                          <a:solidFill>
-                            <a:srgbClr val="A9A4B5"/>
-                          </a:solidFill>
-                          <a:latin typeface="Manrope" pitchFamily="34" charset="0"/>
-                          <a:ea typeface="Manrope" pitchFamily="34" charset="-122"/>
-                          <a:cs typeface="Manrope" pitchFamily="34" charset="-120"/>
-                        </a:rPr>
-                        <a:t>no aplica</a:t>
-                      </a:r>
-                      <a:endParaRPr lang="en-US" sz="1200" dirty="0">
-                        <a:latin typeface="Manrope" charset="0"/>
-                        <a:ea typeface="Manrope" charset="0"/>
-                        <a:cs typeface="Manrope" charset="0"/>
-                      </a:endParaRPr>
-                    </a:p>
-                  </a:txBody>
-                  <a:tcPr marL="76200" marR="76200" marT="25400" marB="25400" anchor="t">
-                    <a:lnL w="12700" cap="flat" cmpd="sng" algn="ctr">
-                      <a:solidFill>
-                        <a:srgbClr val="48464B"/>
-                      </a:solidFill>
-                      <a:prstDash val="solid"/>
-                      <a:round/>
-                      <a:headEnd type="none" w="med" len="med"/>
-                      <a:tailEnd type="none" w="med" len="med"/>
-                    </a:lnL>
-                    <a:lnR w="12700" cap="flat" cmpd="sng" algn="ctr">
-                      <a:solidFill>
-                        <a:srgbClr val="48464B"/>
-                      </a:solidFill>
-                      <a:prstDash val="solid"/>
-                      <a:round/>
-                      <a:headEnd type="none" w="med" len="med"/>
-                      <a:tailEnd type="none" w="med" len="med"/>
-                    </a:lnR>
-                    <a:lnT w="12700" cap="flat" cmpd="sng" algn="ctr">
-                      <a:solidFill>
-                        <a:srgbClr val="48464B"/>
-                      </a:solidFill>
-                      <a:prstDash val="solid"/>
-                      <a:round/>
-                      <a:headEnd type="none" w="med" len="med"/>
-                      <a:tailEnd type="none" w="med" len="med"/>
-                    </a:lnT>
-                    <a:lnB w="12700" cap="flat" cmpd="sng" algn="ctr">
-                      <a:solidFill>
-                        <a:srgbClr val="48464B"/>
-                      </a:solidFill>
-                      <a:prstDash val="solid"/>
-                      <a:round/>
-                      <a:headEnd type="none" w="med" len="med"/>
-                      <a:tailEnd type="none" w="med" len="med"/>
-                    </a:lnB>
-                  </a:tcPr>
-                </a:tc>
-                <a:tc>
-                  <a:txBody>
-                    <a:bodyPr/>
-                    <a:lstStyle/>
-                    <a:p>
-                      <a:pPr indent="0" marL="0">
-                        <a:lnSpc>
-                          <a:spcPts val="1680"/>
-                        </a:lnSpc>
-                        <a:buNone/>
-                      </a:pPr>
-                      <a:r>
-                        <a:rPr lang="en-US" sz="1200" dirty="0">
-                          <a:solidFill>
-                            <a:srgbClr val="A9A4B5"/>
-                          </a:solidFill>
-                          <a:latin typeface="Manrope" pitchFamily="34" charset="0"/>
-                          <a:ea typeface="Manrope" pitchFamily="34" charset="-122"/>
-                          <a:cs typeface="Manrope" pitchFamily="34" charset="-120"/>
-                        </a:rPr>
-                        <a:t>no aplica</a:t>
-                      </a:r>
-                      <a:endParaRPr lang="en-US" sz="1200" dirty="0">
-                        <a:latin typeface="Manrope" charset="0"/>
-                        <a:ea typeface="Manrope" charset="0"/>
-                        <a:cs typeface="Manrope" charset="0"/>
-                      </a:endParaRPr>
-                    </a:p>
-                  </a:txBody>
-                  <a:tcPr marL="76200" marR="76200" marT="25400" marB="25400" anchor="t">
-                    <a:lnL w="12700" cap="flat" cmpd="sng" algn="ctr">
-                      <a:solidFill>
-                        <a:srgbClr val="48464B"/>
-                      </a:solidFill>
-                      <a:prstDash val="solid"/>
-                      <a:round/>
-                      <a:headEnd type="none" w="med" len="med"/>
-                      <a:tailEnd type="none" w="med" len="med"/>
-                    </a:lnL>
-                    <a:lnR w="12700" cap="flat" cmpd="sng" algn="ctr">
-                      <a:solidFill>
-                        <a:srgbClr val="48464B"/>
-                      </a:solidFill>
-                      <a:prstDash val="solid"/>
-                      <a:round/>
-                      <a:headEnd type="none" w="med" len="med"/>
-                      <a:tailEnd type="none" w="med" len="med"/>
-                    </a:lnR>
-                    <a:lnT w="12700" cap="flat" cmpd="sng" algn="ctr">
-                      <a:solidFill>
-                        <a:srgbClr val="48464B"/>
-                      </a:solidFill>
-                      <a:prstDash val="solid"/>
-                      <a:round/>
-                      <a:headEnd type="none" w="med" len="med"/>
-                      <a:tailEnd type="none" w="med" len="med"/>
-                    </a:lnT>
-                    <a:lnB w="12700" cap="flat" cmpd="sng" algn="ctr">
-                      <a:solidFill>
-                        <a:srgbClr val="48464B"/>
-                      </a:solidFill>
-                      <a:prstDash val="solid"/>
-                      <a:round/>
-                      <a:headEnd type="none" w="med" len="med"/>
-                      <a:tailEnd type="none" w="med" len="med"/>
-                    </a:lnB>
-                  </a:tcPr>
-                </a:tc>
-                <a:tc>
-                  <a:txBody>
-                    <a:bodyPr/>
-                    <a:lstStyle/>
-                    <a:p>
-                      <a:pPr indent="0" marL="0">
-                        <a:lnSpc>
-                          <a:spcPts val="1680"/>
-                        </a:lnSpc>
-                        <a:buNone/>
-                      </a:pPr>
-                      <a:r>
-                        <a:rPr lang="en-US" sz="1200" dirty="0">
-                          <a:solidFill>
-                            <a:srgbClr val="A9A4B5"/>
-                          </a:solidFill>
-                          <a:latin typeface="Manrope" pitchFamily="34" charset="0"/>
-                          <a:ea typeface="Manrope" pitchFamily="34" charset="-122"/>
-                          <a:cs typeface="Manrope" pitchFamily="34" charset="-120"/>
-                        </a:rPr>
-                        <a:t>no aplica</a:t>
-                      </a:r>
-                      <a:endParaRPr lang="en-US" sz="1200" dirty="0">
-                        <a:latin typeface="Manrope" charset="0"/>
-                        <a:ea typeface="Manrope" charset="0"/>
-                        <a:cs typeface="Manrope" charset="0"/>
-                      </a:endParaRPr>
-                    </a:p>
-                  </a:txBody>
-                  <a:tcPr marL="76200" marR="76200" marT="25400" marB="25400" anchor="t">
-                    <a:lnL w="12700" cap="flat" cmpd="sng" algn="ctr">
-                      <a:solidFill>
-                        <a:srgbClr val="48464B"/>
-                      </a:solidFill>
-                      <a:prstDash val="solid"/>
-                      <a:round/>
-                      <a:headEnd type="none" w="med" len="med"/>
-                      <a:tailEnd type="none" w="med" len="med"/>
-                    </a:lnL>
-                    <a:lnR w="12700" cap="flat" cmpd="sng" algn="ctr">
-                      <a:solidFill>
-                        <a:srgbClr val="48464B"/>
-                      </a:solidFill>
-                      <a:prstDash val="solid"/>
-                      <a:round/>
-                      <a:headEnd type="none" w="med" len="med"/>
-                      <a:tailEnd type="none" w="med" len="med"/>
-                    </a:lnR>
-                    <a:lnT w="12700" cap="flat" cmpd="sng" algn="ctr">
-                      <a:solidFill>
-                        <a:srgbClr val="48464B"/>
-                      </a:solidFill>
-                      <a:prstDash val="solid"/>
-                      <a:round/>
-                      <a:headEnd type="none" w="med" len="med"/>
-                      <a:tailEnd type="none" w="med" len="med"/>
-                    </a:lnT>
-                    <a:lnB w="12700" cap="flat" cmpd="sng" algn="ctr">
-                      <a:solidFill>
-                        <a:srgbClr val="48464B"/>
-                      </a:solidFill>
-                      <a:prstDash val="solid"/>
-                      <a:round/>
-                      <a:headEnd type="none" w="med" len="med"/>
-                      <a:tailEnd type="none" w="med" len="med"/>
-                    </a:lnB>
-                  </a:tcPr>
-                </a:tc>
-              </a:tr>
-              <a:tr h="413941">
-                <a:tc>
-                  <a:txBody>
-                    <a:bodyPr/>
-                    <a:lstStyle/>
-                    <a:p>
-                      <a:pPr indent="0" marL="0">
-                        <a:lnSpc>
-                          <a:spcPts val="1680"/>
-                        </a:lnSpc>
-                        <a:buNone/>
-                      </a:pPr>
-                      <a:r>
-                        <a:rPr lang="en-US" sz="1200" dirty="0">
-                          <a:solidFill>
-                            <a:srgbClr val="A9A4B5"/>
-                          </a:solidFill>
-                          <a:latin typeface="Manrope" pitchFamily="34" charset="0"/>
-                          <a:ea typeface="Manrope" pitchFamily="34" charset="-122"/>
-                          <a:cs typeface="Manrope" pitchFamily="34" charset="-120"/>
-                        </a:rPr>
-                        <a:t>P1 · Estructura</a:t>
-                      </a:r>
-                      <a:endParaRPr lang="en-US" sz="1200" dirty="0">
-                        <a:latin typeface="Manrope" charset="0"/>
-                        <a:ea typeface="Manrope" charset="0"/>
-                        <a:cs typeface="Manrope" charset="0"/>
-                      </a:endParaRPr>
-                    </a:p>
-                  </a:txBody>
-                  <a:tcPr marL="76200" marR="76200" marT="25400" marB="25400" anchor="t">
-                    <a:lnL w="12700" cap="flat" cmpd="sng" algn="ctr">
-                      <a:solidFill>
-                        <a:srgbClr val="48464B"/>
-                      </a:solidFill>
-                      <a:prstDash val="solid"/>
-                      <a:round/>
-                      <a:headEnd type="none" w="med" len="med"/>
-                      <a:tailEnd type="none" w="med" len="med"/>
-                    </a:lnL>
-                    <a:lnR w="12700" cap="flat" cmpd="sng" algn="ctr">
-                      <a:solidFill>
-                        <a:srgbClr val="48464B"/>
-                      </a:solidFill>
-                      <a:prstDash val="solid"/>
-                      <a:round/>
-                      <a:headEnd type="none" w="med" len="med"/>
-                      <a:tailEnd type="none" w="med" len="med"/>
-                    </a:lnR>
-                    <a:lnT w="12700" cap="flat" cmpd="sng" algn="ctr">
-                      <a:solidFill>
-                        <a:srgbClr val="48464B"/>
-                      </a:solidFill>
-                      <a:prstDash val="solid"/>
-                      <a:round/>
-                      <a:headEnd type="none" w="med" len="med"/>
-                      <a:tailEnd type="none" w="med" len="med"/>
-                    </a:lnT>
-                    <a:lnB w="12700" cap="flat" cmpd="sng" algn="ctr">
-                      <a:solidFill>
-                        <a:srgbClr val="48464B"/>
-                      </a:solidFill>
-                      <a:prstDash val="solid"/>
-                      <a:round/>
-                      <a:headEnd type="none" w="med" len="med"/>
-                      <a:tailEnd type="none" w="med" len="med"/>
-                    </a:lnB>
-                  </a:tcPr>
-                </a:tc>
-                <a:tc>
-                  <a:txBody>
-                    <a:bodyPr/>
-                    <a:lstStyle/>
-                    <a:p>
-                      <a:pPr indent="0" marL="0">
-                        <a:lnSpc>
-                          <a:spcPts val="1680"/>
-                        </a:lnSpc>
-                        <a:buNone/>
-                      </a:pPr>
-                      <a:r>
-                        <a:rPr lang="en-US" sz="1200" dirty="0">
-                          <a:solidFill>
-                            <a:srgbClr val="E0975A"/>
-                          </a:solidFill>
-                          <a:latin typeface="Manrope" pitchFamily="34" charset="0"/>
-                          <a:ea typeface="Manrope" pitchFamily="34" charset="-122"/>
-                          <a:cs typeface="Manrope" pitchFamily="34" charset="-120"/>
-                        </a:rPr>
-                        <a:t>✓ pasa</a:t>
-                      </a:r>
-                      <a:endParaRPr lang="en-US" sz="1200" dirty="0">
-                        <a:latin typeface="Manrope" charset="0"/>
-                        <a:ea typeface="Manrope" charset="0"/>
-                        <a:cs typeface="Manrope" charset="0"/>
-                      </a:endParaRPr>
-                    </a:p>
-                  </a:txBody>
-                  <a:tcPr marL="76200" marR="76200" marT="25400" marB="25400" anchor="t">
-                    <a:lnL w="12700" cap="flat" cmpd="sng" algn="ctr">
-                      <a:solidFill>
-                        <a:srgbClr val="48464B"/>
-                      </a:solidFill>
-                      <a:prstDash val="solid"/>
-                      <a:round/>
-                      <a:headEnd type="none" w="med" len="med"/>
-                      <a:tailEnd type="none" w="med" len="med"/>
-                    </a:lnL>
-                    <a:lnR w="12700" cap="flat" cmpd="sng" algn="ctr">
-                      <a:solidFill>
-                        <a:srgbClr val="48464B"/>
-                      </a:solidFill>
-                      <a:prstDash val="solid"/>
-                      <a:round/>
-                      <a:headEnd type="none" w="med" len="med"/>
-                      <a:tailEnd type="none" w="med" len="med"/>
-                    </a:lnR>
-                    <a:lnT w="12700" cap="flat" cmpd="sng" algn="ctr">
-                      <a:solidFill>
-                        <a:srgbClr val="48464B"/>
-                      </a:solidFill>
-                      <a:prstDash val="solid"/>
-                      <a:round/>
-                      <a:headEnd type="none" w="med" len="med"/>
-                      <a:tailEnd type="none" w="med" len="med"/>
-                    </a:lnT>
-                    <a:lnB w="12700" cap="flat" cmpd="sng" algn="ctr">
-                      <a:solidFill>
-                        <a:srgbClr val="48464B"/>
-                      </a:solidFill>
-                      <a:prstDash val="solid"/>
-                      <a:round/>
-                      <a:headEnd type="none" w="med" len="med"/>
-                      <a:tailEnd type="none" w="med" len="med"/>
-                    </a:lnB>
-                  </a:tcPr>
-                </a:tc>
-                <a:tc>
-                  <a:txBody>
-                    <a:bodyPr/>
-                    <a:lstStyle/>
-                    <a:p>
-                      <a:pPr indent="0" marL="0">
-                        <a:lnSpc>
-                          <a:spcPts val="1680"/>
-                        </a:lnSpc>
-                        <a:buNone/>
-                      </a:pPr>
-                      <a:r>
-                        <a:rPr lang="en-US" sz="1200" dirty="0">
-                          <a:solidFill>
-                            <a:srgbClr val="E0975A"/>
-                          </a:solidFill>
-                          <a:latin typeface="Manrope" pitchFamily="34" charset="0"/>
-                          <a:ea typeface="Manrope" pitchFamily="34" charset="-122"/>
-                          <a:cs typeface="Manrope" pitchFamily="34" charset="-120"/>
-                        </a:rPr>
-                        <a:t>✓ pasa</a:t>
-                      </a:r>
-                      <a:endParaRPr lang="en-US" sz="1200" dirty="0">
-                        <a:latin typeface="Manrope" charset="0"/>
-                        <a:ea typeface="Manrope" charset="0"/>
-                        <a:cs typeface="Manrope" charset="0"/>
-                      </a:endParaRPr>
-                    </a:p>
-                  </a:txBody>
-                  <a:tcPr marL="76200" marR="76200" marT="25400" marB="25400" anchor="t">
-                    <a:lnL w="12700" cap="flat" cmpd="sng" algn="ctr">
-                      <a:solidFill>
-                        <a:srgbClr val="48464B"/>
-                      </a:solidFill>
-                      <a:prstDash val="solid"/>
-                      <a:round/>
-                      <a:headEnd type="none" w="med" len="med"/>
-                      <a:tailEnd type="none" w="med" len="med"/>
-                    </a:lnL>
-                    <a:lnR w="12700" cap="flat" cmpd="sng" algn="ctr">
-                      <a:solidFill>
-                        <a:srgbClr val="48464B"/>
-                      </a:solidFill>
-                      <a:prstDash val="solid"/>
-                      <a:round/>
-                      <a:headEnd type="none" w="med" len="med"/>
-                      <a:tailEnd type="none" w="med" len="med"/>
-                    </a:lnR>
-                    <a:lnT w="12700" cap="flat" cmpd="sng" algn="ctr">
-                      <a:solidFill>
-                        <a:srgbClr val="48464B"/>
-                      </a:solidFill>
-                      <a:prstDash val="solid"/>
-                      <a:round/>
-                      <a:headEnd type="none" w="med" len="med"/>
-                      <a:tailEnd type="none" w="med" len="med"/>
-                    </a:lnT>
-                    <a:lnB w="12700" cap="flat" cmpd="sng" algn="ctr">
-                      <a:solidFill>
-                        <a:srgbClr val="48464B"/>
-                      </a:solidFill>
-                      <a:prstDash val="solid"/>
-                      <a:round/>
-                      <a:headEnd type="none" w="med" len="med"/>
-                      <a:tailEnd type="none" w="med" len="med"/>
-                    </a:lnB>
-                  </a:tcPr>
-                </a:tc>
-                <a:tc>
-                  <a:txBody>
-                    <a:bodyPr/>
-                    <a:lstStyle/>
-                    <a:p>
-                      <a:pPr indent="0" marL="0">
-                        <a:lnSpc>
-                          <a:spcPts val="1680"/>
-                        </a:lnSpc>
-                        <a:buNone/>
-                      </a:pPr>
-                      <a:r>
-                        <a:rPr lang="en-US" sz="1200" dirty="0">
-                          <a:solidFill>
-                            <a:srgbClr val="E0975A"/>
-                          </a:solidFill>
-                          <a:latin typeface="Manrope" pitchFamily="34" charset="0"/>
-                          <a:ea typeface="Manrope" pitchFamily="34" charset="-122"/>
-                          <a:cs typeface="Manrope" pitchFamily="34" charset="-120"/>
-                        </a:rPr>
-                        <a:t>✓ pasa</a:t>
-                      </a:r>
-                      <a:endParaRPr lang="en-US" sz="1200" dirty="0">
-                        <a:latin typeface="Manrope" charset="0"/>
-                        <a:ea typeface="Manrope" charset="0"/>
-                        <a:cs typeface="Manrope" charset="0"/>
-                      </a:endParaRPr>
-                    </a:p>
-                  </a:txBody>
-                  <a:tcPr marL="76200" marR="76200" marT="25400" marB="25400" anchor="t">
-                    <a:lnL w="12700" cap="flat" cmpd="sng" algn="ctr">
-                      <a:solidFill>
-                        <a:srgbClr val="48464B"/>
-                      </a:solidFill>
-                      <a:prstDash val="solid"/>
-                      <a:round/>
-                      <a:headEnd type="none" w="med" len="med"/>
-                      <a:tailEnd type="none" w="med" len="med"/>
-                    </a:lnL>
-                    <a:lnR w="12700" cap="flat" cmpd="sng" algn="ctr">
-                      <a:solidFill>
-                        <a:srgbClr val="48464B"/>
-                      </a:solidFill>
-                      <a:prstDash val="solid"/>
-                      <a:round/>
-                      <a:headEnd type="none" w="med" len="med"/>
-                      <a:tailEnd type="none" w="med" len="med"/>
-                    </a:lnR>
-                    <a:lnT w="12700" cap="flat" cmpd="sng" algn="ctr">
-                      <a:solidFill>
-                        <a:srgbClr val="48464B"/>
-                      </a:solidFill>
-                      <a:prstDash val="solid"/>
-                      <a:round/>
-                      <a:headEnd type="none" w="med" len="med"/>
-                      <a:tailEnd type="none" w="med" len="med"/>
-                    </a:lnT>
-                    <a:lnB w="12700" cap="flat" cmpd="sng" algn="ctr">
-                      <a:solidFill>
-                        <a:srgbClr val="48464B"/>
-                      </a:solidFill>
-                      <a:prstDash val="solid"/>
-                      <a:round/>
-                      <a:headEnd type="none" w="med" len="med"/>
-                      <a:tailEnd type="none" w="med" len="med"/>
-                    </a:lnB>
-                  </a:tcPr>
-                </a:tc>
-                <a:tc>
-                  <a:txBody>
-                    <a:bodyPr/>
-                    <a:lstStyle/>
-                    <a:p>
-                      <a:pPr indent="0" marL="0">
-                        <a:lnSpc>
-                          <a:spcPts val="1680"/>
-                        </a:lnSpc>
-                        <a:buNone/>
-                      </a:pPr>
-                      <a:r>
-                        <a:rPr lang="en-US" sz="1200" dirty="0">
-                          <a:solidFill>
-                            <a:srgbClr val="ECEAF0"/>
-                          </a:solidFill>
-                          <a:latin typeface="Manrope" pitchFamily="34" charset="0"/>
-                          <a:ea typeface="Manrope" pitchFamily="34" charset="-122"/>
-                          <a:cs typeface="Manrope" pitchFamily="34" charset="-120"/>
-                        </a:rPr>
-                        <a:t>✕ falla 1/2 → rehacer → pasa</a:t>
-                      </a:r>
-                      <a:endParaRPr lang="en-US" sz="1200" dirty="0">
-                        <a:latin typeface="Manrope" charset="0"/>
-                        <a:ea typeface="Manrope" charset="0"/>
-                        <a:cs typeface="Manrope" charset="0"/>
-                      </a:endParaRPr>
-                    </a:p>
-                  </a:txBody>
-                  <a:tcPr marL="76200" marR="76200" marT="25400" marB="25400" anchor="t">
-                    <a:lnL w="12700" cap="flat" cmpd="sng" algn="ctr">
-                      <a:solidFill>
-                        <a:srgbClr val="48464B"/>
-                      </a:solidFill>
-                      <a:prstDash val="solid"/>
-                      <a:round/>
-                      <a:headEnd type="none" w="med" len="med"/>
-                      <a:tailEnd type="none" w="med" len="med"/>
-                    </a:lnL>
-                    <a:lnR w="12700" cap="flat" cmpd="sng" algn="ctr">
-                      <a:solidFill>
-                        <a:srgbClr val="48464B"/>
-                      </a:solidFill>
-                      <a:prstDash val="solid"/>
-                      <a:round/>
-                      <a:headEnd type="none" w="med" len="med"/>
-                      <a:tailEnd type="none" w="med" len="med"/>
-                    </a:lnR>
-                    <a:lnT w="12700" cap="flat" cmpd="sng" algn="ctr">
-                      <a:solidFill>
-                        <a:srgbClr val="48464B"/>
-                      </a:solidFill>
-                      <a:prstDash val="solid"/>
-                      <a:round/>
-                      <a:headEnd type="none" w="med" len="med"/>
-                      <a:tailEnd type="none" w="med" len="med"/>
-                    </a:lnT>
-                    <a:lnB w="12700" cap="flat" cmpd="sng" algn="ctr">
-                      <a:solidFill>
-                        <a:srgbClr val="48464B"/>
-                      </a:solidFill>
-                      <a:prstDash val="solid"/>
-                      <a:round/>
-                      <a:headEnd type="none" w="med" len="med"/>
-                      <a:tailEnd type="none" w="med" len="med"/>
-                    </a:lnB>
-                  </a:tcPr>
-                </a:tc>
-                <a:tc>
-                  <a:txBody>
-                    <a:bodyPr/>
-                    <a:lstStyle/>
-                    <a:p>
-                      <a:pPr indent="0" marL="0">
-                        <a:lnSpc>
-                          <a:spcPts val="1680"/>
-                        </a:lnSpc>
-                        <a:buNone/>
-                      </a:pPr>
-                      <a:r>
-                        <a:rPr lang="en-US" sz="1200" dirty="0">
-                          <a:solidFill>
-                            <a:srgbClr val="ECEAF0"/>
-                          </a:solidFill>
-                          <a:latin typeface="Manrope" pitchFamily="34" charset="0"/>
-                          <a:ea typeface="Manrope" pitchFamily="34" charset="-122"/>
-                          <a:cs typeface="Manrope" pitchFamily="34" charset="-120"/>
-                        </a:rPr>
-                        <a:t>✕ falla 1/2 → rehacer → pasa</a:t>
-                      </a:r>
-                      <a:endParaRPr lang="en-US" sz="1200" dirty="0">
-                        <a:latin typeface="Manrope" charset="0"/>
-                        <a:ea typeface="Manrope" charset="0"/>
-                        <a:cs typeface="Manrope" charset="0"/>
-                      </a:endParaRPr>
-                    </a:p>
-                  </a:txBody>
-                  <a:tcPr marL="76200" marR="76200" marT="25400" marB="25400" anchor="t">
-                    <a:lnL w="12700" cap="flat" cmpd="sng" algn="ctr">
-                      <a:solidFill>
-                        <a:srgbClr val="48464B"/>
-                      </a:solidFill>
-                      <a:prstDash val="solid"/>
-                      <a:round/>
-                      <a:headEnd type="none" w="med" len="med"/>
-                      <a:tailEnd type="none" w="med" len="med"/>
-                    </a:lnL>
-                    <a:lnR w="12700" cap="flat" cmpd="sng" algn="ctr">
-                      <a:solidFill>
-                        <a:srgbClr val="48464B"/>
-                      </a:solidFill>
-                      <a:prstDash val="solid"/>
-                      <a:round/>
-                      <a:headEnd type="none" w="med" len="med"/>
-                      <a:tailEnd type="none" w="med" len="med"/>
-                    </a:lnR>
-                    <a:lnT w="12700" cap="flat" cmpd="sng" algn="ctr">
-                      <a:solidFill>
-                        <a:srgbClr val="48464B"/>
-                      </a:solidFill>
-                      <a:prstDash val="solid"/>
-                      <a:round/>
-                      <a:headEnd type="none" w="med" len="med"/>
-                      <a:tailEnd type="none" w="med" len="med"/>
-                    </a:lnT>
-                    <a:lnB w="12700" cap="flat" cmpd="sng" algn="ctr">
-                      <a:solidFill>
-                        <a:srgbClr val="48464B"/>
-                      </a:solidFill>
-                      <a:prstDash val="solid"/>
-                      <a:round/>
-                      <a:headEnd type="none" w="med" len="med"/>
-                      <a:tailEnd type="none" w="med" len="med"/>
-                    </a:lnB>
-                  </a:tcPr>
-                </a:tc>
-              </a:tr>
-              <a:tr h="238720">
-                <a:tc>
-                  <a:txBody>
-                    <a:bodyPr/>
-                    <a:lstStyle/>
-                    <a:p>
-                      <a:pPr indent="0" marL="0">
-                        <a:lnSpc>
-                          <a:spcPts val="1680"/>
-                        </a:lnSpc>
-                        <a:buNone/>
-                      </a:pPr>
-                      <a:r>
-                        <a:rPr lang="en-US" sz="1200" dirty="0">
-                          <a:solidFill>
-                            <a:srgbClr val="A9A4B5"/>
-                          </a:solidFill>
-                          <a:latin typeface="Manrope" pitchFamily="34" charset="0"/>
-                          <a:ea typeface="Manrope" pitchFamily="34" charset="-122"/>
-                          <a:cs typeface="Manrope" pitchFamily="34" charset="-120"/>
-                        </a:rPr>
-                        <a:t>Canario en la prosa</a:t>
-                      </a:r>
-                      <a:endParaRPr lang="en-US" sz="1200" dirty="0">
-                        <a:latin typeface="Manrope" charset="0"/>
-                        <a:ea typeface="Manrope" charset="0"/>
-                        <a:cs typeface="Manrope" charset="0"/>
-                      </a:endParaRPr>
-                    </a:p>
-                  </a:txBody>
-                  <a:tcPr marL="76200" marR="76200" marT="25400" marB="25400" anchor="t">
-                    <a:lnL w="12700" cap="flat" cmpd="sng" algn="ctr">
-                      <a:solidFill>
-                        <a:srgbClr val="48464B"/>
-                      </a:solidFill>
-                      <a:prstDash val="solid"/>
-                      <a:round/>
-                      <a:headEnd type="none" w="med" len="med"/>
-                      <a:tailEnd type="none" w="med" len="med"/>
-                    </a:lnL>
-                    <a:lnR w="12700" cap="flat" cmpd="sng" algn="ctr">
-                      <a:solidFill>
-                        <a:srgbClr val="48464B"/>
-                      </a:solidFill>
-                      <a:prstDash val="solid"/>
-                      <a:round/>
-                      <a:headEnd type="none" w="med" len="med"/>
-                      <a:tailEnd type="none" w="med" len="med"/>
-                    </a:lnR>
-                    <a:lnT w="12700" cap="flat" cmpd="sng" algn="ctr">
-                      <a:solidFill>
-                        <a:srgbClr val="48464B"/>
-                      </a:solidFill>
-                      <a:prstDash val="solid"/>
-                      <a:round/>
-                      <a:headEnd type="none" w="med" len="med"/>
-                      <a:tailEnd type="none" w="med" len="med"/>
-                    </a:lnT>
-                    <a:lnB w="12700" cap="flat" cmpd="sng" algn="ctr">
-                      <a:solidFill>
-                        <a:srgbClr val="48464B"/>
-                      </a:solidFill>
-                      <a:prstDash val="solid"/>
-                      <a:round/>
-                      <a:headEnd type="none" w="med" len="med"/>
-                      <a:tailEnd type="none" w="med" len="med"/>
-                    </a:lnB>
-                  </a:tcPr>
-                </a:tc>
-                <a:tc>
-                  <a:txBody>
-                    <a:bodyPr/>
-                    <a:lstStyle/>
-                    <a:p>
-                      <a:pPr indent="0" marL="0">
-                        <a:lnSpc>
-                          <a:spcPts val="1680"/>
-                        </a:lnSpc>
-                        <a:buNone/>
-                      </a:pPr>
-                      <a:r>
-                        <a:rPr lang="en-US" sz="1200" dirty="0">
-                          <a:solidFill>
-                            <a:srgbClr val="A9A4B5"/>
-                          </a:solidFill>
-                          <a:latin typeface="Manrope" pitchFamily="34" charset="0"/>
-                          <a:ea typeface="Manrope" pitchFamily="34" charset="-122"/>
-                          <a:cs typeface="Manrope" pitchFamily="34" charset="-120"/>
-                        </a:rPr>
-                        <a:t>no aplica</a:t>
-                      </a:r>
-                      <a:endParaRPr lang="en-US" sz="1200" dirty="0">
-                        <a:latin typeface="Manrope" charset="0"/>
-                        <a:ea typeface="Manrope" charset="0"/>
-                        <a:cs typeface="Manrope" charset="0"/>
-                      </a:endParaRPr>
-                    </a:p>
-                  </a:txBody>
-                  <a:tcPr marL="76200" marR="76200" marT="25400" marB="25400" anchor="t">
-                    <a:lnL w="12700" cap="flat" cmpd="sng" algn="ctr">
-                      <a:solidFill>
-                        <a:srgbClr val="48464B"/>
-                      </a:solidFill>
-                      <a:prstDash val="solid"/>
-                      <a:round/>
-                      <a:headEnd type="none" w="med" len="med"/>
-                      <a:tailEnd type="none" w="med" len="med"/>
-                    </a:lnL>
-                    <a:lnR w="12700" cap="flat" cmpd="sng" algn="ctr">
-                      <a:solidFill>
-                        <a:srgbClr val="48464B"/>
-                      </a:solidFill>
-                      <a:prstDash val="solid"/>
-                      <a:round/>
-                      <a:headEnd type="none" w="med" len="med"/>
-                      <a:tailEnd type="none" w="med" len="med"/>
-                    </a:lnR>
-                    <a:lnT w="12700" cap="flat" cmpd="sng" algn="ctr">
-                      <a:solidFill>
-                        <a:srgbClr val="48464B"/>
-                      </a:solidFill>
-                      <a:prstDash val="solid"/>
-                      <a:round/>
-                      <a:headEnd type="none" w="med" len="med"/>
-                      <a:tailEnd type="none" w="med" len="med"/>
-                    </a:lnT>
-                    <a:lnB w="12700" cap="flat" cmpd="sng" algn="ctr">
-                      <a:solidFill>
-                        <a:srgbClr val="48464B"/>
-                      </a:solidFill>
-                      <a:prstDash val="solid"/>
-                      <a:round/>
-                      <a:headEnd type="none" w="med" len="med"/>
-                      <a:tailEnd type="none" w="med" len="med"/>
-                    </a:lnB>
-                  </a:tcPr>
-                </a:tc>
-                <a:tc>
-                  <a:txBody>
-                    <a:bodyPr/>
-                    <a:lstStyle/>
-                    <a:p>
-                      <a:pPr indent="0" marL="0">
-                        <a:lnSpc>
-                          <a:spcPts val="1680"/>
-                        </a:lnSpc>
-                        <a:buNone/>
-                      </a:pPr>
-                      <a:r>
-                        <a:rPr lang="en-US" sz="1200" dirty="0">
-                          <a:solidFill>
-                            <a:srgbClr val="E0975A"/>
-                          </a:solidFill>
-                          <a:latin typeface="Manrope" pitchFamily="34" charset="0"/>
-                          <a:ea typeface="Manrope" pitchFamily="34" charset="-122"/>
-                          <a:cs typeface="Manrope" pitchFamily="34" charset="-120"/>
-                        </a:rPr>
-                        <a:t>✓ pasa · no aparece</a:t>
-                      </a:r>
-                      <a:endParaRPr lang="en-US" sz="1200" dirty="0">
-                        <a:latin typeface="Manrope" charset="0"/>
-                        <a:ea typeface="Manrope" charset="0"/>
-                        <a:cs typeface="Manrope" charset="0"/>
-                      </a:endParaRPr>
-                    </a:p>
-                  </a:txBody>
-                  <a:tcPr marL="76200" marR="76200" marT="25400" marB="25400" anchor="t">
-                    <a:lnL w="12700" cap="flat" cmpd="sng" algn="ctr">
-                      <a:solidFill>
-                        <a:srgbClr val="48464B"/>
-                      </a:solidFill>
-                      <a:prstDash val="solid"/>
-                      <a:round/>
-                      <a:headEnd type="none" w="med" len="med"/>
-                      <a:tailEnd type="none" w="med" len="med"/>
-                    </a:lnL>
-                    <a:lnR w="12700" cap="flat" cmpd="sng" algn="ctr">
-                      <a:solidFill>
-                        <a:srgbClr val="48464B"/>
-                      </a:solidFill>
-                      <a:prstDash val="solid"/>
-                      <a:round/>
-                      <a:headEnd type="none" w="med" len="med"/>
-                      <a:tailEnd type="none" w="med" len="med"/>
-                    </a:lnR>
-                    <a:lnT w="12700" cap="flat" cmpd="sng" algn="ctr">
-                      <a:solidFill>
-                        <a:srgbClr val="48464B"/>
-                      </a:solidFill>
-                      <a:prstDash val="solid"/>
-                      <a:round/>
-                      <a:headEnd type="none" w="med" len="med"/>
-                      <a:tailEnd type="none" w="med" len="med"/>
-                    </a:lnT>
-                    <a:lnB w="12700" cap="flat" cmpd="sng" algn="ctr">
-                      <a:solidFill>
-                        <a:srgbClr val="48464B"/>
-                      </a:solidFill>
-                      <a:prstDash val="solid"/>
-                      <a:round/>
-                      <a:headEnd type="none" w="med" len="med"/>
-                      <a:tailEnd type="none" w="med" len="med"/>
-                    </a:lnB>
-                  </a:tcPr>
-                </a:tc>
-                <a:tc>
-                  <a:txBody>
-                    <a:bodyPr/>
-                    <a:lstStyle/>
-                    <a:p>
-                      <a:pPr indent="0" marL="0">
-                        <a:lnSpc>
-                          <a:spcPts val="1680"/>
-                        </a:lnSpc>
-                        <a:buNone/>
-                      </a:pPr>
-                      <a:r>
-                        <a:rPr lang="en-US" sz="1200" dirty="0">
-                          <a:solidFill>
-                            <a:srgbClr val="A9A4B5"/>
-                          </a:solidFill>
-                          <a:latin typeface="Manrope" pitchFamily="34" charset="0"/>
-                          <a:ea typeface="Manrope" pitchFamily="34" charset="-122"/>
-                          <a:cs typeface="Manrope" pitchFamily="34" charset="-120"/>
-                        </a:rPr>
-                        <a:t>no aplica</a:t>
-                      </a:r>
-                      <a:endParaRPr lang="en-US" sz="1200" dirty="0">
-                        <a:latin typeface="Manrope" charset="0"/>
-                        <a:ea typeface="Manrope" charset="0"/>
-                        <a:cs typeface="Manrope" charset="0"/>
-                      </a:endParaRPr>
-                    </a:p>
-                  </a:txBody>
-                  <a:tcPr marL="76200" marR="76200" marT="25400" marB="25400" anchor="t">
-                    <a:lnL w="12700" cap="flat" cmpd="sng" algn="ctr">
-                      <a:solidFill>
-                        <a:srgbClr val="48464B"/>
-                      </a:solidFill>
-                      <a:prstDash val="solid"/>
-                      <a:round/>
-                      <a:headEnd type="none" w="med" len="med"/>
-                      <a:tailEnd type="none" w="med" len="med"/>
-                    </a:lnL>
-                    <a:lnR w="12700" cap="flat" cmpd="sng" algn="ctr">
-                      <a:solidFill>
-                        <a:srgbClr val="48464B"/>
-                      </a:solidFill>
-                      <a:prstDash val="solid"/>
-                      <a:round/>
-                      <a:headEnd type="none" w="med" len="med"/>
-                      <a:tailEnd type="none" w="med" len="med"/>
-                    </a:lnR>
-                    <a:lnT w="12700" cap="flat" cmpd="sng" algn="ctr">
-                      <a:solidFill>
-                        <a:srgbClr val="48464B"/>
-                      </a:solidFill>
-                      <a:prstDash val="solid"/>
-                      <a:round/>
-                      <a:headEnd type="none" w="med" len="med"/>
-                      <a:tailEnd type="none" w="med" len="med"/>
-                    </a:lnT>
-                    <a:lnB w="12700" cap="flat" cmpd="sng" algn="ctr">
-                      <a:solidFill>
-                        <a:srgbClr val="48464B"/>
-                      </a:solidFill>
-                      <a:prstDash val="solid"/>
-                      <a:round/>
-                      <a:headEnd type="none" w="med" len="med"/>
-                      <a:tailEnd type="none" w="med" len="med"/>
-                    </a:lnB>
-                  </a:tcPr>
-                </a:tc>
-                <a:tc>
-                  <a:txBody>
-                    <a:bodyPr/>
-                    <a:lstStyle/>
-                    <a:p>
-                      <a:pPr indent="0" marL="0">
-                        <a:lnSpc>
-                          <a:spcPts val="1680"/>
-                        </a:lnSpc>
-                        <a:buNone/>
-                      </a:pPr>
-                      <a:r>
-                        <a:rPr lang="en-US" sz="1200" dirty="0">
-                          <a:solidFill>
-                            <a:srgbClr val="A9A4B5"/>
-                          </a:solidFill>
-                          <a:latin typeface="Manrope" pitchFamily="34" charset="0"/>
-                          <a:ea typeface="Manrope" pitchFamily="34" charset="-122"/>
-                          <a:cs typeface="Manrope" pitchFamily="34" charset="-120"/>
-                        </a:rPr>
-                        <a:t>no aplica</a:t>
-                      </a:r>
-                      <a:endParaRPr lang="en-US" sz="1200" dirty="0">
-                        <a:latin typeface="Manrope" charset="0"/>
-                        <a:ea typeface="Manrope" charset="0"/>
-                        <a:cs typeface="Manrope" charset="0"/>
-                      </a:endParaRPr>
-                    </a:p>
-                  </a:txBody>
-                  <a:tcPr marL="76200" marR="76200" marT="25400" marB="25400" anchor="t">
-                    <a:lnL w="12700" cap="flat" cmpd="sng" algn="ctr">
-                      <a:solidFill>
-                        <a:srgbClr val="48464B"/>
-                      </a:solidFill>
-                      <a:prstDash val="solid"/>
-                      <a:round/>
-                      <a:headEnd type="none" w="med" len="med"/>
-                      <a:tailEnd type="none" w="med" len="med"/>
-                    </a:lnL>
-                    <a:lnR w="12700" cap="flat" cmpd="sng" algn="ctr">
-                      <a:solidFill>
-                        <a:srgbClr val="48464B"/>
-                      </a:solidFill>
-                      <a:prstDash val="solid"/>
-                      <a:round/>
-                      <a:headEnd type="none" w="med" len="med"/>
-                      <a:tailEnd type="none" w="med" len="med"/>
-                    </a:lnR>
-                    <a:lnT w="12700" cap="flat" cmpd="sng" algn="ctr">
-                      <a:solidFill>
-                        <a:srgbClr val="48464B"/>
-                      </a:solidFill>
-                      <a:prstDash val="solid"/>
-                      <a:round/>
-                      <a:headEnd type="none" w="med" len="med"/>
-                      <a:tailEnd type="none" w="med" len="med"/>
-                    </a:lnT>
-                    <a:lnB w="12700" cap="flat" cmpd="sng" algn="ctr">
-                      <a:solidFill>
-                        <a:srgbClr val="48464B"/>
-                      </a:solidFill>
-                      <a:prstDash val="solid"/>
-                      <a:round/>
-                      <a:headEnd type="none" w="med" len="med"/>
-                      <a:tailEnd type="none" w="med" len="med"/>
-                    </a:lnB>
-                  </a:tcPr>
-                </a:tc>
-                <a:tc>
-                  <a:txBody>
-                    <a:bodyPr/>
-                    <a:lstStyle/>
-                    <a:p>
-                      <a:pPr indent="0" marL="0">
-                        <a:lnSpc>
-                          <a:spcPts val="1680"/>
-                        </a:lnSpc>
-                        <a:buNone/>
-                      </a:pPr>
-                      <a:r>
-                        <a:rPr lang="en-US" sz="1200" dirty="0">
-                          <a:solidFill>
-                            <a:srgbClr val="A9A4B5"/>
-                          </a:solidFill>
-                          <a:latin typeface="Manrope" pitchFamily="34" charset="0"/>
-                          <a:ea typeface="Manrope" pitchFamily="34" charset="-122"/>
-                          <a:cs typeface="Manrope" pitchFamily="34" charset="-120"/>
-                        </a:rPr>
-                        <a:t>no aplica</a:t>
-                      </a:r>
-                      <a:endParaRPr lang="en-US" sz="1200" dirty="0">
-                        <a:latin typeface="Manrope" charset="0"/>
-                        <a:ea typeface="Manrope" charset="0"/>
-                        <a:cs typeface="Manrope" charset="0"/>
-                      </a:endParaRPr>
-                    </a:p>
-                  </a:txBody>
-                  <a:tcPr marL="76200" marR="76200" marT="25400" marB="25400" anchor="t">
-                    <a:lnL w="12700" cap="flat" cmpd="sng" algn="ctr">
-                      <a:solidFill>
-                        <a:srgbClr val="48464B"/>
-                      </a:solidFill>
-                      <a:prstDash val="solid"/>
-                      <a:round/>
-                      <a:headEnd type="none" w="med" len="med"/>
-                      <a:tailEnd type="none" w="med" len="med"/>
-                    </a:lnL>
-                    <a:lnR w="12700" cap="flat" cmpd="sng" algn="ctr">
-                      <a:solidFill>
-                        <a:srgbClr val="48464B"/>
-                      </a:solidFill>
-                      <a:prstDash val="solid"/>
-                      <a:round/>
-                      <a:headEnd type="none" w="med" len="med"/>
-                      <a:tailEnd type="none" w="med" len="med"/>
-                    </a:lnR>
-                    <a:lnT w="12700" cap="flat" cmpd="sng" algn="ctr">
-                      <a:solidFill>
-                        <a:srgbClr val="48464B"/>
-                      </a:solidFill>
-                      <a:prstDash val="solid"/>
-                      <a:round/>
-                      <a:headEnd type="none" w="med" len="med"/>
-                      <a:tailEnd type="none" w="med" len="med"/>
-                    </a:lnT>
-                    <a:lnB w="12700" cap="flat" cmpd="sng" algn="ctr">
-                      <a:solidFill>
-                        <a:srgbClr val="48464B"/>
-                      </a:solidFill>
-                      <a:prstDash val="solid"/>
-                      <a:round/>
-                      <a:headEnd type="none" w="med" len="med"/>
-                      <a:tailEnd type="none" w="med" len="med"/>
-                    </a:lnB>
-                  </a:tcPr>
-                </a:tc>
-              </a:tr>
-              <a:tr h="413941">
-                <a:tc>
-                  <a:txBody>
-                    <a:bodyPr/>
-                    <a:lstStyle/>
-                    <a:p>
-                      <a:pPr indent="0" marL="0">
-                        <a:lnSpc>
-                          <a:spcPts val="1680"/>
-                        </a:lnSpc>
-                        <a:buNone/>
-                      </a:pPr>
-                      <a:r>
-                        <a:rPr lang="en-US" sz="1200" dirty="0">
-                          <a:solidFill>
-                            <a:srgbClr val="A9A4B5"/>
-                          </a:solidFill>
-                          <a:latin typeface="Manrope" pitchFamily="34" charset="0"/>
-                          <a:ea typeface="Manrope" pitchFamily="34" charset="-122"/>
-                          <a:cs typeface="Manrope" pitchFamily="34" charset="-120"/>
-                        </a:rPr>
-                        <a:t>P3 · Continuidad SQL</a:t>
-                      </a:r>
-                      <a:endParaRPr lang="en-US" sz="1200" dirty="0">
-                        <a:latin typeface="Manrope" charset="0"/>
-                        <a:ea typeface="Manrope" charset="0"/>
-                        <a:cs typeface="Manrope" charset="0"/>
-                      </a:endParaRPr>
-                    </a:p>
-                  </a:txBody>
-                  <a:tcPr marL="76200" marR="76200" marT="25400" marB="25400" anchor="t">
-                    <a:lnL w="12700" cap="flat" cmpd="sng" algn="ctr">
-                      <a:solidFill>
-                        <a:srgbClr val="48464B"/>
-                      </a:solidFill>
-                      <a:prstDash val="solid"/>
-                      <a:round/>
-                      <a:headEnd type="none" w="med" len="med"/>
-                      <a:tailEnd type="none" w="med" len="med"/>
-                    </a:lnL>
-                    <a:lnR w="12700" cap="flat" cmpd="sng" algn="ctr">
-                      <a:solidFill>
-                        <a:srgbClr val="48464B"/>
-                      </a:solidFill>
-                      <a:prstDash val="solid"/>
-                      <a:round/>
-                      <a:headEnd type="none" w="med" len="med"/>
-                      <a:tailEnd type="none" w="med" len="med"/>
-                    </a:lnR>
-                    <a:lnT w="12700" cap="flat" cmpd="sng" algn="ctr">
-                      <a:solidFill>
-                        <a:srgbClr val="48464B"/>
-                      </a:solidFill>
-                      <a:prstDash val="solid"/>
-                      <a:round/>
-                      <a:headEnd type="none" w="med" len="med"/>
-                      <a:tailEnd type="none" w="med" len="med"/>
-                    </a:lnT>
-                    <a:lnB w="12700" cap="flat" cmpd="sng" algn="ctr">
-                      <a:solidFill>
-                        <a:srgbClr val="48464B"/>
-                      </a:solidFill>
-                      <a:prstDash val="solid"/>
-                      <a:round/>
-                      <a:headEnd type="none" w="med" len="med"/>
-                      <a:tailEnd type="none" w="med" len="med"/>
-                    </a:lnB>
-                  </a:tcPr>
-                </a:tc>
-                <a:tc>
-                  <a:txBody>
-                    <a:bodyPr/>
-                    <a:lstStyle/>
-                    <a:p>
-                      <a:pPr indent="0" marL="0">
-                        <a:lnSpc>
-                          <a:spcPts val="1680"/>
-                        </a:lnSpc>
-                        <a:buNone/>
-                      </a:pPr>
-                      <a:r>
-                        <a:rPr lang="en-US" sz="1200" dirty="0">
-                          <a:solidFill>
-                            <a:srgbClr val="E0975A"/>
-                          </a:solidFill>
-                          <a:latin typeface="Manrope" pitchFamily="34" charset="0"/>
-                          <a:ea typeface="Manrope" pitchFamily="34" charset="-122"/>
-                          <a:cs typeface="Manrope" pitchFamily="34" charset="-120"/>
-                        </a:rPr>
-                        <a:t>✓ pasa</a:t>
-                      </a:r>
-                      <a:endParaRPr lang="en-US" sz="1200" dirty="0">
-                        <a:latin typeface="Manrope" charset="0"/>
-                        <a:ea typeface="Manrope" charset="0"/>
-                        <a:cs typeface="Manrope" charset="0"/>
-                      </a:endParaRPr>
-                    </a:p>
-                  </a:txBody>
-                  <a:tcPr marL="76200" marR="76200" marT="25400" marB="25400" anchor="t">
-                    <a:lnL w="12700" cap="flat" cmpd="sng" algn="ctr">
-                      <a:solidFill>
-                        <a:srgbClr val="48464B"/>
-                      </a:solidFill>
-                      <a:prstDash val="solid"/>
-                      <a:round/>
-                      <a:headEnd type="none" w="med" len="med"/>
-                      <a:tailEnd type="none" w="med" len="med"/>
-                    </a:lnL>
-                    <a:lnR w="12700" cap="flat" cmpd="sng" algn="ctr">
-                      <a:solidFill>
-                        <a:srgbClr val="48464B"/>
-                      </a:solidFill>
-                      <a:prstDash val="solid"/>
-                      <a:round/>
-                      <a:headEnd type="none" w="med" len="med"/>
-                      <a:tailEnd type="none" w="med" len="med"/>
-                    </a:lnR>
-                    <a:lnT w="12700" cap="flat" cmpd="sng" algn="ctr">
-                      <a:solidFill>
-                        <a:srgbClr val="48464B"/>
-                      </a:solidFill>
-                      <a:prstDash val="solid"/>
-                      <a:round/>
-                      <a:headEnd type="none" w="med" len="med"/>
-                      <a:tailEnd type="none" w="med" len="med"/>
-                    </a:lnT>
-                    <a:lnB w="12700" cap="flat" cmpd="sng" algn="ctr">
-                      <a:solidFill>
-                        <a:srgbClr val="48464B"/>
-                      </a:solidFill>
-                      <a:prstDash val="solid"/>
-                      <a:round/>
-                      <a:headEnd type="none" w="med" len="med"/>
-                      <a:tailEnd type="none" w="med" len="med"/>
-                    </a:lnB>
-                  </a:tcPr>
-                </a:tc>
-                <a:tc>
-                  <a:txBody>
-                    <a:bodyPr/>
-                    <a:lstStyle/>
-                    <a:p>
-                      <a:pPr indent="0" marL="0">
-                        <a:lnSpc>
-                          <a:spcPts val="1680"/>
-                        </a:lnSpc>
-                        <a:buNone/>
-                      </a:pPr>
-                      <a:r>
-                        <a:rPr lang="en-US" sz="1200" dirty="0">
-                          <a:solidFill>
-                            <a:srgbClr val="ECEAF0"/>
-                          </a:solidFill>
-                          <a:latin typeface="Manrope" pitchFamily="34" charset="0"/>
-                          <a:ea typeface="Manrope" pitchFamily="34" charset="-122"/>
-                          <a:cs typeface="Manrope" pitchFamily="34" charset="-120"/>
-                        </a:rPr>
-                        <a:t>✕ falla · paró el cap. 3</a:t>
-                      </a:r>
-                      <a:endParaRPr lang="en-US" sz="1200" dirty="0">
-                        <a:latin typeface="Manrope" charset="0"/>
-                        <a:ea typeface="Manrope" charset="0"/>
-                        <a:cs typeface="Manrope" charset="0"/>
-                      </a:endParaRPr>
-                    </a:p>
-                  </a:txBody>
-                  <a:tcPr marL="76200" marR="76200" marT="25400" marB="25400" anchor="t">
-                    <a:lnL w="12700" cap="flat" cmpd="sng" algn="ctr">
-                      <a:solidFill>
-                        <a:srgbClr val="48464B"/>
-                      </a:solidFill>
-                      <a:prstDash val="solid"/>
-                      <a:round/>
-                      <a:headEnd type="none" w="med" len="med"/>
-                      <a:tailEnd type="none" w="med" len="med"/>
-                    </a:lnL>
-                    <a:lnR w="12700" cap="flat" cmpd="sng" algn="ctr">
-                      <a:solidFill>
-                        <a:srgbClr val="48464B"/>
-                      </a:solidFill>
-                      <a:prstDash val="solid"/>
-                      <a:round/>
-                      <a:headEnd type="none" w="med" len="med"/>
-                      <a:tailEnd type="none" w="med" len="med"/>
-                    </a:lnR>
-                    <a:lnT w="12700" cap="flat" cmpd="sng" algn="ctr">
-                      <a:solidFill>
-                        <a:srgbClr val="48464B"/>
-                      </a:solidFill>
-                      <a:prstDash val="solid"/>
-                      <a:round/>
-                      <a:headEnd type="none" w="med" len="med"/>
-                      <a:tailEnd type="none" w="med" len="med"/>
-                    </a:lnT>
-                    <a:lnB w="12700" cap="flat" cmpd="sng" algn="ctr">
-                      <a:solidFill>
-                        <a:srgbClr val="48464B"/>
-                      </a:solidFill>
-                      <a:prstDash val="solid"/>
-                      <a:round/>
-                      <a:headEnd type="none" w="med" len="med"/>
-                      <a:tailEnd type="none" w="med" len="med"/>
-                    </a:lnB>
-                  </a:tcPr>
-                </a:tc>
-                <a:tc>
-                  <a:txBody>
-                    <a:bodyPr/>
-                    <a:lstStyle/>
-                    <a:p>
-                      <a:pPr indent="0" marL="0">
-                        <a:lnSpc>
-                          <a:spcPts val="1680"/>
-                        </a:lnSpc>
-                        <a:buNone/>
-                      </a:pPr>
-                      <a:r>
-                        <a:rPr lang="en-US" sz="1200" dirty="0">
-                          <a:solidFill>
-                            <a:srgbClr val="E0975A"/>
-                          </a:solidFill>
-                          <a:latin typeface="Manrope" pitchFamily="34" charset="0"/>
-                          <a:ea typeface="Manrope" pitchFamily="34" charset="-122"/>
-                          <a:cs typeface="Manrope" pitchFamily="34" charset="-120"/>
-                        </a:rPr>
-                        <a:t>✓ pasa</a:t>
-                      </a:r>
-                      <a:endParaRPr lang="en-US" sz="1200" dirty="0">
-                        <a:latin typeface="Manrope" charset="0"/>
-                        <a:ea typeface="Manrope" charset="0"/>
-                        <a:cs typeface="Manrope" charset="0"/>
-                      </a:endParaRPr>
-                    </a:p>
-                  </a:txBody>
-                  <a:tcPr marL="76200" marR="76200" marT="25400" marB="25400" anchor="t">
-                    <a:lnL w="12700" cap="flat" cmpd="sng" algn="ctr">
-                      <a:solidFill>
-                        <a:srgbClr val="48464B"/>
-                      </a:solidFill>
-                      <a:prstDash val="solid"/>
-                      <a:round/>
-                      <a:headEnd type="none" w="med" len="med"/>
-                      <a:tailEnd type="none" w="med" len="med"/>
-                    </a:lnL>
-                    <a:lnR w="12700" cap="flat" cmpd="sng" algn="ctr">
-                      <a:solidFill>
-                        <a:srgbClr val="48464B"/>
-                      </a:solidFill>
-                      <a:prstDash val="solid"/>
-                      <a:round/>
-                      <a:headEnd type="none" w="med" len="med"/>
-                      <a:tailEnd type="none" w="med" len="med"/>
-                    </a:lnR>
-                    <a:lnT w="12700" cap="flat" cmpd="sng" algn="ctr">
-                      <a:solidFill>
-                        <a:srgbClr val="48464B"/>
-                      </a:solidFill>
-                      <a:prstDash val="solid"/>
-                      <a:round/>
-                      <a:headEnd type="none" w="med" len="med"/>
-                      <a:tailEnd type="none" w="med" len="med"/>
-                    </a:lnT>
-                    <a:lnB w="12700" cap="flat" cmpd="sng" algn="ctr">
-                      <a:solidFill>
-                        <a:srgbClr val="48464B"/>
-                      </a:solidFill>
-                      <a:prstDash val="solid"/>
-                      <a:round/>
-                      <a:headEnd type="none" w="med" len="med"/>
-                      <a:tailEnd type="none" w="med" len="med"/>
-                    </a:lnB>
-                  </a:tcPr>
-                </a:tc>
-                <a:tc>
-                  <a:txBody>
-                    <a:bodyPr/>
-                    <a:lstStyle/>
-                    <a:p>
-                      <a:pPr indent="0" marL="0">
-                        <a:lnSpc>
-                          <a:spcPts val="1680"/>
-                        </a:lnSpc>
-                        <a:buNone/>
-                      </a:pPr>
-                      <a:r>
-                        <a:rPr lang="en-US" sz="1200" dirty="0">
-                          <a:solidFill>
-                            <a:srgbClr val="E0975A"/>
-                          </a:solidFill>
-                          <a:latin typeface="Manrope" pitchFamily="34" charset="0"/>
-                          <a:ea typeface="Manrope" pitchFamily="34" charset="-122"/>
-                          <a:cs typeface="Manrope" pitchFamily="34" charset="-120"/>
-                        </a:rPr>
-                        <a:t>✓ pasa</a:t>
-                      </a:r>
-                      <a:endParaRPr lang="en-US" sz="1200" dirty="0">
-                        <a:latin typeface="Manrope" charset="0"/>
-                        <a:ea typeface="Manrope" charset="0"/>
-                        <a:cs typeface="Manrope" charset="0"/>
-                      </a:endParaRPr>
-                    </a:p>
-                  </a:txBody>
-                  <a:tcPr marL="76200" marR="76200" marT="25400" marB="25400" anchor="t">
-                    <a:lnL w="12700" cap="flat" cmpd="sng" algn="ctr">
-                      <a:solidFill>
-                        <a:srgbClr val="48464B"/>
-                      </a:solidFill>
-                      <a:prstDash val="solid"/>
-                      <a:round/>
-                      <a:headEnd type="none" w="med" len="med"/>
-                      <a:tailEnd type="none" w="med" len="med"/>
-                    </a:lnL>
-                    <a:lnR w="12700" cap="flat" cmpd="sng" algn="ctr">
-                      <a:solidFill>
-                        <a:srgbClr val="48464B"/>
-                      </a:solidFill>
-                      <a:prstDash val="solid"/>
-                      <a:round/>
-                      <a:headEnd type="none" w="med" len="med"/>
-                      <a:tailEnd type="none" w="med" len="med"/>
-                    </a:lnR>
-                    <a:lnT w="12700" cap="flat" cmpd="sng" algn="ctr">
-                      <a:solidFill>
-                        <a:srgbClr val="48464B"/>
-                      </a:solidFill>
-                      <a:prstDash val="solid"/>
-                      <a:round/>
-                      <a:headEnd type="none" w="med" len="med"/>
-                      <a:tailEnd type="none" w="med" len="med"/>
-                    </a:lnT>
-                    <a:lnB w="12700" cap="flat" cmpd="sng" algn="ctr">
-                      <a:solidFill>
-                        <a:srgbClr val="48464B"/>
-                      </a:solidFill>
-                      <a:prstDash val="solid"/>
-                      <a:round/>
-                      <a:headEnd type="none" w="med" len="med"/>
-                      <a:tailEnd type="none" w="med" len="med"/>
-                    </a:lnB>
-                  </a:tcPr>
-                </a:tc>
-                <a:tc>
-                  <a:txBody>
-                    <a:bodyPr/>
-                    <a:lstStyle/>
-                    <a:p>
-                      <a:pPr indent="0" marL="0">
-                        <a:lnSpc>
-                          <a:spcPts val="1680"/>
-                        </a:lnSpc>
-                        <a:buNone/>
-                      </a:pPr>
-                      <a:r>
-                        <a:rPr lang="en-US" sz="1200" dirty="0">
-                          <a:solidFill>
-                            <a:srgbClr val="ECEAF0"/>
-                          </a:solidFill>
-                          <a:latin typeface="Manrope" pitchFamily="34" charset="0"/>
-                          <a:ea typeface="Manrope" pitchFamily="34" charset="-122"/>
-                          <a:cs typeface="Manrope" pitchFamily="34" charset="-120"/>
-                        </a:rPr>
-                        <a:t>✕ falla · paró el cap. 2</a:t>
-                      </a:r>
-                      <a:endParaRPr lang="en-US" sz="1200" dirty="0">
-                        <a:latin typeface="Manrope" charset="0"/>
-                        <a:ea typeface="Manrope" charset="0"/>
-                        <a:cs typeface="Manrope" charset="0"/>
-                      </a:endParaRPr>
-                    </a:p>
-                  </a:txBody>
-                  <a:tcPr marL="76200" marR="76200" marT="25400" marB="25400" anchor="t">
-                    <a:lnL w="12700" cap="flat" cmpd="sng" algn="ctr">
-                      <a:solidFill>
-                        <a:srgbClr val="48464B"/>
-                      </a:solidFill>
-                      <a:prstDash val="solid"/>
-                      <a:round/>
-                      <a:headEnd type="none" w="med" len="med"/>
-                      <a:tailEnd type="none" w="med" len="med"/>
-                    </a:lnL>
-                    <a:lnR w="12700" cap="flat" cmpd="sng" algn="ctr">
-                      <a:solidFill>
-                        <a:srgbClr val="48464B"/>
-                      </a:solidFill>
-                      <a:prstDash val="solid"/>
-                      <a:round/>
-                      <a:headEnd type="none" w="med" len="med"/>
-                      <a:tailEnd type="none" w="med" len="med"/>
-                    </a:lnR>
-                    <a:lnT w="12700" cap="flat" cmpd="sng" algn="ctr">
-                      <a:solidFill>
-                        <a:srgbClr val="48464B"/>
-                      </a:solidFill>
-                      <a:prstDash val="solid"/>
-                      <a:round/>
-                      <a:headEnd type="none" w="med" len="med"/>
-                      <a:tailEnd type="none" w="med" len="med"/>
-                    </a:lnT>
-                    <a:lnB w="12700" cap="flat" cmpd="sng" algn="ctr">
-                      <a:solidFill>
-                        <a:srgbClr val="48464B"/>
-                      </a:solidFill>
-                      <a:prstDash val="solid"/>
-                      <a:round/>
-                      <a:headEnd type="none" w="med" len="med"/>
-                      <a:tailEnd type="none" w="med" len="med"/>
-                    </a:lnB>
-                  </a:tcPr>
-                </a:tc>
-              </a:tr>
-              <a:tr h="413941">
-                <a:tc>
-                  <a:txBody>
-                    <a:bodyPr/>
-                    <a:lstStyle/>
-                    <a:p>
-                      <a:pPr indent="0" marL="0">
-                        <a:lnSpc>
-                          <a:spcPts val="1680"/>
-                        </a:lnSpc>
-                        <a:buNone/>
-                      </a:pPr>
-                      <a:r>
-                        <a:rPr lang="en-US" sz="1200" dirty="0">
-                          <a:solidFill>
-                            <a:srgbClr val="A9A4B5"/>
-                          </a:solidFill>
-                          <a:latin typeface="Manrope" pitchFamily="34" charset="0"/>
-                          <a:ea typeface="Manrope" pitchFamily="34" charset="-122"/>
-                          <a:cs typeface="Manrope" pitchFamily="34" charset="-120"/>
-                        </a:rPr>
-                        <a:t>P4 · Juez de oficio</a:t>
-                      </a:r>
-                      <a:endParaRPr lang="en-US" sz="1200" dirty="0">
-                        <a:latin typeface="Manrope" charset="0"/>
-                        <a:ea typeface="Manrope" charset="0"/>
-                        <a:cs typeface="Manrope" charset="0"/>
-                      </a:endParaRPr>
-                    </a:p>
-                  </a:txBody>
-                  <a:tcPr marL="76200" marR="76200" marT="25400" marB="25400" anchor="t">
-                    <a:lnL w="12700" cap="flat" cmpd="sng" algn="ctr">
-                      <a:solidFill>
-                        <a:srgbClr val="48464B"/>
-                      </a:solidFill>
-                      <a:prstDash val="solid"/>
-                      <a:round/>
-                      <a:headEnd type="none" w="med" len="med"/>
-                      <a:tailEnd type="none" w="med" len="med"/>
-                    </a:lnL>
-                    <a:lnR w="12700" cap="flat" cmpd="sng" algn="ctr">
-                      <a:solidFill>
-                        <a:srgbClr val="48464B"/>
-                      </a:solidFill>
-                      <a:prstDash val="solid"/>
-                      <a:round/>
-                      <a:headEnd type="none" w="med" len="med"/>
-                      <a:tailEnd type="none" w="med" len="med"/>
-                    </a:lnR>
-                    <a:lnT w="12700" cap="flat" cmpd="sng" algn="ctr">
-                      <a:solidFill>
-                        <a:srgbClr val="48464B"/>
-                      </a:solidFill>
-                      <a:prstDash val="solid"/>
-                      <a:round/>
-                      <a:headEnd type="none" w="med" len="med"/>
-                      <a:tailEnd type="none" w="med" len="med"/>
-                    </a:lnT>
-                    <a:lnB w="12700" cap="flat" cmpd="sng" algn="ctr">
-                      <a:solidFill>
-                        <a:srgbClr val="48464B"/>
-                      </a:solidFill>
-                      <a:prstDash val="solid"/>
-                      <a:round/>
-                      <a:headEnd type="none" w="med" len="med"/>
-                      <a:tailEnd type="none" w="med" len="med"/>
-                    </a:lnB>
-                  </a:tcPr>
-                </a:tc>
-                <a:tc>
-                  <a:txBody>
-                    <a:bodyPr/>
-                    <a:lstStyle/>
-                    <a:p>
-                      <a:pPr indent="0" marL="0">
-                        <a:lnSpc>
-                          <a:spcPts val="1680"/>
-                        </a:lnSpc>
-                        <a:buNone/>
-                      </a:pPr>
-                      <a:r>
-                        <a:rPr lang="en-US" sz="1200" dirty="0">
-                          <a:solidFill>
-                            <a:srgbClr val="ECEAF0"/>
-                          </a:solidFill>
-                          <a:latin typeface="Manrope" pitchFamily="34" charset="0"/>
-                          <a:ea typeface="Manrope" pitchFamily="34" charset="-122"/>
-                          <a:cs typeface="Manrope" pitchFamily="34" charset="-120"/>
-                        </a:rPr>
-                        <a:t>✕ falla 6/16</a:t>
-                      </a:r>
-                      <a:endParaRPr lang="en-US" sz="1200" dirty="0">
-                        <a:latin typeface="Manrope" charset="0"/>
-                        <a:ea typeface="Manrope" charset="0"/>
-                        <a:cs typeface="Manrope" charset="0"/>
-                      </a:endParaRPr>
-                    </a:p>
-                  </a:txBody>
-                  <a:tcPr marL="76200" marR="76200" marT="25400" marB="25400" anchor="t">
-                    <a:lnL w="12700" cap="flat" cmpd="sng" algn="ctr">
-                      <a:solidFill>
-                        <a:srgbClr val="48464B"/>
-                      </a:solidFill>
-                      <a:prstDash val="solid"/>
-                      <a:round/>
-                      <a:headEnd type="none" w="med" len="med"/>
-                      <a:tailEnd type="none" w="med" len="med"/>
-                    </a:lnL>
-                    <a:lnR w="12700" cap="flat" cmpd="sng" algn="ctr">
-                      <a:solidFill>
-                        <a:srgbClr val="48464B"/>
-                      </a:solidFill>
-                      <a:prstDash val="solid"/>
-                      <a:round/>
-                      <a:headEnd type="none" w="med" len="med"/>
-                      <a:tailEnd type="none" w="med" len="med"/>
-                    </a:lnR>
-                    <a:lnT w="12700" cap="flat" cmpd="sng" algn="ctr">
-                      <a:solidFill>
-                        <a:srgbClr val="48464B"/>
-                      </a:solidFill>
-                      <a:prstDash val="solid"/>
-                      <a:round/>
-                      <a:headEnd type="none" w="med" len="med"/>
-                      <a:tailEnd type="none" w="med" len="med"/>
-                    </a:lnT>
-                    <a:lnB w="12700" cap="flat" cmpd="sng" algn="ctr">
-                      <a:solidFill>
-                        <a:srgbClr val="48464B"/>
-                      </a:solidFill>
-                      <a:prstDash val="solid"/>
-                      <a:round/>
-                      <a:headEnd type="none" w="med" len="med"/>
-                      <a:tailEnd type="none" w="med" len="med"/>
-                    </a:lnB>
-                  </a:tcPr>
-                </a:tc>
-                <a:tc>
-                  <a:txBody>
-                    <a:bodyPr/>
-                    <a:lstStyle/>
-                    <a:p>
-                      <a:pPr indent="0" marL="0">
-                        <a:lnSpc>
-                          <a:spcPts val="1680"/>
-                        </a:lnSpc>
-                        <a:buNone/>
-                      </a:pPr>
-                      <a:r>
-                        <a:rPr lang="en-US" sz="1200" dirty="0">
-                          <a:solidFill>
-                            <a:srgbClr val="ECEAF0"/>
-                          </a:solidFill>
-                          <a:latin typeface="Manrope" pitchFamily="34" charset="0"/>
-                          <a:ea typeface="Manrope" pitchFamily="34" charset="-122"/>
-                          <a:cs typeface="Manrope" pitchFamily="34" charset="-120"/>
-                        </a:rPr>
-                        <a:t>✕ falla 1/3</a:t>
-                      </a:r>
-                      <a:endParaRPr lang="en-US" sz="1200" dirty="0">
-                        <a:latin typeface="Manrope" charset="0"/>
-                        <a:ea typeface="Manrope" charset="0"/>
-                        <a:cs typeface="Manrope" charset="0"/>
-                      </a:endParaRPr>
-                    </a:p>
-                  </a:txBody>
-                  <a:tcPr marL="76200" marR="76200" marT="25400" marB="25400" anchor="t">
-                    <a:lnL w="12700" cap="flat" cmpd="sng" algn="ctr">
-                      <a:solidFill>
-                        <a:srgbClr val="48464B"/>
-                      </a:solidFill>
-                      <a:prstDash val="solid"/>
-                      <a:round/>
-                      <a:headEnd type="none" w="med" len="med"/>
-                      <a:tailEnd type="none" w="med" len="med"/>
-                    </a:lnL>
-                    <a:lnR w="12700" cap="flat" cmpd="sng" algn="ctr">
-                      <a:solidFill>
-                        <a:srgbClr val="48464B"/>
-                      </a:solidFill>
-                      <a:prstDash val="solid"/>
-                      <a:round/>
-                      <a:headEnd type="none" w="med" len="med"/>
-                      <a:tailEnd type="none" w="med" len="med"/>
-                    </a:lnR>
-                    <a:lnT w="12700" cap="flat" cmpd="sng" algn="ctr">
-                      <a:solidFill>
-                        <a:srgbClr val="48464B"/>
-                      </a:solidFill>
-                      <a:prstDash val="solid"/>
-                      <a:round/>
-                      <a:headEnd type="none" w="med" len="med"/>
-                      <a:tailEnd type="none" w="med" len="med"/>
-                    </a:lnT>
-                    <a:lnB w="12700" cap="flat" cmpd="sng" algn="ctr">
-                      <a:solidFill>
-                        <a:srgbClr val="48464B"/>
-                      </a:solidFill>
-                      <a:prstDash val="solid"/>
-                      <a:round/>
-                      <a:headEnd type="none" w="med" len="med"/>
-                      <a:tailEnd type="none" w="med" len="med"/>
-                    </a:lnB>
-                  </a:tcPr>
-                </a:tc>
-                <a:tc>
-                  <a:txBody>
-                    <a:bodyPr/>
-                    <a:lstStyle/>
-                    <a:p>
-                      <a:pPr indent="0" marL="0">
-                        <a:lnSpc>
-                          <a:spcPts val="1680"/>
-                        </a:lnSpc>
-                        <a:buNone/>
-                      </a:pPr>
-                      <a:r>
-                        <a:rPr lang="en-US" sz="1200" dirty="0">
-                          <a:solidFill>
-                            <a:srgbClr val="ECEAF0"/>
-                          </a:solidFill>
-                          <a:latin typeface="Manrope" pitchFamily="34" charset="0"/>
-                          <a:ea typeface="Manrope" pitchFamily="34" charset="-122"/>
-                          <a:cs typeface="Manrope" pitchFamily="34" charset="-120"/>
-                        </a:rPr>
-                        <a:t>✕ falla 4/6 · paró el cap. 3</a:t>
-                      </a:r>
-                      <a:endParaRPr lang="en-US" sz="1200" dirty="0">
-                        <a:latin typeface="Manrope" charset="0"/>
-                        <a:ea typeface="Manrope" charset="0"/>
-                        <a:cs typeface="Manrope" charset="0"/>
-                      </a:endParaRPr>
-                    </a:p>
-                  </a:txBody>
-                  <a:tcPr marL="76200" marR="76200" marT="25400" marB="25400" anchor="t">
-                    <a:lnL w="12700" cap="flat" cmpd="sng" algn="ctr">
-                      <a:solidFill>
-                        <a:srgbClr val="48464B"/>
-                      </a:solidFill>
-                      <a:prstDash val="solid"/>
-                      <a:round/>
-                      <a:headEnd type="none" w="med" len="med"/>
-                      <a:tailEnd type="none" w="med" len="med"/>
-                    </a:lnL>
-                    <a:lnR w="12700" cap="flat" cmpd="sng" algn="ctr">
-                      <a:solidFill>
-                        <a:srgbClr val="48464B"/>
-                      </a:solidFill>
-                      <a:prstDash val="solid"/>
-                      <a:round/>
-                      <a:headEnd type="none" w="med" len="med"/>
-                      <a:tailEnd type="none" w="med" len="med"/>
-                    </a:lnR>
-                    <a:lnT w="12700" cap="flat" cmpd="sng" algn="ctr">
-                      <a:solidFill>
-                        <a:srgbClr val="48464B"/>
-                      </a:solidFill>
-                      <a:prstDash val="solid"/>
-                      <a:round/>
-                      <a:headEnd type="none" w="med" len="med"/>
-                      <a:tailEnd type="none" w="med" len="med"/>
-                    </a:lnT>
-                    <a:lnB w="12700" cap="flat" cmpd="sng" algn="ctr">
-                      <a:solidFill>
-                        <a:srgbClr val="48464B"/>
-                      </a:solidFill>
-                      <a:prstDash val="solid"/>
-                      <a:round/>
-                      <a:headEnd type="none" w="med" len="med"/>
-                      <a:tailEnd type="none" w="med" len="med"/>
-                    </a:lnB>
-                  </a:tcPr>
-                </a:tc>
-                <a:tc>
-                  <a:txBody>
-                    <a:bodyPr/>
-                    <a:lstStyle/>
-                    <a:p>
-                      <a:pPr indent="0" marL="0">
-                        <a:lnSpc>
-                          <a:spcPts val="1680"/>
-                        </a:lnSpc>
-                        <a:buNone/>
-                      </a:pPr>
-                      <a:r>
-                        <a:rPr lang="en-US" sz="1200" dirty="0">
-                          <a:solidFill>
-                            <a:srgbClr val="ECEAF0"/>
-                          </a:solidFill>
-                          <a:latin typeface="Manrope" pitchFamily="34" charset="0"/>
-                          <a:ea typeface="Manrope" pitchFamily="34" charset="-122"/>
-                          <a:cs typeface="Manrope" pitchFamily="34" charset="-120"/>
-                        </a:rPr>
-                        <a:t>✕ falla 3/3 · paró el cap. 1</a:t>
-                      </a:r>
-                      <a:endParaRPr lang="en-US" sz="1200" dirty="0">
-                        <a:latin typeface="Manrope" charset="0"/>
-                        <a:ea typeface="Manrope" charset="0"/>
-                        <a:cs typeface="Manrope" charset="0"/>
-                      </a:endParaRPr>
-                    </a:p>
-                  </a:txBody>
-                  <a:tcPr marL="76200" marR="76200" marT="25400" marB="25400" anchor="t">
-                    <a:lnL w="12700" cap="flat" cmpd="sng" algn="ctr">
-                      <a:solidFill>
-                        <a:srgbClr val="48464B"/>
-                      </a:solidFill>
-                      <a:prstDash val="solid"/>
-                      <a:round/>
-                      <a:headEnd type="none" w="med" len="med"/>
-                      <a:tailEnd type="none" w="med" len="med"/>
-                    </a:lnL>
-                    <a:lnR w="12700" cap="flat" cmpd="sng" algn="ctr">
-                      <a:solidFill>
-                        <a:srgbClr val="48464B"/>
-                      </a:solidFill>
-                      <a:prstDash val="solid"/>
-                      <a:round/>
-                      <a:headEnd type="none" w="med" len="med"/>
-                      <a:tailEnd type="none" w="med" len="med"/>
-                    </a:lnR>
-                    <a:lnT w="12700" cap="flat" cmpd="sng" algn="ctr">
-                      <a:solidFill>
-                        <a:srgbClr val="48464B"/>
-                      </a:solidFill>
-                      <a:prstDash val="solid"/>
-                      <a:round/>
-                      <a:headEnd type="none" w="med" len="med"/>
-                      <a:tailEnd type="none" w="med" len="med"/>
-                    </a:lnT>
-                    <a:lnB w="12700" cap="flat" cmpd="sng" algn="ctr">
-                      <a:solidFill>
-                        <a:srgbClr val="48464B"/>
-                      </a:solidFill>
-                      <a:prstDash val="solid"/>
-                      <a:round/>
-                      <a:headEnd type="none" w="med" len="med"/>
-                      <a:tailEnd type="none" w="med" len="med"/>
-                    </a:lnB>
-                  </a:tcPr>
-                </a:tc>
-                <a:tc>
-                  <a:txBody>
-                    <a:bodyPr/>
-                    <a:lstStyle/>
-                    <a:p>
-                      <a:pPr indent="0" marL="0">
-                        <a:lnSpc>
-                          <a:spcPts val="1680"/>
-                        </a:lnSpc>
-                        <a:buNone/>
-                      </a:pPr>
-                      <a:r>
-                        <a:rPr lang="en-US" sz="1200" dirty="0">
-                          <a:solidFill>
-                            <a:srgbClr val="ECEAF0"/>
-                          </a:solidFill>
-                          <a:latin typeface="Manrope" pitchFamily="34" charset="0"/>
-                          <a:ea typeface="Manrope" pitchFamily="34" charset="-122"/>
-                          <a:cs typeface="Manrope" pitchFamily="34" charset="-120"/>
-                        </a:rPr>
-                        <a:t>✕ falla 2/3</a:t>
-                      </a:r>
-                      <a:endParaRPr lang="en-US" sz="1200" dirty="0">
-                        <a:latin typeface="Manrope" charset="0"/>
-                        <a:ea typeface="Manrope" charset="0"/>
-                        <a:cs typeface="Manrope" charset="0"/>
-                      </a:endParaRPr>
-                    </a:p>
-                  </a:txBody>
-                  <a:tcPr marL="76200" marR="76200" marT="25400" marB="25400" anchor="t">
-                    <a:lnL w="12700" cap="flat" cmpd="sng" algn="ctr">
-                      <a:solidFill>
-                        <a:srgbClr val="48464B"/>
-                      </a:solidFill>
-                      <a:prstDash val="solid"/>
-                      <a:round/>
-                      <a:headEnd type="none" w="med" len="med"/>
-                      <a:tailEnd type="none" w="med" len="med"/>
-                    </a:lnL>
-                    <a:lnR w="12700" cap="flat" cmpd="sng" algn="ctr">
-                      <a:solidFill>
-                        <a:srgbClr val="48464B"/>
-                      </a:solidFill>
-                      <a:prstDash val="solid"/>
-                      <a:round/>
-                      <a:headEnd type="none" w="med" len="med"/>
-                      <a:tailEnd type="none" w="med" len="med"/>
-                    </a:lnR>
-                    <a:lnT w="12700" cap="flat" cmpd="sng" algn="ctr">
-                      <a:solidFill>
-                        <a:srgbClr val="48464B"/>
-                      </a:solidFill>
-                      <a:prstDash val="solid"/>
-                      <a:round/>
-                      <a:headEnd type="none" w="med" len="med"/>
-                      <a:tailEnd type="none" w="med" len="med"/>
-                    </a:lnT>
-                    <a:lnB w="12700" cap="flat" cmpd="sng" algn="ctr">
-                      <a:solidFill>
-                        <a:srgbClr val="48464B"/>
-                      </a:solidFill>
-                      <a:prstDash val="solid"/>
-                      <a:round/>
-                      <a:headEnd type="none" w="med" len="med"/>
-                      <a:tailEnd type="none" w="med" len="med"/>
-                    </a:lnB>
-                  </a:tcPr>
-                </a:tc>
-              </a:tr>
-              <a:tr h="238720">
-                <a:tc>
-                  <a:txBody>
-                    <a:bodyPr/>
-                    <a:lstStyle/>
-                    <a:p>
-                      <a:pPr indent="0" marL="0">
-                        <a:lnSpc>
-                          <a:spcPts val="1680"/>
-                        </a:lnSpc>
-                        <a:buNone/>
-                      </a:pPr>
-                      <a:r>
-                        <a:rPr lang="en-US" sz="1200" dirty="0">
-                          <a:solidFill>
-                            <a:srgbClr val="A9A4B5"/>
-                          </a:solidFill>
-                          <a:latin typeface="Manrope" pitchFamily="34" charset="0"/>
-                          <a:ea typeface="Manrope" pitchFamily="34" charset="-122"/>
-                          <a:cs typeface="Manrope" pitchFamily="34" charset="-120"/>
-                        </a:rPr>
-                        <a:t>P5 · Rúbrica global</a:t>
-                      </a:r>
-                      <a:endParaRPr lang="en-US" sz="1200" dirty="0">
-                        <a:latin typeface="Manrope" charset="0"/>
-                        <a:ea typeface="Manrope" charset="0"/>
-                        <a:cs typeface="Manrope" charset="0"/>
-                      </a:endParaRPr>
-                    </a:p>
-                  </a:txBody>
-                  <a:tcPr marL="76200" marR="76200" marT="25400" marB="25400" anchor="t">
-                    <a:lnL w="12700" cap="flat" cmpd="sng" algn="ctr">
-                      <a:solidFill>
-                        <a:srgbClr val="48464B"/>
-                      </a:solidFill>
-                      <a:prstDash val="solid"/>
-                      <a:round/>
-                      <a:headEnd type="none" w="med" len="med"/>
-                      <a:tailEnd type="none" w="med" len="med"/>
-                    </a:lnL>
-                    <a:lnR w="12700" cap="flat" cmpd="sng" algn="ctr">
-                      <a:solidFill>
-                        <a:srgbClr val="48464B"/>
-                      </a:solidFill>
-                      <a:prstDash val="solid"/>
-                      <a:round/>
-                      <a:headEnd type="none" w="med" len="med"/>
-                      <a:tailEnd type="none" w="med" len="med"/>
-                    </a:lnR>
-                    <a:lnT w="12700" cap="flat" cmpd="sng" algn="ctr">
-                      <a:solidFill>
-                        <a:srgbClr val="48464B"/>
-                      </a:solidFill>
-                      <a:prstDash val="solid"/>
-                      <a:round/>
-                      <a:headEnd type="none" w="med" len="med"/>
-                      <a:tailEnd type="none" w="med" len="med"/>
-                    </a:lnT>
-                    <a:lnB w="12700" cap="flat" cmpd="sng" algn="ctr">
-                      <a:solidFill>
-                        <a:srgbClr val="48464B"/>
-                      </a:solidFill>
-                      <a:prstDash val="solid"/>
-                      <a:round/>
-                      <a:headEnd type="none" w="med" len="med"/>
-                      <a:tailEnd type="none" w="med" len="med"/>
-                    </a:lnB>
-                  </a:tcPr>
-                </a:tc>
-                <a:tc>
-                  <a:txBody>
-                    <a:bodyPr/>
-                    <a:lstStyle/>
-                    <a:p>
-                      <a:pPr indent="0" marL="0">
-                        <a:lnSpc>
-                          <a:spcPts val="1680"/>
-                        </a:lnSpc>
-                        <a:buNone/>
-                      </a:pPr>
-                      <a:r>
-                        <a:rPr lang="en-US" sz="1200" dirty="0">
-                          <a:solidFill>
-                            <a:srgbClr val="E0975A"/>
-                          </a:solidFill>
-                          <a:latin typeface="Manrope" pitchFamily="34" charset="0"/>
-                          <a:ea typeface="Manrope" pitchFamily="34" charset="-122"/>
-                          <a:cs typeface="Manrope" pitchFamily="34" charset="-120"/>
-                        </a:rPr>
-                        <a:t>✓ 4·4·5·5·4·5 (media 4,5)</a:t>
-                      </a:r>
-                      <a:endParaRPr lang="en-US" sz="1200" dirty="0">
-                        <a:latin typeface="Manrope" charset="0"/>
-                        <a:ea typeface="Manrope" charset="0"/>
-                        <a:cs typeface="Manrope" charset="0"/>
-                      </a:endParaRPr>
-                    </a:p>
-                  </a:txBody>
-                  <a:tcPr marL="76200" marR="76200" marT="25400" marB="25400" anchor="t">
-                    <a:lnL w="12700" cap="flat" cmpd="sng" algn="ctr">
-                      <a:solidFill>
-                        <a:srgbClr val="48464B"/>
-                      </a:solidFill>
-                      <a:prstDash val="solid"/>
-                      <a:round/>
-                      <a:headEnd type="none" w="med" len="med"/>
-                      <a:tailEnd type="none" w="med" len="med"/>
-                    </a:lnL>
-                    <a:lnR w="12700" cap="flat" cmpd="sng" algn="ctr">
-                      <a:solidFill>
-                        <a:srgbClr val="48464B"/>
-                      </a:solidFill>
-                      <a:prstDash val="solid"/>
-                      <a:round/>
-                      <a:headEnd type="none" w="med" len="med"/>
-                      <a:tailEnd type="none" w="med" len="med"/>
-                    </a:lnR>
-                    <a:lnT w="12700" cap="flat" cmpd="sng" algn="ctr">
-                      <a:solidFill>
-                        <a:srgbClr val="48464B"/>
-                      </a:solidFill>
-                      <a:prstDash val="solid"/>
-                      <a:round/>
-                      <a:headEnd type="none" w="med" len="med"/>
-                      <a:tailEnd type="none" w="med" len="med"/>
-                    </a:lnT>
-                    <a:lnB w="12700" cap="flat" cmpd="sng" algn="ctr">
-                      <a:solidFill>
-                        <a:srgbClr val="48464B"/>
-                      </a:solidFill>
-                      <a:prstDash val="solid"/>
-                      <a:round/>
-                      <a:headEnd type="none" w="med" len="med"/>
-                      <a:tailEnd type="none" w="med" len="med"/>
-                    </a:lnB>
-                  </a:tcPr>
-                </a:tc>
-                <a:tc>
-                  <a:txBody>
-                    <a:bodyPr/>
-                    <a:lstStyle/>
-                    <a:p>
-                      <a:pPr indent="0" marL="0">
-                        <a:lnSpc>
-                          <a:spcPts val="1680"/>
-                        </a:lnSpc>
-                        <a:buNone/>
-                      </a:pPr>
-                      <a:r>
-                        <a:rPr lang="en-US" sz="1200" dirty="0">
-                          <a:solidFill>
-                            <a:srgbClr val="A9A4B5"/>
-                          </a:solidFill>
-                          <a:latin typeface="Manrope" pitchFamily="34" charset="0"/>
-                          <a:ea typeface="Manrope" pitchFamily="34" charset="-122"/>
-                          <a:cs typeface="Manrope" pitchFamily="34" charset="-120"/>
-                        </a:rPr>
-                        <a:t>○ sin ejecutar</a:t>
-                      </a:r>
-                      <a:endParaRPr lang="en-US" sz="1200" dirty="0">
-                        <a:latin typeface="Manrope" charset="0"/>
-                        <a:ea typeface="Manrope" charset="0"/>
-                        <a:cs typeface="Manrope" charset="0"/>
-                      </a:endParaRPr>
-                    </a:p>
-                  </a:txBody>
-                  <a:tcPr marL="76200" marR="76200" marT="25400" marB="25400" anchor="t">
-                    <a:lnL w="12700" cap="flat" cmpd="sng" algn="ctr">
-                      <a:solidFill>
-                        <a:srgbClr val="48464B"/>
-                      </a:solidFill>
-                      <a:prstDash val="solid"/>
-                      <a:round/>
-                      <a:headEnd type="none" w="med" len="med"/>
-                      <a:tailEnd type="none" w="med" len="med"/>
-                    </a:lnL>
-                    <a:lnR w="12700" cap="flat" cmpd="sng" algn="ctr">
-                      <a:solidFill>
-                        <a:srgbClr val="48464B"/>
-                      </a:solidFill>
-                      <a:prstDash val="solid"/>
-                      <a:round/>
-                      <a:headEnd type="none" w="med" len="med"/>
-                      <a:tailEnd type="none" w="med" len="med"/>
-                    </a:lnR>
-                    <a:lnT w="12700" cap="flat" cmpd="sng" algn="ctr">
-                      <a:solidFill>
-                        <a:srgbClr val="48464B"/>
-                      </a:solidFill>
-                      <a:prstDash val="solid"/>
-                      <a:round/>
-                      <a:headEnd type="none" w="med" len="med"/>
-                      <a:tailEnd type="none" w="med" len="med"/>
-                    </a:lnT>
-                    <a:lnB w="12700" cap="flat" cmpd="sng" algn="ctr">
-                      <a:solidFill>
-                        <a:srgbClr val="48464B"/>
-                      </a:solidFill>
-                      <a:prstDash val="solid"/>
-                      <a:round/>
-                      <a:headEnd type="none" w="med" len="med"/>
-                      <a:tailEnd type="none" w="med" len="med"/>
-                    </a:lnB>
-                  </a:tcPr>
-                </a:tc>
-                <a:tc>
-                  <a:txBody>
-                    <a:bodyPr/>
-                    <a:lstStyle/>
-                    <a:p>
-                      <a:pPr indent="0" marL="0">
-                        <a:lnSpc>
-                          <a:spcPts val="1680"/>
-                        </a:lnSpc>
-                        <a:buNone/>
-                      </a:pPr>
-                      <a:r>
-                        <a:rPr lang="en-US" sz="1200" dirty="0">
-                          <a:solidFill>
-                            <a:srgbClr val="A9A4B5"/>
-                          </a:solidFill>
-                          <a:latin typeface="Manrope" pitchFamily="34" charset="0"/>
-                          <a:ea typeface="Manrope" pitchFamily="34" charset="-122"/>
-                          <a:cs typeface="Manrope" pitchFamily="34" charset="-120"/>
-                        </a:rPr>
-                        <a:t>○ sin ejecutar</a:t>
-                      </a:r>
-                      <a:endParaRPr lang="en-US" sz="1200" dirty="0">
-                        <a:latin typeface="Manrope" charset="0"/>
-                        <a:ea typeface="Manrope" charset="0"/>
-                        <a:cs typeface="Manrope" charset="0"/>
-                      </a:endParaRPr>
-                    </a:p>
-                  </a:txBody>
-                  <a:tcPr marL="76200" marR="76200" marT="25400" marB="25400" anchor="t">
-                    <a:lnL w="12700" cap="flat" cmpd="sng" algn="ctr">
-                      <a:solidFill>
-                        <a:srgbClr val="48464B"/>
-                      </a:solidFill>
-                      <a:prstDash val="solid"/>
-                      <a:round/>
-                      <a:headEnd type="none" w="med" len="med"/>
-                      <a:tailEnd type="none" w="med" len="med"/>
-                    </a:lnL>
-                    <a:lnR w="12700" cap="flat" cmpd="sng" algn="ctr">
-                      <a:solidFill>
-                        <a:srgbClr val="48464B"/>
-                      </a:solidFill>
-                      <a:prstDash val="solid"/>
-                      <a:round/>
-                      <a:headEnd type="none" w="med" len="med"/>
-                      <a:tailEnd type="none" w="med" len="med"/>
-                    </a:lnR>
-                    <a:lnT w="12700" cap="flat" cmpd="sng" algn="ctr">
-                      <a:solidFill>
-                        <a:srgbClr val="48464B"/>
-                      </a:solidFill>
-                      <a:prstDash val="solid"/>
-                      <a:round/>
-                      <a:headEnd type="none" w="med" len="med"/>
-                      <a:tailEnd type="none" w="med" len="med"/>
-                    </a:lnT>
-                    <a:lnB w="12700" cap="flat" cmpd="sng" algn="ctr">
-                      <a:solidFill>
-                        <a:srgbClr val="48464B"/>
-                      </a:solidFill>
-                      <a:prstDash val="solid"/>
-                      <a:round/>
-                      <a:headEnd type="none" w="med" len="med"/>
-                      <a:tailEnd type="none" w="med" len="med"/>
-                    </a:lnB>
-                  </a:tcPr>
-                </a:tc>
-                <a:tc>
-                  <a:txBody>
-                    <a:bodyPr/>
-                    <a:lstStyle/>
-                    <a:p>
-                      <a:pPr indent="0" marL="0">
-                        <a:lnSpc>
-                          <a:spcPts val="1680"/>
-                        </a:lnSpc>
-                        <a:buNone/>
-                      </a:pPr>
-                      <a:r>
-                        <a:rPr lang="en-US" sz="1200" dirty="0">
-                          <a:solidFill>
-                            <a:srgbClr val="A9A4B5"/>
-                          </a:solidFill>
-                          <a:latin typeface="Manrope" pitchFamily="34" charset="0"/>
-                          <a:ea typeface="Manrope" pitchFamily="34" charset="-122"/>
-                          <a:cs typeface="Manrope" pitchFamily="34" charset="-120"/>
-                        </a:rPr>
-                        <a:t>○ sin ejecutar</a:t>
-                      </a:r>
-                      <a:endParaRPr lang="en-US" sz="1200" dirty="0">
-                        <a:latin typeface="Manrope" charset="0"/>
-                        <a:ea typeface="Manrope" charset="0"/>
-                        <a:cs typeface="Manrope" charset="0"/>
-                      </a:endParaRPr>
-                    </a:p>
-                  </a:txBody>
-                  <a:tcPr marL="76200" marR="76200" marT="25400" marB="25400" anchor="t">
-                    <a:lnL w="12700" cap="flat" cmpd="sng" algn="ctr">
-                      <a:solidFill>
-                        <a:srgbClr val="48464B"/>
-                      </a:solidFill>
-                      <a:prstDash val="solid"/>
-                      <a:round/>
-                      <a:headEnd type="none" w="med" len="med"/>
-                      <a:tailEnd type="none" w="med" len="med"/>
-                    </a:lnL>
-                    <a:lnR w="12700" cap="flat" cmpd="sng" algn="ctr">
-                      <a:solidFill>
-                        <a:srgbClr val="48464B"/>
-                      </a:solidFill>
-                      <a:prstDash val="solid"/>
-                      <a:round/>
-                      <a:headEnd type="none" w="med" len="med"/>
-                      <a:tailEnd type="none" w="med" len="med"/>
-                    </a:lnR>
-                    <a:lnT w="12700" cap="flat" cmpd="sng" algn="ctr">
-                      <a:solidFill>
-                        <a:srgbClr val="48464B"/>
-                      </a:solidFill>
-                      <a:prstDash val="solid"/>
-                      <a:round/>
-                      <a:headEnd type="none" w="med" len="med"/>
-                      <a:tailEnd type="none" w="med" len="med"/>
-                    </a:lnT>
-                    <a:lnB w="12700" cap="flat" cmpd="sng" algn="ctr">
-                      <a:solidFill>
-                        <a:srgbClr val="48464B"/>
-                      </a:solidFill>
-                      <a:prstDash val="solid"/>
-                      <a:round/>
-                      <a:headEnd type="none" w="med" len="med"/>
-                      <a:tailEnd type="none" w="med" len="med"/>
-                    </a:lnB>
-                  </a:tcPr>
-                </a:tc>
-                <a:tc>
-                  <a:txBody>
-                    <a:bodyPr/>
-                    <a:lstStyle/>
-                    <a:p>
-                      <a:pPr indent="0" marL="0">
-                        <a:lnSpc>
-                          <a:spcPts val="1680"/>
-                        </a:lnSpc>
-                        <a:buNone/>
-                      </a:pPr>
-                      <a:r>
-                        <a:rPr lang="en-US" sz="1200" dirty="0">
-                          <a:solidFill>
-                            <a:srgbClr val="A9A4B5"/>
-                          </a:solidFill>
-                          <a:latin typeface="Manrope" pitchFamily="34" charset="0"/>
-                          <a:ea typeface="Manrope" pitchFamily="34" charset="-122"/>
-                          <a:cs typeface="Manrope" pitchFamily="34" charset="-120"/>
-                        </a:rPr>
-                        <a:t>○ sin ejecutar</a:t>
-                      </a:r>
-                      <a:endParaRPr lang="en-US" sz="1200" dirty="0">
-                        <a:latin typeface="Manrope" charset="0"/>
-                        <a:ea typeface="Manrope" charset="0"/>
-                        <a:cs typeface="Manrope" charset="0"/>
-                      </a:endParaRPr>
-                    </a:p>
-                  </a:txBody>
-                  <a:tcPr marL="76200" marR="76200" marT="25400" marB="25400" anchor="t">
-                    <a:lnL w="12700" cap="flat" cmpd="sng" algn="ctr">
-                      <a:solidFill>
-                        <a:srgbClr val="48464B"/>
-                      </a:solidFill>
-                      <a:prstDash val="solid"/>
-                      <a:round/>
-                      <a:headEnd type="none" w="med" len="med"/>
-                      <a:tailEnd type="none" w="med" len="med"/>
-                    </a:lnL>
-                    <a:lnR w="12700" cap="flat" cmpd="sng" algn="ctr">
-                      <a:solidFill>
-                        <a:srgbClr val="48464B"/>
-                      </a:solidFill>
-                      <a:prstDash val="solid"/>
-                      <a:round/>
-                      <a:headEnd type="none" w="med" len="med"/>
-                      <a:tailEnd type="none" w="med" len="med"/>
-                    </a:lnR>
-                    <a:lnT w="12700" cap="flat" cmpd="sng" algn="ctr">
-                      <a:solidFill>
-                        <a:srgbClr val="48464B"/>
-                      </a:solidFill>
-                      <a:prstDash val="solid"/>
-                      <a:round/>
-                      <a:headEnd type="none" w="med" len="med"/>
-                      <a:tailEnd type="none" w="med" len="med"/>
-                    </a:lnT>
-                    <a:lnB w="12700" cap="flat" cmpd="sng" algn="ctr">
-                      <a:solidFill>
-                        <a:srgbClr val="48464B"/>
-                      </a:solidFill>
-                      <a:prstDash val="solid"/>
-                      <a:round/>
-                      <a:headEnd type="none" w="med" len="med"/>
-                      <a:tailEnd type="none" w="med" len="med"/>
-                    </a:lnB>
-                  </a:tcPr>
-                </a:tc>
-              </a:tr>
-              <a:tr h="238720">
-                <a:tc>
-                  <a:txBody>
-                    <a:bodyPr/>
-                    <a:lstStyle/>
-                    <a:p>
-                      <a:pPr indent="0" marL="0">
-                        <a:lnSpc>
-                          <a:spcPts val="1680"/>
-                        </a:lnSpc>
-                        <a:buNone/>
-                      </a:pPr>
-                      <a:r>
-                        <a:rPr lang="en-US" sz="1200" dirty="0">
-                          <a:solidFill>
-                            <a:srgbClr val="A9A4B5"/>
-                          </a:solidFill>
-                          <a:latin typeface="Manrope" pitchFamily="34" charset="0"/>
-                          <a:ea typeface="Manrope" pitchFamily="34" charset="-122"/>
-                          <a:cs typeface="Manrope" pitchFamily="34" charset="-120"/>
-                        </a:rPr>
-                        <a:t>P6 · Lean 4</a:t>
-                      </a:r>
-                      <a:endParaRPr lang="en-US" sz="1200" dirty="0">
-                        <a:latin typeface="Manrope" charset="0"/>
-                        <a:ea typeface="Manrope" charset="0"/>
-                        <a:cs typeface="Manrope" charset="0"/>
-                      </a:endParaRPr>
-                    </a:p>
-                  </a:txBody>
-                  <a:tcPr marL="76200" marR="76200" marT="25400" marB="25400" anchor="t">
-                    <a:lnL w="12700" cap="flat" cmpd="sng" algn="ctr">
-                      <a:solidFill>
-                        <a:srgbClr val="48464B"/>
-                      </a:solidFill>
-                      <a:prstDash val="solid"/>
-                      <a:round/>
-                      <a:headEnd type="none" w="med" len="med"/>
-                      <a:tailEnd type="none" w="med" len="med"/>
-                    </a:lnL>
-                    <a:lnR w="12700" cap="flat" cmpd="sng" algn="ctr">
-                      <a:solidFill>
-                        <a:srgbClr val="48464B"/>
-                      </a:solidFill>
-                      <a:prstDash val="solid"/>
-                      <a:round/>
-                      <a:headEnd type="none" w="med" len="med"/>
-                      <a:tailEnd type="none" w="med" len="med"/>
-                    </a:lnR>
-                    <a:lnT w="12700" cap="flat" cmpd="sng" algn="ctr">
-                      <a:solidFill>
-                        <a:srgbClr val="48464B"/>
-                      </a:solidFill>
-                      <a:prstDash val="solid"/>
-                      <a:round/>
-                      <a:headEnd type="none" w="med" len="med"/>
-                      <a:tailEnd type="none" w="med" len="med"/>
-                    </a:lnT>
-                    <a:lnB w="12700" cap="flat" cmpd="sng" algn="ctr">
-                      <a:solidFill>
-                        <a:srgbClr val="48464B"/>
-                      </a:solidFill>
-                      <a:prstDash val="solid"/>
-                      <a:round/>
-                      <a:headEnd type="none" w="med" len="med"/>
-                      <a:tailEnd type="none" w="med" len="med"/>
-                    </a:lnB>
-                  </a:tcPr>
-                </a:tc>
-                <a:tc>
-                  <a:txBody>
-                    <a:bodyPr/>
-                    <a:lstStyle/>
-                    <a:p>
-                      <a:pPr indent="0" marL="0">
-                        <a:lnSpc>
-                          <a:spcPts val="1680"/>
-                        </a:lnSpc>
-                        <a:buNone/>
-                      </a:pPr>
-                      <a:r>
-                        <a:rPr lang="en-US" sz="1200" dirty="0">
-                          <a:solidFill>
-                            <a:srgbClr val="E0975A"/>
-                          </a:solidFill>
-                          <a:latin typeface="Manrope" pitchFamily="34" charset="0"/>
-                          <a:ea typeface="Manrope" pitchFamily="34" charset="-122"/>
-                          <a:cs typeface="Manrope" pitchFamily="34" charset="-120"/>
-                        </a:rPr>
-                        <a:t>✓ pasa · 115 eventos</a:t>
-                      </a:r>
-                      <a:endParaRPr lang="en-US" sz="1200" dirty="0">
-                        <a:latin typeface="Manrope" charset="0"/>
-                        <a:ea typeface="Manrope" charset="0"/>
-                        <a:cs typeface="Manrope" charset="0"/>
-                      </a:endParaRPr>
-                    </a:p>
-                  </a:txBody>
-                  <a:tcPr marL="76200" marR="76200" marT="25400" marB="25400" anchor="t">
-                    <a:lnL w="12700" cap="flat" cmpd="sng" algn="ctr">
-                      <a:solidFill>
-                        <a:srgbClr val="48464B"/>
-                      </a:solidFill>
-                      <a:prstDash val="solid"/>
-                      <a:round/>
-                      <a:headEnd type="none" w="med" len="med"/>
-                      <a:tailEnd type="none" w="med" len="med"/>
-                    </a:lnL>
-                    <a:lnR w="12700" cap="flat" cmpd="sng" algn="ctr">
-                      <a:solidFill>
-                        <a:srgbClr val="48464B"/>
-                      </a:solidFill>
-                      <a:prstDash val="solid"/>
-                      <a:round/>
-                      <a:headEnd type="none" w="med" len="med"/>
-                      <a:tailEnd type="none" w="med" len="med"/>
-                    </a:lnR>
-                    <a:lnT w="12700" cap="flat" cmpd="sng" algn="ctr">
-                      <a:solidFill>
-                        <a:srgbClr val="48464B"/>
-                      </a:solidFill>
-                      <a:prstDash val="solid"/>
-                      <a:round/>
-                      <a:headEnd type="none" w="med" len="med"/>
-                      <a:tailEnd type="none" w="med" len="med"/>
-                    </a:lnT>
-                    <a:lnB w="12700" cap="flat" cmpd="sng" algn="ctr">
-                      <a:solidFill>
-                        <a:srgbClr val="48464B"/>
-                      </a:solidFill>
-                      <a:prstDash val="solid"/>
-                      <a:round/>
-                      <a:headEnd type="none" w="med" len="med"/>
-                      <a:tailEnd type="none" w="med" len="med"/>
-                    </a:lnB>
-                  </a:tcPr>
-                </a:tc>
-                <a:tc>
-                  <a:txBody>
-                    <a:bodyPr/>
-                    <a:lstStyle/>
-                    <a:p>
-                      <a:pPr indent="0" marL="0">
-                        <a:lnSpc>
-                          <a:spcPts val="1680"/>
-                        </a:lnSpc>
-                        <a:buNone/>
-                      </a:pPr>
-                      <a:r>
-                        <a:rPr lang="en-US" sz="1200" dirty="0">
-                          <a:solidFill>
-                            <a:srgbClr val="A9A4B5"/>
-                          </a:solidFill>
-                          <a:latin typeface="Manrope" pitchFamily="34" charset="0"/>
-                          <a:ea typeface="Manrope" pitchFamily="34" charset="-122"/>
-                          <a:cs typeface="Manrope" pitchFamily="34" charset="-120"/>
-                        </a:rPr>
-                        <a:t>○ sin ejecutar</a:t>
-                      </a:r>
-                      <a:endParaRPr lang="en-US" sz="1200" dirty="0">
-                        <a:latin typeface="Manrope" charset="0"/>
-                        <a:ea typeface="Manrope" charset="0"/>
-                        <a:cs typeface="Manrope" charset="0"/>
-                      </a:endParaRPr>
-                    </a:p>
-                  </a:txBody>
-                  <a:tcPr marL="76200" marR="76200" marT="25400" marB="25400" anchor="t">
-                    <a:lnL w="12700" cap="flat" cmpd="sng" algn="ctr">
-                      <a:solidFill>
-                        <a:srgbClr val="48464B"/>
-                      </a:solidFill>
-                      <a:prstDash val="solid"/>
-                      <a:round/>
-                      <a:headEnd type="none" w="med" len="med"/>
-                      <a:tailEnd type="none" w="med" len="med"/>
-                    </a:lnL>
-                    <a:lnR w="12700" cap="flat" cmpd="sng" algn="ctr">
-                      <a:solidFill>
-                        <a:srgbClr val="48464B"/>
-                      </a:solidFill>
-                      <a:prstDash val="solid"/>
-                      <a:round/>
-                      <a:headEnd type="none" w="med" len="med"/>
-                      <a:tailEnd type="none" w="med" len="med"/>
-                    </a:lnR>
-                    <a:lnT w="12700" cap="flat" cmpd="sng" algn="ctr">
-                      <a:solidFill>
-                        <a:srgbClr val="48464B"/>
-                      </a:solidFill>
-                      <a:prstDash val="solid"/>
-                      <a:round/>
-                      <a:headEnd type="none" w="med" len="med"/>
-                      <a:tailEnd type="none" w="med" len="med"/>
-                    </a:lnT>
-                    <a:lnB w="12700" cap="flat" cmpd="sng" algn="ctr">
-                      <a:solidFill>
-                        <a:srgbClr val="48464B"/>
-                      </a:solidFill>
-                      <a:prstDash val="solid"/>
-                      <a:round/>
-                      <a:headEnd type="none" w="med" len="med"/>
-                      <a:tailEnd type="none" w="med" len="med"/>
-                    </a:lnB>
-                  </a:tcPr>
-                </a:tc>
-                <a:tc>
-                  <a:txBody>
-                    <a:bodyPr/>
-                    <a:lstStyle/>
-                    <a:p>
-                      <a:pPr indent="0" marL="0">
-                        <a:lnSpc>
-                          <a:spcPts val="1680"/>
-                        </a:lnSpc>
-                        <a:buNone/>
-                      </a:pPr>
-                      <a:r>
-                        <a:rPr lang="en-US" sz="1200" dirty="0">
-                          <a:solidFill>
-                            <a:srgbClr val="A9A4B5"/>
-                          </a:solidFill>
-                          <a:latin typeface="Manrope" pitchFamily="34" charset="0"/>
-                          <a:ea typeface="Manrope" pitchFamily="34" charset="-122"/>
-                          <a:cs typeface="Manrope" pitchFamily="34" charset="-120"/>
-                        </a:rPr>
-                        <a:t>○ sin ejecutar</a:t>
-                      </a:r>
-                      <a:endParaRPr lang="en-US" sz="1200" dirty="0">
-                        <a:latin typeface="Manrope" charset="0"/>
-                        <a:ea typeface="Manrope" charset="0"/>
-                        <a:cs typeface="Manrope" charset="0"/>
-                      </a:endParaRPr>
-                    </a:p>
-                  </a:txBody>
-                  <a:tcPr marL="76200" marR="76200" marT="25400" marB="25400" anchor="t">
-                    <a:lnL w="12700" cap="flat" cmpd="sng" algn="ctr">
-                      <a:solidFill>
-                        <a:srgbClr val="48464B"/>
-                      </a:solidFill>
-                      <a:prstDash val="solid"/>
-                      <a:round/>
-                      <a:headEnd type="none" w="med" len="med"/>
-                      <a:tailEnd type="none" w="med" len="med"/>
-                    </a:lnL>
-                    <a:lnR w="12700" cap="flat" cmpd="sng" algn="ctr">
-                      <a:solidFill>
-                        <a:srgbClr val="48464B"/>
-                      </a:solidFill>
-                      <a:prstDash val="solid"/>
-                      <a:round/>
-                      <a:headEnd type="none" w="med" len="med"/>
-                      <a:tailEnd type="none" w="med" len="med"/>
-                    </a:lnR>
-                    <a:lnT w="12700" cap="flat" cmpd="sng" algn="ctr">
-                      <a:solidFill>
-                        <a:srgbClr val="48464B"/>
-                      </a:solidFill>
-                      <a:prstDash val="solid"/>
-                      <a:round/>
-                      <a:headEnd type="none" w="med" len="med"/>
-                      <a:tailEnd type="none" w="med" len="med"/>
-                    </a:lnT>
-                    <a:lnB w="12700" cap="flat" cmpd="sng" algn="ctr">
-                      <a:solidFill>
-                        <a:srgbClr val="48464B"/>
-                      </a:solidFill>
-                      <a:prstDash val="solid"/>
-                      <a:round/>
-                      <a:headEnd type="none" w="med" len="med"/>
-                      <a:tailEnd type="none" w="med" len="med"/>
-                    </a:lnB>
-                  </a:tcPr>
-                </a:tc>
-                <a:tc>
-                  <a:txBody>
-                    <a:bodyPr/>
-                    <a:lstStyle/>
-                    <a:p>
-                      <a:pPr indent="0" marL="0">
-                        <a:lnSpc>
-                          <a:spcPts val="1680"/>
-                        </a:lnSpc>
-                        <a:buNone/>
-                      </a:pPr>
-                      <a:r>
-                        <a:rPr lang="en-US" sz="1200" dirty="0">
-                          <a:solidFill>
-                            <a:srgbClr val="A9A4B5"/>
-                          </a:solidFill>
-                          <a:latin typeface="Manrope" pitchFamily="34" charset="0"/>
-                          <a:ea typeface="Manrope" pitchFamily="34" charset="-122"/>
-                          <a:cs typeface="Manrope" pitchFamily="34" charset="-120"/>
-                        </a:rPr>
-                        <a:t>○ sin ejecutar</a:t>
-                      </a:r>
-                      <a:endParaRPr lang="en-US" sz="1200" dirty="0">
-                        <a:latin typeface="Manrope" charset="0"/>
-                        <a:ea typeface="Manrope" charset="0"/>
-                        <a:cs typeface="Manrope" charset="0"/>
-                      </a:endParaRPr>
-                    </a:p>
-                  </a:txBody>
-                  <a:tcPr marL="76200" marR="76200" marT="25400" marB="25400" anchor="t">
-                    <a:lnL w="12700" cap="flat" cmpd="sng" algn="ctr">
-                      <a:solidFill>
-                        <a:srgbClr val="48464B"/>
-                      </a:solidFill>
-                      <a:prstDash val="solid"/>
-                      <a:round/>
-                      <a:headEnd type="none" w="med" len="med"/>
-                      <a:tailEnd type="none" w="med" len="med"/>
-                    </a:lnL>
-                    <a:lnR w="12700" cap="flat" cmpd="sng" algn="ctr">
-                      <a:solidFill>
-                        <a:srgbClr val="48464B"/>
-                      </a:solidFill>
-                      <a:prstDash val="solid"/>
-                      <a:round/>
-                      <a:headEnd type="none" w="med" len="med"/>
-                      <a:tailEnd type="none" w="med" len="med"/>
-                    </a:lnR>
-                    <a:lnT w="12700" cap="flat" cmpd="sng" algn="ctr">
-                      <a:solidFill>
-                        <a:srgbClr val="48464B"/>
-                      </a:solidFill>
-                      <a:prstDash val="solid"/>
-                      <a:round/>
-                      <a:headEnd type="none" w="med" len="med"/>
-                      <a:tailEnd type="none" w="med" len="med"/>
-                    </a:lnT>
-                    <a:lnB w="12700" cap="flat" cmpd="sng" algn="ctr">
-                      <a:solidFill>
-                        <a:srgbClr val="48464B"/>
-                      </a:solidFill>
-                      <a:prstDash val="solid"/>
-                      <a:round/>
-                      <a:headEnd type="none" w="med" len="med"/>
-                      <a:tailEnd type="none" w="med" len="med"/>
-                    </a:lnB>
-                  </a:tcPr>
-                </a:tc>
-                <a:tc>
-                  <a:txBody>
-                    <a:bodyPr/>
-                    <a:lstStyle/>
-                    <a:p>
-                      <a:pPr indent="0" marL="0">
-                        <a:lnSpc>
-                          <a:spcPts val="1680"/>
-                        </a:lnSpc>
-                        <a:buNone/>
-                      </a:pPr>
-                      <a:r>
-                        <a:rPr lang="en-US" sz="1200" dirty="0">
-                          <a:solidFill>
-                            <a:srgbClr val="A9A4B5"/>
-                          </a:solidFill>
-                          <a:latin typeface="Manrope" pitchFamily="34" charset="0"/>
-                          <a:ea typeface="Manrope" pitchFamily="34" charset="-122"/>
-                          <a:cs typeface="Manrope" pitchFamily="34" charset="-120"/>
-                        </a:rPr>
-                        <a:t>○ sin ejecutar</a:t>
-                      </a:r>
-                      <a:endParaRPr lang="en-US" sz="1200" dirty="0">
-                        <a:latin typeface="Manrope" charset="0"/>
-                        <a:ea typeface="Manrope" charset="0"/>
-                        <a:cs typeface="Manrope" charset="0"/>
-                      </a:endParaRPr>
-                    </a:p>
-                  </a:txBody>
-                  <a:tcPr marL="76200" marR="76200" marT="25400" marB="25400" anchor="t">
-                    <a:lnL w="12700" cap="flat" cmpd="sng" algn="ctr">
-                      <a:solidFill>
-                        <a:srgbClr val="48464B"/>
-                      </a:solidFill>
-                      <a:prstDash val="solid"/>
-                      <a:round/>
-                      <a:headEnd type="none" w="med" len="med"/>
-                      <a:tailEnd type="none" w="med" len="med"/>
-                    </a:lnL>
-                    <a:lnR w="12700" cap="flat" cmpd="sng" algn="ctr">
-                      <a:solidFill>
-                        <a:srgbClr val="48464B"/>
-                      </a:solidFill>
-                      <a:prstDash val="solid"/>
-                      <a:round/>
-                      <a:headEnd type="none" w="med" len="med"/>
-                      <a:tailEnd type="none" w="med" len="med"/>
-                    </a:lnR>
-                    <a:lnT w="12700" cap="flat" cmpd="sng" algn="ctr">
-                      <a:solidFill>
-                        <a:srgbClr val="48464B"/>
-                      </a:solidFill>
-                      <a:prstDash val="solid"/>
-                      <a:round/>
-                      <a:headEnd type="none" w="med" len="med"/>
-                      <a:tailEnd type="none" w="med" len="med"/>
-                    </a:lnT>
-                    <a:lnB w="12700" cap="flat" cmpd="sng" algn="ctr">
-                      <a:solidFill>
-                        <a:srgbClr val="48464B"/>
-                      </a:solidFill>
-                      <a:prstDash val="solid"/>
-                      <a:round/>
-                      <a:headEnd type="none" w="med" len="med"/>
-                      <a:tailEnd type="none" w="med" len="med"/>
-                    </a:lnB>
-                  </a:tcPr>
-                </a:tc>
-              </a:tr>
-              <a:tr h="238720">
-                <a:tc>
-                  <a:txBody>
-                    <a:bodyPr/>
-                    <a:lstStyle/>
-                    <a:p>
-                      <a:pPr indent="0" marL="0">
-                        <a:lnSpc>
-                          <a:spcPts val="1680"/>
-                        </a:lnSpc>
-                        <a:buNone/>
-                      </a:pPr>
-                      <a:r>
-                        <a:rPr lang="en-US" sz="1200" dirty="0">
-                          <a:solidFill>
-                            <a:srgbClr val="A9A4B5"/>
-                          </a:solidFill>
-                          <a:latin typeface="Manrope" pitchFamily="34" charset="0"/>
-                          <a:ea typeface="Manrope" pitchFamily="34" charset="-122"/>
-                          <a:cs typeface="Manrope" pitchFamily="34" charset="-120"/>
-                        </a:rPr>
-                        <a:t>Coste · total 86,92 $</a:t>
-                      </a:r>
-                      <a:endParaRPr lang="en-US" sz="1200" dirty="0">
-                        <a:latin typeface="Manrope" charset="0"/>
-                        <a:ea typeface="Manrope" charset="0"/>
-                        <a:cs typeface="Manrope" charset="0"/>
-                      </a:endParaRPr>
-                    </a:p>
-                  </a:txBody>
-                  <a:tcPr marL="76200" marR="76200" marT="25400" marB="25400" anchor="t">
-                    <a:lnL w="12700" cap="flat" cmpd="sng" algn="ctr">
-                      <a:solidFill>
-                        <a:srgbClr val="48464B"/>
-                      </a:solidFill>
-                      <a:prstDash val="solid"/>
-                      <a:round/>
-                      <a:headEnd type="none" w="med" len="med"/>
-                      <a:tailEnd type="none" w="med" len="med"/>
-                    </a:lnL>
-                    <a:lnR w="12700" cap="flat" cmpd="sng" algn="ctr">
-                      <a:solidFill>
-                        <a:srgbClr val="48464B"/>
-                      </a:solidFill>
-                      <a:prstDash val="solid"/>
-                      <a:round/>
-                      <a:headEnd type="none" w="med" len="med"/>
-                      <a:tailEnd type="none" w="med" len="med"/>
-                    </a:lnR>
-                    <a:lnT w="12700" cap="flat" cmpd="sng" algn="ctr">
-                      <a:solidFill>
-                        <a:srgbClr val="48464B"/>
-                      </a:solidFill>
-                      <a:prstDash val="solid"/>
-                      <a:round/>
-                      <a:headEnd type="none" w="med" len="med"/>
-                      <a:tailEnd type="none" w="med" len="med"/>
-                    </a:lnT>
-                    <a:lnB w="12700" cap="flat" cmpd="sng" algn="ctr">
-                      <a:solidFill>
-                        <a:srgbClr val="48464B"/>
-                      </a:solidFill>
-                      <a:prstDash val="solid"/>
-                      <a:round/>
-                      <a:headEnd type="none" w="med" len="med"/>
-                      <a:tailEnd type="none" w="med" len="med"/>
-                    </a:lnB>
-                  </a:tcPr>
-                </a:tc>
-                <a:tc>
-                  <a:txBody>
-                    <a:bodyPr/>
-                    <a:lstStyle/>
-                    <a:p>
-                      <a:pPr indent="0" marL="0">
-                        <a:lnSpc>
-                          <a:spcPts val="1680"/>
-                        </a:lnSpc>
-                        <a:buNone/>
-                      </a:pPr>
-                      <a:r>
-                        <a:rPr lang="en-US" sz="1200" dirty="0">
-                          <a:solidFill>
-                            <a:srgbClr val="ECEAF0"/>
-                          </a:solidFill>
-                          <a:latin typeface="Manrope" pitchFamily="34" charset="0"/>
-                          <a:ea typeface="Manrope" pitchFamily="34" charset="-122"/>
-                          <a:cs typeface="Manrope" pitchFamily="34" charset="-120"/>
-                        </a:rPr>
-                        <a:t>41,47 $</a:t>
-                      </a:r>
-                      <a:endParaRPr lang="en-US" sz="1200" dirty="0">
-                        <a:latin typeface="Manrope" charset="0"/>
-                        <a:ea typeface="Manrope" charset="0"/>
-                        <a:cs typeface="Manrope" charset="0"/>
-                      </a:endParaRPr>
-                    </a:p>
-                  </a:txBody>
-                  <a:tcPr marL="76200" marR="76200" marT="25400" marB="25400" anchor="t">
-                    <a:lnL w="12700" cap="flat" cmpd="sng" algn="ctr">
-                      <a:solidFill>
-                        <a:srgbClr val="48464B"/>
-                      </a:solidFill>
-                      <a:prstDash val="solid"/>
-                      <a:round/>
-                      <a:headEnd type="none" w="med" len="med"/>
-                      <a:tailEnd type="none" w="med" len="med"/>
-                    </a:lnL>
-                    <a:lnR w="12700" cap="flat" cmpd="sng" algn="ctr">
-                      <a:solidFill>
-                        <a:srgbClr val="48464B"/>
-                      </a:solidFill>
-                      <a:prstDash val="solid"/>
-                      <a:round/>
-                      <a:headEnd type="none" w="med" len="med"/>
-                      <a:tailEnd type="none" w="med" len="med"/>
-                    </a:lnR>
-                    <a:lnT w="12700" cap="flat" cmpd="sng" algn="ctr">
-                      <a:solidFill>
-                        <a:srgbClr val="48464B"/>
-                      </a:solidFill>
-                      <a:prstDash val="solid"/>
-                      <a:round/>
-                      <a:headEnd type="none" w="med" len="med"/>
-                      <a:tailEnd type="none" w="med" len="med"/>
-                    </a:lnT>
-                    <a:lnB w="12700" cap="flat" cmpd="sng" algn="ctr">
-                      <a:solidFill>
-                        <a:srgbClr val="48464B"/>
-                      </a:solidFill>
-                      <a:prstDash val="solid"/>
-                      <a:round/>
-                      <a:headEnd type="none" w="med" len="med"/>
-                      <a:tailEnd type="none" w="med" len="med"/>
-                    </a:lnB>
-                  </a:tcPr>
-                </a:tc>
-                <a:tc>
-                  <a:txBody>
-                    <a:bodyPr/>
-                    <a:lstStyle/>
-                    <a:p>
-                      <a:pPr indent="0" marL="0">
-                        <a:lnSpc>
-                          <a:spcPts val="1680"/>
-                        </a:lnSpc>
-                        <a:buNone/>
-                      </a:pPr>
-                      <a:r>
-                        <a:rPr lang="en-US" sz="1200" dirty="0">
-                          <a:solidFill>
-                            <a:srgbClr val="ECEAF0"/>
-                          </a:solidFill>
-                          <a:latin typeface="Manrope" pitchFamily="34" charset="0"/>
-                          <a:ea typeface="Manrope" pitchFamily="34" charset="-122"/>
-                          <a:cs typeface="Manrope" pitchFamily="34" charset="-120"/>
-                        </a:rPr>
-                        <a:t>12,00 $</a:t>
-                      </a:r>
-                      <a:endParaRPr lang="en-US" sz="1200" dirty="0">
-                        <a:latin typeface="Manrope" charset="0"/>
-                        <a:ea typeface="Manrope" charset="0"/>
-                        <a:cs typeface="Manrope" charset="0"/>
-                      </a:endParaRPr>
-                    </a:p>
-                  </a:txBody>
-                  <a:tcPr marL="76200" marR="76200" marT="25400" marB="25400" anchor="t">
-                    <a:lnL w="12700" cap="flat" cmpd="sng" algn="ctr">
-                      <a:solidFill>
-                        <a:srgbClr val="48464B"/>
-                      </a:solidFill>
-                      <a:prstDash val="solid"/>
-                      <a:round/>
-                      <a:headEnd type="none" w="med" len="med"/>
-                      <a:tailEnd type="none" w="med" len="med"/>
-                    </a:lnL>
-                    <a:lnR w="12700" cap="flat" cmpd="sng" algn="ctr">
-                      <a:solidFill>
-                        <a:srgbClr val="48464B"/>
-                      </a:solidFill>
-                      <a:prstDash val="solid"/>
-                      <a:round/>
-                      <a:headEnd type="none" w="med" len="med"/>
-                      <a:tailEnd type="none" w="med" len="med"/>
-                    </a:lnR>
-                    <a:lnT w="12700" cap="flat" cmpd="sng" algn="ctr">
-                      <a:solidFill>
-                        <a:srgbClr val="48464B"/>
-                      </a:solidFill>
-                      <a:prstDash val="solid"/>
-                      <a:round/>
-                      <a:headEnd type="none" w="med" len="med"/>
-                      <a:tailEnd type="none" w="med" len="med"/>
-                    </a:lnT>
-                    <a:lnB w="12700" cap="flat" cmpd="sng" algn="ctr">
-                      <a:solidFill>
-                        <a:srgbClr val="48464B"/>
-                      </a:solidFill>
-                      <a:prstDash val="solid"/>
-                      <a:round/>
-                      <a:headEnd type="none" w="med" len="med"/>
-                      <a:tailEnd type="none" w="med" len="med"/>
-                    </a:lnB>
-                  </a:tcPr>
-                </a:tc>
-                <a:tc>
-                  <a:txBody>
-                    <a:bodyPr/>
-                    <a:lstStyle/>
-                    <a:p>
-                      <a:pPr indent="0" marL="0">
-                        <a:lnSpc>
-                          <a:spcPts val="1680"/>
-                        </a:lnSpc>
-                        <a:buNone/>
-                      </a:pPr>
-                      <a:r>
-                        <a:rPr lang="en-US" sz="1200" dirty="0">
-                          <a:solidFill>
-                            <a:srgbClr val="ECEAF0"/>
-                          </a:solidFill>
-                          <a:latin typeface="Manrope" pitchFamily="34" charset="0"/>
-                          <a:ea typeface="Manrope" pitchFamily="34" charset="-122"/>
-                          <a:cs typeface="Manrope" pitchFamily="34" charset="-120"/>
-                        </a:rPr>
-                        <a:t>18,62 $</a:t>
-                      </a:r>
-                      <a:endParaRPr lang="en-US" sz="1200" dirty="0">
-                        <a:latin typeface="Manrope" charset="0"/>
-                        <a:ea typeface="Manrope" charset="0"/>
-                        <a:cs typeface="Manrope" charset="0"/>
-                      </a:endParaRPr>
-                    </a:p>
-                  </a:txBody>
-                  <a:tcPr marL="76200" marR="76200" marT="25400" marB="25400" anchor="t">
-                    <a:lnL w="12700" cap="flat" cmpd="sng" algn="ctr">
-                      <a:solidFill>
-                        <a:srgbClr val="48464B"/>
-                      </a:solidFill>
-                      <a:prstDash val="solid"/>
-                      <a:round/>
-                      <a:headEnd type="none" w="med" len="med"/>
-                      <a:tailEnd type="none" w="med" len="med"/>
-                    </a:lnL>
-                    <a:lnR w="12700" cap="flat" cmpd="sng" algn="ctr">
-                      <a:solidFill>
-                        <a:srgbClr val="48464B"/>
-                      </a:solidFill>
-                      <a:prstDash val="solid"/>
-                      <a:round/>
-                      <a:headEnd type="none" w="med" len="med"/>
-                      <a:tailEnd type="none" w="med" len="med"/>
-                    </a:lnR>
-                    <a:lnT w="12700" cap="flat" cmpd="sng" algn="ctr">
-                      <a:solidFill>
-                        <a:srgbClr val="48464B"/>
-                      </a:solidFill>
-                      <a:prstDash val="solid"/>
-                      <a:round/>
-                      <a:headEnd type="none" w="med" len="med"/>
-                      <a:tailEnd type="none" w="med" len="med"/>
-                    </a:lnT>
-                    <a:lnB w="12700" cap="flat" cmpd="sng" algn="ctr">
-                      <a:solidFill>
-                        <a:srgbClr val="48464B"/>
-                      </a:solidFill>
-                      <a:prstDash val="solid"/>
-                      <a:round/>
-                      <a:headEnd type="none" w="med" len="med"/>
-                      <a:tailEnd type="none" w="med" len="med"/>
-                    </a:lnB>
-                  </a:tcPr>
-                </a:tc>
-                <a:tc>
-                  <a:txBody>
-                    <a:bodyPr/>
-                    <a:lstStyle/>
-                    <a:p>
-                      <a:pPr indent="0" marL="0">
-                        <a:lnSpc>
-                          <a:spcPts val="1680"/>
-                        </a:lnSpc>
-                        <a:buNone/>
-                      </a:pPr>
-                      <a:r>
-                        <a:rPr lang="en-US" sz="1200" dirty="0">
-                          <a:solidFill>
-                            <a:srgbClr val="ECEAF0"/>
-                          </a:solidFill>
-                          <a:latin typeface="Manrope" pitchFamily="34" charset="0"/>
-                          <a:ea typeface="Manrope" pitchFamily="34" charset="-122"/>
-                          <a:cs typeface="Manrope" pitchFamily="34" charset="-120"/>
-                        </a:rPr>
-                        <a:t>7,37 $</a:t>
-                      </a:r>
-                      <a:endParaRPr lang="en-US" sz="1200" dirty="0">
-                        <a:latin typeface="Manrope" charset="0"/>
-                        <a:ea typeface="Manrope" charset="0"/>
-                        <a:cs typeface="Manrope" charset="0"/>
-                      </a:endParaRPr>
-                    </a:p>
-                  </a:txBody>
-                  <a:tcPr marL="76200" marR="76200" marT="25400" marB="25400" anchor="t">
-                    <a:lnL w="12700" cap="flat" cmpd="sng" algn="ctr">
-                      <a:solidFill>
-                        <a:srgbClr val="48464B"/>
-                      </a:solidFill>
-                      <a:prstDash val="solid"/>
-                      <a:round/>
-                      <a:headEnd type="none" w="med" len="med"/>
-                      <a:tailEnd type="none" w="med" len="med"/>
-                    </a:lnL>
-                    <a:lnR w="12700" cap="flat" cmpd="sng" algn="ctr">
-                      <a:solidFill>
-                        <a:srgbClr val="48464B"/>
-                      </a:solidFill>
-                      <a:prstDash val="solid"/>
-                      <a:round/>
-                      <a:headEnd type="none" w="med" len="med"/>
-                      <a:tailEnd type="none" w="med" len="med"/>
-                    </a:lnR>
-                    <a:lnT w="12700" cap="flat" cmpd="sng" algn="ctr">
-                      <a:solidFill>
-                        <a:srgbClr val="48464B"/>
-                      </a:solidFill>
-                      <a:prstDash val="solid"/>
-                      <a:round/>
-                      <a:headEnd type="none" w="med" len="med"/>
-                      <a:tailEnd type="none" w="med" len="med"/>
-                    </a:lnT>
-                    <a:lnB w="12700" cap="flat" cmpd="sng" algn="ctr">
-                      <a:solidFill>
-                        <a:srgbClr val="48464B"/>
-                      </a:solidFill>
-                      <a:prstDash val="solid"/>
-                      <a:round/>
-                      <a:headEnd type="none" w="med" len="med"/>
-                      <a:tailEnd type="none" w="med" len="med"/>
-                    </a:lnB>
-                  </a:tcPr>
-                </a:tc>
-                <a:tc>
-                  <a:txBody>
-                    <a:bodyPr/>
-                    <a:lstStyle/>
-                    <a:p>
-                      <a:pPr indent="0" marL="0">
-                        <a:lnSpc>
-                          <a:spcPts val="1680"/>
-                        </a:lnSpc>
-                        <a:buNone/>
-                      </a:pPr>
-                      <a:r>
-                        <a:rPr lang="en-US" sz="1200" dirty="0">
-                          <a:solidFill>
-                            <a:srgbClr val="ECEAF0"/>
-                          </a:solidFill>
-                          <a:latin typeface="Manrope" pitchFamily="34" charset="0"/>
-                          <a:ea typeface="Manrope" pitchFamily="34" charset="-122"/>
-                          <a:cs typeface="Manrope" pitchFamily="34" charset="-120"/>
-                        </a:rPr>
-                        <a:t>7,47 $</a:t>
-                      </a:r>
-                      <a:endParaRPr lang="en-US" sz="1200" dirty="0">
-                        <a:latin typeface="Manrope" charset="0"/>
-                        <a:ea typeface="Manrope" charset="0"/>
-                        <a:cs typeface="Manrope" charset="0"/>
-                      </a:endParaRPr>
-                    </a:p>
-                  </a:txBody>
-                  <a:tcPr marL="76200" marR="76200" marT="25400" marB="25400" anchor="t">
-                    <a:lnL w="12700" cap="flat" cmpd="sng" algn="ctr">
-                      <a:solidFill>
-                        <a:srgbClr val="48464B"/>
-                      </a:solidFill>
-                      <a:prstDash val="solid"/>
-                      <a:round/>
-                      <a:headEnd type="none" w="med" len="med"/>
-                      <a:tailEnd type="none" w="med" len="med"/>
-                    </a:lnL>
-                    <a:lnR w="12700" cap="flat" cmpd="sng" algn="ctr">
-                      <a:solidFill>
-                        <a:srgbClr val="48464B"/>
-                      </a:solidFill>
-                      <a:prstDash val="solid"/>
-                      <a:round/>
-                      <a:headEnd type="none" w="med" len="med"/>
-                      <a:tailEnd type="none" w="med" len="med"/>
-                    </a:lnR>
-                    <a:lnT w="12700" cap="flat" cmpd="sng" algn="ctr">
-                      <a:solidFill>
-                        <a:srgbClr val="48464B"/>
-                      </a:solidFill>
-                      <a:prstDash val="solid"/>
-                      <a:round/>
-                      <a:headEnd type="none" w="med" len="med"/>
-                      <a:tailEnd type="none" w="med" len="med"/>
-                    </a:lnT>
-                    <a:lnB w="12700" cap="flat" cmpd="sng" algn="ctr">
-                      <a:solidFill>
-                        <a:srgbClr val="48464B"/>
-                      </a:solidFill>
-                      <a:prstDash val="solid"/>
-                      <a:round/>
-                      <a:headEnd type="none" w="med" len="med"/>
-                      <a:tailEnd type="none" w="med" len="med"/>
-                    </a:lnB>
-                  </a:tcPr>
-                </a:tc>
-              </a:tr>
-            </a:tbl>
-          </a:graphicData>
-        </a:graphic>
-      </p:graphicFrame>
-      <p:sp>
-        <p:nvSpPr>
-          <p:cNvPr id="8" name="Text 4"/>
-          <p:cNvSpPr/>
-          <p:nvPr/>
-        </p:nvSpPr>
-        <p:spPr>
-          <a:xfrm>
-            <a:off x="812800" y="5053943"/>
-            <a:ext cx="10883392" cy="223507"/>
+      <p:sp>
+        <p:nvSpPr>
+          <p:cNvPr id="23" name="Shape 20"/>
+          <p:cNvSpPr/>
+          <p:nvPr/>
+        </p:nvSpPr>
+        <p:spPr>
+          <a:xfrm>
+            <a:off x="4371975" y="2432977"/>
+            <a:ext cx="450850" cy="69850"/>
+          </a:xfrm>
+          <a:prstGeom prst="roundRect">
+            <a:avLst>
+              <a:gd name="adj" fmla="val 50000"/>
+            </a:avLst>
+          </a:prstGeom>
+          <a:solidFill>
+            <a:srgbClr val="211E28"/>
+          </a:solidFill>
+          <a:ln w="6350">
+            <a:solidFill>
+              <a:srgbClr val="5B5078"/>
+            </a:solidFill>
+            <a:prstDash val="solid"/>
+          </a:ln>
+        </p:spPr>
+      </p:sp>
+      <p:sp>
+        <p:nvSpPr>
+          <p:cNvPr id="24" name="Shape 21"/>
+          <p:cNvSpPr/>
+          <p:nvPr/>
+        </p:nvSpPr>
+        <p:spPr>
+          <a:xfrm>
+            <a:off x="4373033" y="2434034"/>
+            <a:ext cx="304800" cy="76200"/>
+          </a:xfrm>
+          <a:custGeom>
+            <a:avLst/>
+            <a:gdLst/>
+            <a:ahLst/>
+            <a:cxnLst/>
+            <a:rect l="l" t="t" r="r" b="b"/>
+            <a:pathLst>
+              <a:path w="304800" h="76200">
+                <a:moveTo>
+                  <a:pt x="0" y="33867"/>
+                </a:moveTo>
+                <a:arcTo hR="33867" wR="33867" stAng="10800000" swAng="5400000"/>
+                <a:lnTo>
+                  <a:pt x="304800" y="0"/>
+                </a:lnTo>
+                <a:lnTo>
+                  <a:pt x="304800" y="76200"/>
+                </a:lnTo>
+                <a:lnTo>
+                  <a:pt x="0" y="76200"/>
+                </a:lnTo>
+                <a:close/>
+              </a:path>
+            </a:pathLst>
+          </a:custGeom>
+          <a:solidFill>
+            <a:srgbClr val="E0975A"/>
+          </a:solidFill>
+          <a:ln/>
+        </p:spPr>
+      </p:sp>
+      <p:sp>
+        <p:nvSpPr>
+          <p:cNvPr id="25" name="Text 22"/>
+          <p:cNvSpPr/>
+          <p:nvPr/>
+        </p:nvSpPr>
+        <p:spPr>
+          <a:xfrm>
+            <a:off x="4889500" y="2361276"/>
+            <a:ext cx="281054" cy="238720"/>
           </a:xfrm>
           <a:prstGeom prst="rect">
             <a:avLst/>
@@ -41576,20 +37620,20 @@
           <a:p>
             <a:pPr algn="l" indent="0" marL="0">
               <a:lnSpc>
-                <a:spcPts val="1560"/>
+                <a:spcPts val="1680"/>
               </a:lnSpc>
               <a:buNone/>
             </a:pPr>
             <a:r>
               <a:rPr lang="en-US" sz="1200" dirty="0">
                 <a:solidFill>
-                  <a:srgbClr val="A9A4B5"/>
+                  <a:srgbClr val="ECEAF0"/>
                 </a:solidFill>
                 <a:latin typeface="Manrope" pitchFamily="34" charset="0"/>
                 <a:ea typeface="Manrope" pitchFamily="34" charset="-122"/>
                 <a:cs typeface="Manrope" pitchFamily="34" charset="-120"/>
               </a:rPr>
-              <a:t>Evals con Claude real. Ejemplo, adversarial y jubilación con Opus 5.5; boda e incoherencia repetidas con Sonnet 5 y 4 capítulos.</a:t>
+              <a:t>2/3</a:t>
             </a:r>
             <a:endParaRPr lang="en-US" sz="1200" dirty="0"/>
           </a:p>
@@ -41597,14 +37641,41 @@
       </p:sp>
       <p:sp>
         <p:nvSpPr>
-          <p:cNvPr id="9" name="Text 5"/>
-          <p:cNvSpPr/>
-          <p:nvPr/>
-        </p:nvSpPr>
-        <p:spPr>
-          <a:xfrm>
-            <a:off x="812800" y="5264745"/>
-            <a:ext cx="10883392" cy="223507"/>
+          <p:cNvPr id="26" name="Shape 23"/>
+          <p:cNvSpPr/>
+          <p:nvPr/>
+        </p:nvSpPr>
+        <p:spPr>
+          <a:xfrm>
+            <a:off x="5489575" y="2432977"/>
+            <a:ext cx="450850" cy="69850"/>
+          </a:xfrm>
+          <a:prstGeom prst="roundRect">
+            <a:avLst>
+              <a:gd name="adj" fmla="val 50000"/>
+            </a:avLst>
+          </a:prstGeom>
+          <a:solidFill>
+            <a:srgbClr val="211E28"/>
+          </a:solidFill>
+          <a:ln w="6350">
+            <a:solidFill>
+              <a:srgbClr val="5B5078"/>
+            </a:solidFill>
+            <a:prstDash val="solid"/>
+          </a:ln>
+        </p:spPr>
+      </p:sp>
+      <p:sp>
+        <p:nvSpPr>
+          <p:cNvPr id="27" name="Text 24"/>
+          <p:cNvSpPr/>
+          <p:nvPr/>
+        </p:nvSpPr>
+        <p:spPr>
+          <a:xfrm>
+            <a:off x="6007100" y="2361276"/>
+            <a:ext cx="292695" cy="238720"/>
           </a:xfrm>
           <a:prstGeom prst="rect">
             <a:avLst/>
@@ -41620,20 +37691,244 @@
           <a:p>
             <a:pPr algn="l" indent="0" marL="0">
               <a:lnSpc>
-                <a:spcPts val="1560"/>
+                <a:spcPts val="1680"/>
               </a:lnSpc>
               <a:buNone/>
             </a:pPr>
             <a:r>
               <a:rPr lang="en-US" sz="1200" dirty="0">
                 <a:solidFill>
-                  <a:srgbClr val="A9A4B5"/>
+                  <a:srgbClr val="ECEAF0"/>
                 </a:solidFill>
                 <a:latin typeface="Manrope" pitchFamily="34" charset="0"/>
                 <a:ea typeface="Manrope" pitchFamily="34" charset="-122"/>
                 <a:cs typeface="Manrope" pitchFamily="34" charset="-120"/>
               </a:rPr>
-              <a:t>«falla n/m» = intentos rechazados / intentos · «sin ejecutar» = la novela paró antes de ese punto.</a:t>
+              <a:t>0/4</a:t>
+            </a:r>
+            <a:endParaRPr lang="en-US" sz="1200" dirty="0"/>
+          </a:p>
+        </p:txBody>
+      </p:sp>
+      <p:sp>
+        <p:nvSpPr>
+          <p:cNvPr id="28" name="Shape 25"/>
+          <p:cNvSpPr/>
+          <p:nvPr/>
+        </p:nvSpPr>
+        <p:spPr>
+          <a:xfrm>
+            <a:off x="6607175" y="2432977"/>
+            <a:ext cx="450850" cy="69850"/>
+          </a:xfrm>
+          <a:prstGeom prst="roundRect">
+            <a:avLst>
+              <a:gd name="adj" fmla="val 50000"/>
+            </a:avLst>
+          </a:prstGeom>
+          <a:solidFill>
+            <a:srgbClr val="211E28"/>
+          </a:solidFill>
+          <a:ln w="6350">
+            <a:solidFill>
+              <a:srgbClr val="5B5078"/>
+            </a:solidFill>
+            <a:prstDash val="solid"/>
+          </a:ln>
+        </p:spPr>
+      </p:sp>
+      <p:sp>
+        <p:nvSpPr>
+          <p:cNvPr id="29" name="Shape 26"/>
+          <p:cNvSpPr/>
+          <p:nvPr/>
+        </p:nvSpPr>
+        <p:spPr>
+          <a:xfrm>
+            <a:off x="6608234" y="2434034"/>
+            <a:ext cx="114300" cy="76200"/>
+          </a:xfrm>
+          <a:custGeom>
+            <a:avLst/>
+            <a:gdLst/>
+            <a:ahLst/>
+            <a:cxnLst/>
+            <a:rect l="l" t="t" r="r" b="b"/>
+            <a:pathLst>
+              <a:path w="114300" h="76200">
+                <a:moveTo>
+                  <a:pt x="0" y="33867"/>
+                </a:moveTo>
+                <a:arcTo hR="33867" wR="33867" stAng="10800000" swAng="5400000"/>
+                <a:lnTo>
+                  <a:pt x="114300" y="0"/>
+                </a:lnTo>
+                <a:lnTo>
+                  <a:pt x="114300" y="76200"/>
+                </a:lnTo>
+                <a:lnTo>
+                  <a:pt x="0" y="76200"/>
+                </a:lnTo>
+                <a:close/>
+              </a:path>
+            </a:pathLst>
+          </a:custGeom>
+          <a:solidFill>
+            <a:srgbClr val="E0975A"/>
+          </a:solidFill>
+          <a:ln/>
+        </p:spPr>
+      </p:sp>
+      <p:sp>
+        <p:nvSpPr>
+          <p:cNvPr id="30" name="Text 27"/>
+          <p:cNvSpPr/>
+          <p:nvPr/>
+        </p:nvSpPr>
+        <p:spPr>
+          <a:xfrm>
+            <a:off x="7124700" y="2361276"/>
+            <a:ext cx="259159" cy="238720"/>
+          </a:xfrm>
+          <a:prstGeom prst="rect">
+            <a:avLst/>
+          </a:prstGeom>
+          <a:noFill/>
+          <a:ln/>
+        </p:spPr>
+        <p:txBody>
+          <a:bodyPr wrap="square" lIns="0" tIns="0" rIns="0" bIns="0" rtlCol="0" anchor="t">
+            <a:normAutofit/>
+          </a:bodyPr>
+          <a:lstStyle/>
+          <a:p>
+            <a:pPr algn="l" indent="0" marL="0">
+              <a:lnSpc>
+                <a:spcPts val="1680"/>
+              </a:lnSpc>
+              <a:buNone/>
+            </a:pPr>
+            <a:r>
+              <a:rPr lang="en-US" sz="1200" dirty="0">
+                <a:solidFill>
+                  <a:srgbClr val="ECEAF0"/>
+                </a:solidFill>
+                <a:latin typeface="Manrope" pitchFamily="34" charset="0"/>
+                <a:ea typeface="Manrope" pitchFamily="34" charset="-122"/>
+                <a:cs typeface="Manrope" pitchFamily="34" charset="-120"/>
+              </a:rPr>
+              <a:t>1/4</a:t>
+            </a:r>
+            <a:endParaRPr lang="en-US" sz="1200" dirty="0"/>
+          </a:p>
+        </p:txBody>
+      </p:sp>
+      <p:sp>
+        <p:nvSpPr>
+          <p:cNvPr id="31" name="Shape 28"/>
+          <p:cNvSpPr/>
+          <p:nvPr/>
+        </p:nvSpPr>
+        <p:spPr>
+          <a:xfrm>
+            <a:off x="812800" y="3019360"/>
+            <a:ext cx="6858000" cy="0"/>
+          </a:xfrm>
+          <a:prstGeom prst="line">
+            <a:avLst/>
+          </a:prstGeom>
+          <a:noFill/>
+          <a:ln w="6350">
+            <a:solidFill>
+              <a:srgbClr val="211E28"/>
+            </a:solidFill>
+            <a:prstDash val="solid"/>
+          </a:ln>
+        </p:spPr>
+      </p:sp>
+      <p:sp>
+        <p:nvSpPr>
+          <p:cNvPr id="32" name="Text 29"/>
+          <p:cNvSpPr/>
+          <p:nvPr/>
+        </p:nvSpPr>
+        <p:spPr>
+          <a:xfrm>
+            <a:off x="812800" y="2729576"/>
+            <a:ext cx="1320800" cy="238720"/>
+          </a:xfrm>
+          <a:prstGeom prst="rect">
+            <a:avLst/>
+          </a:prstGeom>
+          <a:noFill/>
+          <a:ln/>
+        </p:spPr>
+        <p:txBody>
+          <a:bodyPr wrap="square" lIns="0" tIns="0" rIns="0" bIns="0" rtlCol="0" anchor="t">
+            <a:normAutofit/>
+          </a:bodyPr>
+          <a:lstStyle/>
+          <a:p>
+            <a:pPr algn="l" indent="0" marL="0">
+              <a:lnSpc>
+                <a:spcPts val="1680"/>
+              </a:lnSpc>
+              <a:buNone/>
+            </a:pPr>
+            <a:r>
+              <a:rPr lang="en-US" sz="1200" dirty="0">
+                <a:solidFill>
+                  <a:srgbClr val="A9A4B5"/>
+                </a:solidFill>
+                <a:latin typeface="Manrope" pitchFamily="34" charset="0"/>
+                <a:ea typeface="Manrope" pitchFamily="34" charset="-122"/>
+                <a:cs typeface="Manrope" pitchFamily="34" charset="-120"/>
+              </a:rPr>
+              <a:t>Inyección</a:t>
+            </a:r>
+            <a:endParaRPr lang="en-US" sz="1200" dirty="0"/>
+          </a:p>
+        </p:txBody>
+      </p:sp>
+      <p:sp>
+        <p:nvSpPr>
+          <p:cNvPr id="33" name="Text 30"/>
+          <p:cNvSpPr/>
+          <p:nvPr/>
+        </p:nvSpPr>
+        <p:spPr>
+          <a:xfrm>
+            <a:off x="2133600" y="2729576"/>
+            <a:ext cx="1117600" cy="238720"/>
+          </a:xfrm>
+          <a:prstGeom prst="rect">
+            <a:avLst/>
+          </a:prstGeom>
+          <a:noFill/>
+          <a:ln/>
+        </p:spPr>
+        <p:txBody>
+          <a:bodyPr wrap="square" lIns="0" tIns="0" rIns="0" bIns="0" rtlCol="0" anchor="t">
+            <a:normAutofit/>
+          </a:bodyPr>
+          <a:lstStyle/>
+          <a:p>
+            <a:pPr algn="l" indent="0" marL="0">
+              <a:lnSpc>
+                <a:spcPts val="1680"/>
+              </a:lnSpc>
+              <a:buNone/>
+            </a:pPr>
+            <a:r>
+              <a:rPr lang="en-US" sz="1200" dirty="0">
+                <a:solidFill>
+                  <a:srgbClr val="A9A4B5"/>
+                </a:solidFill>
+                <a:latin typeface="Manrope" pitchFamily="34" charset="0"/>
+                <a:ea typeface="Manrope" pitchFamily="34" charset="-122"/>
+                <a:cs typeface="Manrope" pitchFamily="34" charset="-120"/>
+              </a:rPr>
+              <a:t>—</a:t>
             </a:r>
             <a:endParaRPr lang="en-US" sz="1200" dirty="0"/>
           </a:p>
@@ -41641,7 +37936,7 @@
       </p:sp>
       <p:pic>
         <p:nvPicPr>
-          <p:cNvPr id="10" name="Image 1" descr="SpaceMaker">    </p:cNvPr>
+          <p:cNvPr id="34" name="Image 1" descr="pasa">    </p:cNvPr>
           <p:cNvPicPr>
             <a:picLocks noChangeAspect="1"/>
           </p:cNvPicPr>
@@ -41654,8 +37949,8 @@
         </p:blipFill>
         <p:spPr>
           <a:xfrm>
-            <a:off x="812800" y="6146800"/>
-            <a:ext cx="304800" cy="304800"/>
+            <a:off x="3251200" y="2747302"/>
+            <a:ext cx="177800" cy="177800"/>
           </a:xfrm>
           <a:prstGeom prst="rect">
             <a:avLst/>
@@ -41664,14 +37959,14 @@
       </p:pic>
       <p:sp>
         <p:nvSpPr>
-          <p:cNvPr id="11" name="Text 6"/>
-          <p:cNvSpPr/>
-          <p:nvPr/>
-        </p:nvSpPr>
-        <p:spPr>
-          <a:xfrm>
-            <a:off x="1244600" y="6192509"/>
-            <a:ext cx="828543" cy="238720"/>
+          <p:cNvPr id="35" name="Text 31"/>
+          <p:cNvSpPr/>
+          <p:nvPr/>
+        </p:nvSpPr>
+        <p:spPr>
+          <a:xfrm>
+            <a:off x="3492500" y="2729576"/>
+            <a:ext cx="278474" cy="238720"/>
           </a:xfrm>
           <a:prstGeom prst="rect">
             <a:avLst/>
@@ -41692,15 +37987,214 @@
               <a:buNone/>
             </a:pPr>
             <a:r>
-              <a:rPr lang="en-US" sz="1200" spc="50" kern="0" dirty="0">
-                <a:solidFill>
-                  <a:srgbClr val="A9A4B5"/>
+              <a:rPr lang="en-US" sz="1200" dirty="0">
+                <a:solidFill>
+                  <a:srgbClr val="ECEAF0"/>
                 </a:solidFill>
                 <a:latin typeface="Manrope" pitchFamily="34" charset="0"/>
                 <a:ea typeface="Manrope" pitchFamily="34" charset="-122"/>
                 <a:cs typeface="Manrope" pitchFamily="34" charset="-120"/>
               </a:rPr>
-              <a:t>Validación</a:t>
+              <a:t>3/3</a:t>
+            </a:r>
+            <a:endParaRPr lang="en-US" sz="1200" dirty="0"/>
+          </a:p>
+        </p:txBody>
+      </p:sp>
+      <p:sp>
+        <p:nvSpPr>
+          <p:cNvPr id="36" name="Text 32"/>
+          <p:cNvSpPr/>
+          <p:nvPr/>
+        </p:nvSpPr>
+        <p:spPr>
+          <a:xfrm>
+            <a:off x="4368800" y="2729576"/>
+            <a:ext cx="1117600" cy="238720"/>
+          </a:xfrm>
+          <a:prstGeom prst="rect">
+            <a:avLst/>
+          </a:prstGeom>
+          <a:noFill/>
+          <a:ln/>
+        </p:spPr>
+        <p:txBody>
+          <a:bodyPr wrap="square" lIns="0" tIns="0" rIns="0" bIns="0" rtlCol="0" anchor="t">
+            <a:normAutofit/>
+          </a:bodyPr>
+          <a:lstStyle/>
+          <a:p>
+            <a:pPr algn="l" indent="0" marL="0">
+              <a:lnSpc>
+                <a:spcPts val="1680"/>
+              </a:lnSpc>
+              <a:buNone/>
+            </a:pPr>
+            <a:r>
+              <a:rPr lang="en-US" sz="1200" dirty="0">
+                <a:solidFill>
+                  <a:srgbClr val="A9A4B5"/>
+                </a:solidFill>
+                <a:latin typeface="Manrope" pitchFamily="34" charset="0"/>
+                <a:ea typeface="Manrope" pitchFamily="34" charset="-122"/>
+                <a:cs typeface="Manrope" pitchFamily="34" charset="-120"/>
+              </a:rPr>
+              <a:t>—</a:t>
+            </a:r>
+            <a:endParaRPr lang="en-US" sz="1200" dirty="0"/>
+          </a:p>
+        </p:txBody>
+      </p:sp>
+      <p:sp>
+        <p:nvSpPr>
+          <p:cNvPr id="37" name="Text 33"/>
+          <p:cNvSpPr/>
+          <p:nvPr/>
+        </p:nvSpPr>
+        <p:spPr>
+          <a:xfrm>
+            <a:off x="5486400" y="2729576"/>
+            <a:ext cx="1117600" cy="238720"/>
+          </a:xfrm>
+          <a:prstGeom prst="rect">
+            <a:avLst/>
+          </a:prstGeom>
+          <a:noFill/>
+          <a:ln/>
+        </p:spPr>
+        <p:txBody>
+          <a:bodyPr wrap="square" lIns="0" tIns="0" rIns="0" bIns="0" rtlCol="0" anchor="t">
+            <a:normAutofit/>
+          </a:bodyPr>
+          <a:lstStyle/>
+          <a:p>
+            <a:pPr algn="l" indent="0" marL="0">
+              <a:lnSpc>
+                <a:spcPts val="1680"/>
+              </a:lnSpc>
+              <a:buNone/>
+            </a:pPr>
+            <a:r>
+              <a:rPr lang="en-US" sz="1200" dirty="0">
+                <a:solidFill>
+                  <a:srgbClr val="A9A4B5"/>
+                </a:solidFill>
+                <a:latin typeface="Manrope" pitchFamily="34" charset="0"/>
+                <a:ea typeface="Manrope" pitchFamily="34" charset="-122"/>
+                <a:cs typeface="Manrope" pitchFamily="34" charset="-120"/>
+              </a:rPr>
+              <a:t>—</a:t>
+            </a:r>
+            <a:endParaRPr lang="en-US" sz="1200" dirty="0"/>
+          </a:p>
+        </p:txBody>
+      </p:sp>
+      <p:sp>
+        <p:nvSpPr>
+          <p:cNvPr id="38" name="Text 34"/>
+          <p:cNvSpPr/>
+          <p:nvPr/>
+        </p:nvSpPr>
+        <p:spPr>
+          <a:xfrm>
+            <a:off x="6604000" y="2729576"/>
+            <a:ext cx="1117600" cy="238720"/>
+          </a:xfrm>
+          <a:prstGeom prst="rect">
+            <a:avLst/>
+          </a:prstGeom>
+          <a:noFill/>
+          <a:ln/>
+        </p:spPr>
+        <p:txBody>
+          <a:bodyPr wrap="square" lIns="0" tIns="0" rIns="0" bIns="0" rtlCol="0" anchor="t">
+            <a:normAutofit/>
+          </a:bodyPr>
+          <a:lstStyle/>
+          <a:p>
+            <a:pPr algn="l" indent="0" marL="0">
+              <a:lnSpc>
+                <a:spcPts val="1680"/>
+              </a:lnSpc>
+              <a:buNone/>
+            </a:pPr>
+            <a:r>
+              <a:rPr lang="en-US" sz="1200" dirty="0">
+                <a:solidFill>
+                  <a:srgbClr val="A9A4B5"/>
+                </a:solidFill>
+                <a:latin typeface="Manrope" pitchFamily="34" charset="0"/>
+                <a:ea typeface="Manrope" pitchFamily="34" charset="-122"/>
+                <a:cs typeface="Manrope" pitchFamily="34" charset="-120"/>
+              </a:rPr>
+              <a:t>—</a:t>
+            </a:r>
+            <a:endParaRPr lang="en-US" sz="1200" dirty="0"/>
+          </a:p>
+        </p:txBody>
+      </p:sp>
+      <p:sp>
+        <p:nvSpPr>
+          <p:cNvPr id="39" name="Shape 35"/>
+          <p:cNvSpPr/>
+          <p:nvPr/>
+        </p:nvSpPr>
+        <p:spPr>
+          <a:xfrm>
+            <a:off x="812800" y="3387660"/>
+            <a:ext cx="6858000" cy="0"/>
+          </a:xfrm>
+          <a:prstGeom prst="line">
+            <a:avLst/>
+          </a:prstGeom>
+          <a:noFill/>
+          <a:ln w="6350">
+            <a:solidFill>
+              <a:srgbClr val="211E28"/>
+            </a:solidFill>
+            <a:prstDash val="solid"/>
+          </a:ln>
+        </p:spPr>
+      </p:sp>
+      <p:sp>
+        <p:nvSpPr>
+          <p:cNvPr id="40" name="Text 36"/>
+          <p:cNvSpPr/>
+          <p:nvPr/>
+        </p:nvSpPr>
+        <p:spPr>
+          <a:xfrm>
+            <a:off x="812800" y="3097876"/>
+            <a:ext cx="1320800" cy="238720"/>
+          </a:xfrm>
+          <a:prstGeom prst="rect">
+            <a:avLst/>
+          </a:prstGeom>
+          <a:noFill/>
+          <a:ln/>
+        </p:spPr>
+        <p:txBody>
+          <a:bodyPr wrap="square" lIns="0" tIns="0" rIns="0" bIns="0" rtlCol="0" anchor="t">
+            <a:normAutofit/>
+          </a:bodyPr>
+          <a:lstStyle/>
+          <a:p>
+            <a:pPr algn="l" indent="0" marL="0">
+              <a:lnSpc>
+                <a:spcPts val="1680"/>
+              </a:lnSpc>
+              <a:buNone/>
+            </a:pPr>
+            <a:r>
+              <a:rPr lang="en-US" sz="1200" dirty="0">
+                <a:solidFill>
+                  <a:srgbClr val="A9A4B5"/>
+                </a:solidFill>
+                <a:latin typeface="Manrope" pitchFamily="34" charset="0"/>
+                <a:ea typeface="Manrope" pitchFamily="34" charset="-122"/>
+                <a:cs typeface="Manrope" pitchFamily="34" charset="-120"/>
+              </a:rPr>
+              <a:t>P1 Estructura</a:t>
             </a:r>
             <a:endParaRPr lang="en-US" sz="1200" dirty="0"/>
           </a:p>
@@ -41708,7 +38202,7 @@
       </p:sp>
       <p:pic>
         <p:nvPicPr>
-          <p:cNvPr id="12" name="Image 2" descr="Tres destellos">    </p:cNvPr>
+          <p:cNvPr id="41" name="Image 2" descr="pasa">    </p:cNvPr>
           <p:cNvPicPr>
             <a:picLocks noChangeAspect="1"/>
           </p:cNvPicPr>
@@ -41721,6 +38215,2265 @@
         </p:blipFill>
         <p:spPr>
           <a:xfrm>
+            <a:off x="2133600" y="3115667"/>
+            <a:ext cx="177800" cy="177800"/>
+          </a:xfrm>
+          <a:prstGeom prst="rect">
+            <a:avLst/>
+          </a:prstGeom>
+        </p:spPr>
+      </p:pic>
+      <p:pic>
+        <p:nvPicPr>
+          <p:cNvPr id="42" name="Image 3" descr="pasa">    </p:cNvPr>
+          <p:cNvPicPr>
+            <a:picLocks noChangeAspect="1"/>
+          </p:cNvPicPr>
+          <p:nvPr/>
+        </p:nvPicPr>
+        <p:blipFill>
+          <a:blip r:embed="rId4"/>
+          <a:srcRect l="0" r="0" t="0" b="0"/>
+          <a:stretch/>
+        </p:blipFill>
+        <p:spPr>
+          <a:xfrm>
+            <a:off x="3251200" y="3115667"/>
+            <a:ext cx="177800" cy="177800"/>
+          </a:xfrm>
+          <a:prstGeom prst="rect">
+            <a:avLst/>
+          </a:prstGeom>
+        </p:spPr>
+      </p:pic>
+      <p:pic>
+        <p:nvPicPr>
+          <p:cNvPr id="43" name="Image 4" descr="pasa">    </p:cNvPr>
+          <p:cNvPicPr>
+            <a:picLocks noChangeAspect="1"/>
+          </p:cNvPicPr>
+          <p:nvPr/>
+        </p:nvPicPr>
+        <p:blipFill>
+          <a:blip r:embed="rId5"/>
+          <a:srcRect l="0" r="0" t="0" b="0"/>
+          <a:stretch/>
+        </p:blipFill>
+        <p:spPr>
+          <a:xfrm>
+            <a:off x="4368800" y="3115667"/>
+            <a:ext cx="177800" cy="177800"/>
+          </a:xfrm>
+          <a:prstGeom prst="rect">
+            <a:avLst/>
+          </a:prstGeom>
+        </p:spPr>
+      </p:pic>
+      <p:pic>
+        <p:nvPicPr>
+          <p:cNvPr id="44" name="Image 5" descr="rechaza">    </p:cNvPr>
+          <p:cNvPicPr>
+            <a:picLocks noChangeAspect="1"/>
+          </p:cNvPicPr>
+          <p:nvPr/>
+        </p:nvPicPr>
+        <p:blipFill>
+          <a:blip r:embed="rId6"/>
+          <a:srcRect l="0" r="0" t="0" b="0"/>
+          <a:stretch/>
+        </p:blipFill>
+        <p:spPr>
+          <a:xfrm>
+            <a:off x="5486400" y="3115602"/>
+            <a:ext cx="177800" cy="177800"/>
+          </a:xfrm>
+          <a:prstGeom prst="rect">
+            <a:avLst/>
+          </a:prstGeom>
+        </p:spPr>
+      </p:pic>
+      <p:sp>
+        <p:nvSpPr>
+          <p:cNvPr id="45" name="Text 37"/>
+          <p:cNvSpPr/>
+          <p:nvPr/>
+        </p:nvSpPr>
+        <p:spPr>
+          <a:xfrm>
+            <a:off x="5727700" y="3097876"/>
+            <a:ext cx="632486" cy="238720"/>
+          </a:xfrm>
+          <a:prstGeom prst="rect">
+            <a:avLst/>
+          </a:prstGeom>
+          <a:noFill/>
+          <a:ln/>
+        </p:spPr>
+        <p:txBody>
+          <a:bodyPr wrap="square" lIns="0" tIns="0" rIns="0" bIns="0" rtlCol="0" anchor="t">
+            <a:normAutofit/>
+          </a:bodyPr>
+          <a:lstStyle/>
+          <a:p>
+            <a:pPr algn="l" indent="0" marL="0">
+              <a:lnSpc>
+                <a:spcPts val="1680"/>
+              </a:lnSpc>
+              <a:buNone/>
+            </a:pPr>
+            <a:r>
+              <a:rPr lang="en-US" sz="1200" dirty="0">
+                <a:solidFill>
+                  <a:srgbClr val="ECEAF0"/>
+                </a:solidFill>
+                <a:latin typeface="Manrope" pitchFamily="34" charset="0"/>
+                <a:ea typeface="Manrope" pitchFamily="34" charset="-122"/>
+                <a:cs typeface="Manrope" pitchFamily="34" charset="-120"/>
+              </a:rPr>
+              <a:t>rehecha</a:t>
+            </a:r>
+            <a:endParaRPr lang="en-US" sz="1200" dirty="0"/>
+          </a:p>
+        </p:txBody>
+      </p:sp>
+      <p:pic>
+        <p:nvPicPr>
+          <p:cNvPr id="46" name="Image 6" descr="rechaza">    </p:cNvPr>
+          <p:cNvPicPr>
+            <a:picLocks noChangeAspect="1"/>
+          </p:cNvPicPr>
+          <p:nvPr/>
+        </p:nvPicPr>
+        <p:blipFill>
+          <a:blip r:embed="rId7"/>
+          <a:srcRect l="0" r="0" t="0" b="0"/>
+          <a:stretch/>
+        </p:blipFill>
+        <p:spPr>
+          <a:xfrm>
+            <a:off x="6604000" y="3115602"/>
+            <a:ext cx="177800" cy="177800"/>
+          </a:xfrm>
+          <a:prstGeom prst="rect">
+            <a:avLst/>
+          </a:prstGeom>
+        </p:spPr>
+      </p:pic>
+      <p:sp>
+        <p:nvSpPr>
+          <p:cNvPr id="47" name="Text 38"/>
+          <p:cNvSpPr/>
+          <p:nvPr/>
+        </p:nvSpPr>
+        <p:spPr>
+          <a:xfrm>
+            <a:off x="6845300" y="3097876"/>
+            <a:ext cx="632486" cy="238720"/>
+          </a:xfrm>
+          <a:prstGeom prst="rect">
+            <a:avLst/>
+          </a:prstGeom>
+          <a:noFill/>
+          <a:ln/>
+        </p:spPr>
+        <p:txBody>
+          <a:bodyPr wrap="square" lIns="0" tIns="0" rIns="0" bIns="0" rtlCol="0" anchor="t">
+            <a:normAutofit/>
+          </a:bodyPr>
+          <a:lstStyle/>
+          <a:p>
+            <a:pPr algn="l" indent="0" marL="0">
+              <a:lnSpc>
+                <a:spcPts val="1680"/>
+              </a:lnSpc>
+              <a:buNone/>
+            </a:pPr>
+            <a:r>
+              <a:rPr lang="en-US" sz="1200" dirty="0">
+                <a:solidFill>
+                  <a:srgbClr val="ECEAF0"/>
+                </a:solidFill>
+                <a:latin typeface="Manrope" pitchFamily="34" charset="0"/>
+                <a:ea typeface="Manrope" pitchFamily="34" charset="-122"/>
+                <a:cs typeface="Manrope" pitchFamily="34" charset="-120"/>
+              </a:rPr>
+              <a:t>rehecha</a:t>
+            </a:r>
+            <a:endParaRPr lang="en-US" sz="1200" dirty="0"/>
+          </a:p>
+        </p:txBody>
+      </p:sp>
+      <p:sp>
+        <p:nvSpPr>
+          <p:cNvPr id="48" name="Shape 39"/>
+          <p:cNvSpPr/>
+          <p:nvPr/>
+        </p:nvSpPr>
+        <p:spPr>
+          <a:xfrm>
+            <a:off x="812800" y="3755960"/>
+            <a:ext cx="6858000" cy="0"/>
+          </a:xfrm>
+          <a:prstGeom prst="line">
+            <a:avLst/>
+          </a:prstGeom>
+          <a:noFill/>
+          <a:ln w="6350">
+            <a:solidFill>
+              <a:srgbClr val="211E28"/>
+            </a:solidFill>
+            <a:prstDash val="solid"/>
+          </a:ln>
+        </p:spPr>
+      </p:sp>
+      <p:sp>
+        <p:nvSpPr>
+          <p:cNvPr id="49" name="Text 40"/>
+          <p:cNvSpPr/>
+          <p:nvPr/>
+        </p:nvSpPr>
+        <p:spPr>
+          <a:xfrm>
+            <a:off x="812800" y="3466176"/>
+            <a:ext cx="1320800" cy="238720"/>
+          </a:xfrm>
+          <a:prstGeom prst="rect">
+            <a:avLst/>
+          </a:prstGeom>
+          <a:noFill/>
+          <a:ln/>
+        </p:spPr>
+        <p:txBody>
+          <a:bodyPr wrap="square" lIns="0" tIns="0" rIns="0" bIns="0" rtlCol="0" anchor="t">
+            <a:normAutofit/>
+          </a:bodyPr>
+          <a:lstStyle/>
+          <a:p>
+            <a:pPr algn="l" indent="0" marL="0">
+              <a:lnSpc>
+                <a:spcPts val="1680"/>
+              </a:lnSpc>
+              <a:buNone/>
+            </a:pPr>
+            <a:r>
+              <a:rPr lang="en-US" sz="1200" dirty="0">
+                <a:solidFill>
+                  <a:srgbClr val="A9A4B5"/>
+                </a:solidFill>
+                <a:latin typeface="Manrope" pitchFamily="34" charset="0"/>
+                <a:ea typeface="Manrope" pitchFamily="34" charset="-122"/>
+                <a:cs typeface="Manrope" pitchFamily="34" charset="-120"/>
+              </a:rPr>
+              <a:t>P3 Continuidad</a:t>
+            </a:r>
+            <a:endParaRPr lang="en-US" sz="1200" dirty="0"/>
+          </a:p>
+        </p:txBody>
+      </p:sp>
+      <p:pic>
+        <p:nvPicPr>
+          <p:cNvPr id="50" name="Image 7" descr="pasa">    </p:cNvPr>
+          <p:cNvPicPr>
+            <a:picLocks noChangeAspect="1"/>
+          </p:cNvPicPr>
+          <p:nvPr/>
+        </p:nvPicPr>
+        <p:blipFill>
+          <a:blip r:embed="rId8"/>
+          <a:srcRect l="0" r="0" t="0" b="0"/>
+          <a:stretch/>
+        </p:blipFill>
+        <p:spPr>
+          <a:xfrm>
+            <a:off x="2133600" y="3483967"/>
+            <a:ext cx="177800" cy="177800"/>
+          </a:xfrm>
+          <a:prstGeom prst="rect">
+            <a:avLst/>
+          </a:prstGeom>
+        </p:spPr>
+      </p:pic>
+      <p:pic>
+        <p:nvPicPr>
+          <p:cNvPr id="51" name="Image 8" descr="rechaza">    </p:cNvPr>
+          <p:cNvPicPr>
+            <a:picLocks noChangeAspect="1"/>
+          </p:cNvPicPr>
+          <p:nvPr/>
+        </p:nvPicPr>
+        <p:blipFill>
+          <a:blip r:embed="rId9"/>
+          <a:srcRect l="0" r="0" t="0" b="0"/>
+          <a:stretch/>
+        </p:blipFill>
+        <p:spPr>
+          <a:xfrm>
+            <a:off x="3251200" y="3483902"/>
+            <a:ext cx="177800" cy="177800"/>
+          </a:xfrm>
+          <a:prstGeom prst="rect">
+            <a:avLst/>
+          </a:prstGeom>
+        </p:spPr>
+      </p:pic>
+      <p:sp>
+        <p:nvSpPr>
+          <p:cNvPr id="52" name="Text 41"/>
+          <p:cNvSpPr/>
+          <p:nvPr/>
+        </p:nvSpPr>
+        <p:spPr>
+          <a:xfrm>
+            <a:off x="3492500" y="3466176"/>
+            <a:ext cx="459912" cy="238720"/>
+          </a:xfrm>
+          <a:prstGeom prst="rect">
+            <a:avLst/>
+          </a:prstGeom>
+          <a:noFill/>
+          <a:ln/>
+        </p:spPr>
+        <p:txBody>
+          <a:bodyPr wrap="square" lIns="0" tIns="0" rIns="0" bIns="0" rtlCol="0" anchor="t">
+            <a:normAutofit/>
+          </a:bodyPr>
+          <a:lstStyle/>
+          <a:p>
+            <a:pPr algn="l" indent="0" marL="0">
+              <a:lnSpc>
+                <a:spcPts val="1680"/>
+              </a:lnSpc>
+              <a:buNone/>
+            </a:pPr>
+            <a:r>
+              <a:rPr lang="en-US" sz="1200" dirty="0">
+                <a:solidFill>
+                  <a:srgbClr val="ECEAF0"/>
+                </a:solidFill>
+                <a:latin typeface="Manrope" pitchFamily="34" charset="0"/>
+                <a:ea typeface="Manrope" pitchFamily="34" charset="-122"/>
+                <a:cs typeface="Manrope" pitchFamily="34" charset="-120"/>
+              </a:rPr>
+              <a:t>cap. 3</a:t>
+            </a:r>
+            <a:endParaRPr lang="en-US" sz="1200" dirty="0"/>
+          </a:p>
+        </p:txBody>
+      </p:sp>
+      <p:pic>
+        <p:nvPicPr>
+          <p:cNvPr id="53" name="Image 9" descr="pasa">    </p:cNvPr>
+          <p:cNvPicPr>
+            <a:picLocks noChangeAspect="1"/>
+          </p:cNvPicPr>
+          <p:nvPr/>
+        </p:nvPicPr>
+        <p:blipFill>
+          <a:blip r:embed="rId10"/>
+          <a:srcRect l="0" r="0" t="0" b="0"/>
+          <a:stretch/>
+        </p:blipFill>
+        <p:spPr>
+          <a:xfrm>
+            <a:off x="4368800" y="3483967"/>
+            <a:ext cx="177800" cy="177800"/>
+          </a:xfrm>
+          <a:prstGeom prst="rect">
+            <a:avLst/>
+          </a:prstGeom>
+        </p:spPr>
+      </p:pic>
+      <p:pic>
+        <p:nvPicPr>
+          <p:cNvPr id="54" name="Image 10" descr="pasa">    </p:cNvPr>
+          <p:cNvPicPr>
+            <a:picLocks noChangeAspect="1"/>
+          </p:cNvPicPr>
+          <p:nvPr/>
+        </p:nvPicPr>
+        <p:blipFill>
+          <a:blip r:embed="rId11"/>
+          <a:srcRect l="0" r="0" t="0" b="0"/>
+          <a:stretch/>
+        </p:blipFill>
+        <p:spPr>
+          <a:xfrm>
+            <a:off x="5486400" y="3483967"/>
+            <a:ext cx="177800" cy="177800"/>
+          </a:xfrm>
+          <a:prstGeom prst="rect">
+            <a:avLst/>
+          </a:prstGeom>
+        </p:spPr>
+      </p:pic>
+      <p:pic>
+        <p:nvPicPr>
+          <p:cNvPr id="55" name="Image 11" descr="rechaza">    </p:cNvPr>
+          <p:cNvPicPr>
+            <a:picLocks noChangeAspect="1"/>
+          </p:cNvPicPr>
+          <p:nvPr/>
+        </p:nvPicPr>
+        <p:blipFill>
+          <a:blip r:embed="rId12"/>
+          <a:srcRect l="0" r="0" t="0" b="0"/>
+          <a:stretch/>
+        </p:blipFill>
+        <p:spPr>
+          <a:xfrm>
+            <a:off x="6604000" y="3483902"/>
+            <a:ext cx="177800" cy="177800"/>
+          </a:xfrm>
+          <a:prstGeom prst="rect">
+            <a:avLst/>
+          </a:prstGeom>
+        </p:spPr>
+      </p:pic>
+      <p:sp>
+        <p:nvSpPr>
+          <p:cNvPr id="56" name="Text 42"/>
+          <p:cNvSpPr/>
+          <p:nvPr/>
+        </p:nvSpPr>
+        <p:spPr>
+          <a:xfrm>
+            <a:off x="6845300" y="3466176"/>
+            <a:ext cx="462492" cy="238720"/>
+          </a:xfrm>
+          <a:prstGeom prst="rect">
+            <a:avLst/>
+          </a:prstGeom>
+          <a:noFill/>
+          <a:ln/>
+        </p:spPr>
+        <p:txBody>
+          <a:bodyPr wrap="square" lIns="0" tIns="0" rIns="0" bIns="0" rtlCol="0" anchor="t">
+            <a:normAutofit/>
+          </a:bodyPr>
+          <a:lstStyle/>
+          <a:p>
+            <a:pPr algn="l" indent="0" marL="0">
+              <a:lnSpc>
+                <a:spcPts val="1680"/>
+              </a:lnSpc>
+              <a:buNone/>
+            </a:pPr>
+            <a:r>
+              <a:rPr lang="en-US" sz="1200" dirty="0">
+                <a:solidFill>
+                  <a:srgbClr val="ECEAF0"/>
+                </a:solidFill>
+                <a:latin typeface="Manrope" pitchFamily="34" charset="0"/>
+                <a:ea typeface="Manrope" pitchFamily="34" charset="-122"/>
+                <a:cs typeface="Manrope" pitchFamily="34" charset="-120"/>
+              </a:rPr>
+              <a:t>cap. 2</a:t>
+            </a:r>
+            <a:endParaRPr lang="en-US" sz="1200" dirty="0"/>
+          </a:p>
+        </p:txBody>
+      </p:sp>
+      <p:sp>
+        <p:nvSpPr>
+          <p:cNvPr id="57" name="Shape 43"/>
+          <p:cNvSpPr/>
+          <p:nvPr/>
+        </p:nvSpPr>
+        <p:spPr>
+          <a:xfrm>
+            <a:off x="812800" y="4124260"/>
+            <a:ext cx="6858000" cy="0"/>
+          </a:xfrm>
+          <a:prstGeom prst="line">
+            <a:avLst/>
+          </a:prstGeom>
+          <a:noFill/>
+          <a:ln w="6350">
+            <a:solidFill>
+              <a:srgbClr val="211E28"/>
+            </a:solidFill>
+            <a:prstDash val="solid"/>
+          </a:ln>
+        </p:spPr>
+      </p:sp>
+      <p:sp>
+        <p:nvSpPr>
+          <p:cNvPr id="58" name="Text 44"/>
+          <p:cNvSpPr/>
+          <p:nvPr/>
+        </p:nvSpPr>
+        <p:spPr>
+          <a:xfrm>
+            <a:off x="812800" y="3834476"/>
+            <a:ext cx="1320800" cy="238720"/>
+          </a:xfrm>
+          <a:prstGeom prst="rect">
+            <a:avLst/>
+          </a:prstGeom>
+          <a:noFill/>
+          <a:ln/>
+        </p:spPr>
+        <p:txBody>
+          <a:bodyPr wrap="square" lIns="0" tIns="0" rIns="0" bIns="0" rtlCol="0" anchor="t">
+            <a:normAutofit/>
+          </a:bodyPr>
+          <a:lstStyle/>
+          <a:p>
+            <a:pPr algn="l" indent="0" marL="0">
+              <a:lnSpc>
+                <a:spcPts val="1680"/>
+              </a:lnSpc>
+              <a:buNone/>
+            </a:pPr>
+            <a:r>
+              <a:rPr lang="en-US" sz="1200" dirty="0">
+                <a:solidFill>
+                  <a:srgbClr val="A9A4B5"/>
+                </a:solidFill>
+                <a:latin typeface="Manrope" pitchFamily="34" charset="0"/>
+                <a:ea typeface="Manrope" pitchFamily="34" charset="-122"/>
+                <a:cs typeface="Manrope" pitchFamily="34" charset="-120"/>
+              </a:rPr>
+              <a:t>P4 Juez</a:t>
+            </a:r>
+            <a:endParaRPr lang="en-US" sz="1200" dirty="0"/>
+          </a:p>
+        </p:txBody>
+      </p:sp>
+      <p:pic>
+        <p:nvPicPr>
+          <p:cNvPr id="59" name="Image 12" descr="rechaza">    </p:cNvPr>
+          <p:cNvPicPr>
+            <a:picLocks noChangeAspect="1"/>
+          </p:cNvPicPr>
+          <p:nvPr/>
+        </p:nvPicPr>
+        <p:blipFill>
+          <a:blip r:embed="rId13"/>
+          <a:srcRect l="0" r="0" t="0" b="0"/>
+          <a:stretch/>
+        </p:blipFill>
+        <p:spPr>
+          <a:xfrm>
+            <a:off x="2133600" y="3852202"/>
+            <a:ext cx="177800" cy="177800"/>
+          </a:xfrm>
+          <a:prstGeom prst="rect">
+            <a:avLst/>
+          </a:prstGeom>
+        </p:spPr>
+      </p:pic>
+      <p:sp>
+        <p:nvSpPr>
+          <p:cNvPr id="60" name="Text 45"/>
+          <p:cNvSpPr/>
+          <p:nvPr/>
+        </p:nvSpPr>
+        <p:spPr>
+          <a:xfrm>
+            <a:off x="2374900" y="3834476"/>
+            <a:ext cx="358444" cy="238720"/>
+          </a:xfrm>
+          <a:prstGeom prst="rect">
+            <a:avLst/>
+          </a:prstGeom>
+          <a:noFill/>
+          <a:ln/>
+        </p:spPr>
+        <p:txBody>
+          <a:bodyPr wrap="square" lIns="0" tIns="0" rIns="0" bIns="0" rtlCol="0" anchor="t">
+            <a:normAutofit/>
+          </a:bodyPr>
+          <a:lstStyle/>
+          <a:p>
+            <a:pPr algn="l" indent="0" marL="0">
+              <a:lnSpc>
+                <a:spcPts val="1680"/>
+              </a:lnSpc>
+              <a:buNone/>
+            </a:pPr>
+            <a:r>
+              <a:rPr lang="en-US" sz="1200" dirty="0">
+                <a:solidFill>
+                  <a:srgbClr val="ECEAF0"/>
+                </a:solidFill>
+                <a:latin typeface="Manrope" pitchFamily="34" charset="0"/>
+                <a:ea typeface="Manrope" pitchFamily="34" charset="-122"/>
+                <a:cs typeface="Manrope" pitchFamily="34" charset="-120"/>
+              </a:rPr>
+              <a:t>6/16</a:t>
+            </a:r>
+            <a:endParaRPr lang="en-US" sz="1200" dirty="0"/>
+          </a:p>
+        </p:txBody>
+      </p:sp>
+      <p:pic>
+        <p:nvPicPr>
+          <p:cNvPr id="61" name="Image 13" descr="rechaza">    </p:cNvPr>
+          <p:cNvPicPr>
+            <a:picLocks noChangeAspect="1"/>
+          </p:cNvPicPr>
+          <p:nvPr/>
+        </p:nvPicPr>
+        <p:blipFill>
+          <a:blip r:embed="rId14"/>
+          <a:srcRect l="0" r="0" t="0" b="0"/>
+          <a:stretch/>
+        </p:blipFill>
+        <p:spPr>
+          <a:xfrm>
+            <a:off x="3251200" y="3852202"/>
+            <a:ext cx="177800" cy="177800"/>
+          </a:xfrm>
+          <a:prstGeom prst="rect">
+            <a:avLst/>
+          </a:prstGeom>
+        </p:spPr>
+      </p:pic>
+      <p:sp>
+        <p:nvSpPr>
+          <p:cNvPr id="62" name="Text 46"/>
+          <p:cNvSpPr/>
+          <p:nvPr/>
+        </p:nvSpPr>
+        <p:spPr>
+          <a:xfrm>
+            <a:off x="3492500" y="3834476"/>
+            <a:ext cx="253603" cy="238720"/>
+          </a:xfrm>
+          <a:prstGeom prst="rect">
+            <a:avLst/>
+          </a:prstGeom>
+          <a:noFill/>
+          <a:ln/>
+        </p:spPr>
+        <p:txBody>
+          <a:bodyPr wrap="square" lIns="0" tIns="0" rIns="0" bIns="0" rtlCol="0" anchor="t">
+            <a:normAutofit/>
+          </a:bodyPr>
+          <a:lstStyle/>
+          <a:p>
+            <a:pPr algn="l" indent="0" marL="0">
+              <a:lnSpc>
+                <a:spcPts val="1680"/>
+              </a:lnSpc>
+              <a:buNone/>
+            </a:pPr>
+            <a:r>
+              <a:rPr lang="en-US" sz="1200" dirty="0">
+                <a:solidFill>
+                  <a:srgbClr val="ECEAF0"/>
+                </a:solidFill>
+                <a:latin typeface="Manrope" pitchFamily="34" charset="0"/>
+                <a:ea typeface="Manrope" pitchFamily="34" charset="-122"/>
+                <a:cs typeface="Manrope" pitchFamily="34" charset="-120"/>
+              </a:rPr>
+              <a:t>1/3</a:t>
+            </a:r>
+            <a:endParaRPr lang="en-US" sz="1200" dirty="0"/>
+          </a:p>
+        </p:txBody>
+      </p:sp>
+      <p:pic>
+        <p:nvPicPr>
+          <p:cNvPr id="63" name="Image 14" descr="rechaza">    </p:cNvPr>
+          <p:cNvPicPr>
+            <a:picLocks noChangeAspect="1"/>
+          </p:cNvPicPr>
+          <p:nvPr/>
+        </p:nvPicPr>
+        <p:blipFill>
+          <a:blip r:embed="rId15"/>
+          <a:srcRect l="0" r="0" t="0" b="0"/>
+          <a:stretch/>
+        </p:blipFill>
+        <p:spPr>
+          <a:xfrm>
+            <a:off x="4368800" y="3852202"/>
+            <a:ext cx="177800" cy="177800"/>
+          </a:xfrm>
+          <a:prstGeom prst="rect">
+            <a:avLst/>
+          </a:prstGeom>
+        </p:spPr>
+      </p:pic>
+      <p:sp>
+        <p:nvSpPr>
+          <p:cNvPr id="64" name="Text 47"/>
+          <p:cNvSpPr/>
+          <p:nvPr/>
+        </p:nvSpPr>
+        <p:spPr>
+          <a:xfrm>
+            <a:off x="4610100" y="3834476"/>
+            <a:ext cx="294283" cy="238720"/>
+          </a:xfrm>
+          <a:prstGeom prst="rect">
+            <a:avLst/>
+          </a:prstGeom>
+          <a:noFill/>
+          <a:ln/>
+        </p:spPr>
+        <p:txBody>
+          <a:bodyPr wrap="square" lIns="0" tIns="0" rIns="0" bIns="0" rtlCol="0" anchor="t">
+            <a:normAutofit/>
+          </a:bodyPr>
+          <a:lstStyle/>
+          <a:p>
+            <a:pPr algn="l" indent="0" marL="0">
+              <a:lnSpc>
+                <a:spcPts val="1680"/>
+              </a:lnSpc>
+              <a:buNone/>
+            </a:pPr>
+            <a:r>
+              <a:rPr lang="en-US" sz="1200" dirty="0">
+                <a:solidFill>
+                  <a:srgbClr val="ECEAF0"/>
+                </a:solidFill>
+                <a:latin typeface="Manrope" pitchFamily="34" charset="0"/>
+                <a:ea typeface="Manrope" pitchFamily="34" charset="-122"/>
+                <a:cs typeface="Manrope" pitchFamily="34" charset="-120"/>
+              </a:rPr>
+              <a:t>4/6</a:t>
+            </a:r>
+            <a:endParaRPr lang="en-US" sz="1200" dirty="0"/>
+          </a:p>
+        </p:txBody>
+      </p:sp>
+      <p:pic>
+        <p:nvPicPr>
+          <p:cNvPr id="65" name="Image 15" descr="rechaza">    </p:cNvPr>
+          <p:cNvPicPr>
+            <a:picLocks noChangeAspect="1"/>
+          </p:cNvPicPr>
+          <p:nvPr/>
+        </p:nvPicPr>
+        <p:blipFill>
+          <a:blip r:embed="rId16"/>
+          <a:srcRect l="0" r="0" t="0" b="0"/>
+          <a:stretch/>
+        </p:blipFill>
+        <p:spPr>
+          <a:xfrm>
+            <a:off x="5486400" y="3852202"/>
+            <a:ext cx="177800" cy="177800"/>
+          </a:xfrm>
+          <a:prstGeom prst="rect">
+            <a:avLst/>
+          </a:prstGeom>
+        </p:spPr>
+      </p:pic>
+      <p:sp>
+        <p:nvSpPr>
+          <p:cNvPr id="66" name="Text 48"/>
+          <p:cNvSpPr/>
+          <p:nvPr/>
+        </p:nvSpPr>
+        <p:spPr>
+          <a:xfrm>
+            <a:off x="5727700" y="3834476"/>
+            <a:ext cx="278474" cy="238720"/>
+          </a:xfrm>
+          <a:prstGeom prst="rect">
+            <a:avLst/>
+          </a:prstGeom>
+          <a:noFill/>
+          <a:ln/>
+        </p:spPr>
+        <p:txBody>
+          <a:bodyPr wrap="square" lIns="0" tIns="0" rIns="0" bIns="0" rtlCol="0" anchor="t">
+            <a:normAutofit/>
+          </a:bodyPr>
+          <a:lstStyle/>
+          <a:p>
+            <a:pPr algn="l" indent="0" marL="0">
+              <a:lnSpc>
+                <a:spcPts val="1680"/>
+              </a:lnSpc>
+              <a:buNone/>
+            </a:pPr>
+            <a:r>
+              <a:rPr lang="en-US" sz="1200" dirty="0">
+                <a:solidFill>
+                  <a:srgbClr val="ECEAF0"/>
+                </a:solidFill>
+                <a:latin typeface="Manrope" pitchFamily="34" charset="0"/>
+                <a:ea typeface="Manrope" pitchFamily="34" charset="-122"/>
+                <a:cs typeface="Manrope" pitchFamily="34" charset="-120"/>
+              </a:rPr>
+              <a:t>3/3</a:t>
+            </a:r>
+            <a:endParaRPr lang="en-US" sz="1200" dirty="0"/>
+          </a:p>
+        </p:txBody>
+      </p:sp>
+      <p:pic>
+        <p:nvPicPr>
+          <p:cNvPr id="67" name="Image 16" descr="rechaza">    </p:cNvPr>
+          <p:cNvPicPr>
+            <a:picLocks noChangeAspect="1"/>
+          </p:cNvPicPr>
+          <p:nvPr/>
+        </p:nvPicPr>
+        <p:blipFill>
+          <a:blip r:embed="rId17"/>
+          <a:srcRect l="0" r="0" t="0" b="0"/>
+          <a:stretch/>
+        </p:blipFill>
+        <p:spPr>
+          <a:xfrm>
+            <a:off x="6604000" y="3852202"/>
+            <a:ext cx="177800" cy="177800"/>
+          </a:xfrm>
+          <a:prstGeom prst="rect">
+            <a:avLst/>
+          </a:prstGeom>
+        </p:spPr>
+      </p:pic>
+      <p:sp>
+        <p:nvSpPr>
+          <p:cNvPr id="68" name="Text 49"/>
+          <p:cNvSpPr/>
+          <p:nvPr/>
+        </p:nvSpPr>
+        <p:spPr>
+          <a:xfrm>
+            <a:off x="6845300" y="3834476"/>
+            <a:ext cx="281054" cy="238720"/>
+          </a:xfrm>
+          <a:prstGeom prst="rect">
+            <a:avLst/>
+          </a:prstGeom>
+          <a:noFill/>
+          <a:ln/>
+        </p:spPr>
+        <p:txBody>
+          <a:bodyPr wrap="square" lIns="0" tIns="0" rIns="0" bIns="0" rtlCol="0" anchor="t">
+            <a:normAutofit/>
+          </a:bodyPr>
+          <a:lstStyle/>
+          <a:p>
+            <a:pPr algn="l" indent="0" marL="0">
+              <a:lnSpc>
+                <a:spcPts val="1680"/>
+              </a:lnSpc>
+              <a:buNone/>
+            </a:pPr>
+            <a:r>
+              <a:rPr lang="en-US" sz="1200" dirty="0">
+                <a:solidFill>
+                  <a:srgbClr val="ECEAF0"/>
+                </a:solidFill>
+                <a:latin typeface="Manrope" pitchFamily="34" charset="0"/>
+                <a:ea typeface="Manrope" pitchFamily="34" charset="-122"/>
+                <a:cs typeface="Manrope" pitchFamily="34" charset="-120"/>
+              </a:rPr>
+              <a:t>2/3</a:t>
+            </a:r>
+            <a:endParaRPr lang="en-US" sz="1200" dirty="0"/>
+          </a:p>
+        </p:txBody>
+      </p:sp>
+      <p:sp>
+        <p:nvSpPr>
+          <p:cNvPr id="69" name="Shape 50"/>
+          <p:cNvSpPr/>
+          <p:nvPr/>
+        </p:nvSpPr>
+        <p:spPr>
+          <a:xfrm>
+            <a:off x="812800" y="4492563"/>
+            <a:ext cx="6858000" cy="0"/>
+          </a:xfrm>
+          <a:prstGeom prst="line">
+            <a:avLst/>
+          </a:prstGeom>
+          <a:noFill/>
+          <a:ln w="6350">
+            <a:solidFill>
+              <a:srgbClr val="211E28"/>
+            </a:solidFill>
+            <a:prstDash val="solid"/>
+          </a:ln>
+        </p:spPr>
+      </p:sp>
+      <p:sp>
+        <p:nvSpPr>
+          <p:cNvPr id="70" name="Text 51"/>
+          <p:cNvSpPr/>
+          <p:nvPr/>
+        </p:nvSpPr>
+        <p:spPr>
+          <a:xfrm>
+            <a:off x="812800" y="4202776"/>
+            <a:ext cx="1320800" cy="238720"/>
+          </a:xfrm>
+          <a:prstGeom prst="rect">
+            <a:avLst/>
+          </a:prstGeom>
+          <a:noFill/>
+          <a:ln/>
+        </p:spPr>
+        <p:txBody>
+          <a:bodyPr wrap="square" lIns="0" tIns="0" rIns="0" bIns="0" rtlCol="0" anchor="t">
+            <a:normAutofit/>
+          </a:bodyPr>
+          <a:lstStyle/>
+          <a:p>
+            <a:pPr algn="l" indent="0" marL="0">
+              <a:lnSpc>
+                <a:spcPts val="1680"/>
+              </a:lnSpc>
+              <a:buNone/>
+            </a:pPr>
+            <a:r>
+              <a:rPr lang="en-US" sz="1200" dirty="0">
+                <a:solidFill>
+                  <a:srgbClr val="A9A4B5"/>
+                </a:solidFill>
+                <a:latin typeface="Manrope" pitchFamily="34" charset="0"/>
+                <a:ea typeface="Manrope" pitchFamily="34" charset="-122"/>
+                <a:cs typeface="Manrope" pitchFamily="34" charset="-120"/>
+              </a:rPr>
+              <a:t>P5 Rúbrica</a:t>
+            </a:r>
+            <a:endParaRPr lang="en-US" sz="1200" dirty="0"/>
+          </a:p>
+        </p:txBody>
+      </p:sp>
+      <p:pic>
+        <p:nvPicPr>
+          <p:cNvPr id="71" name="Image 17" descr="pasa">    </p:cNvPr>
+          <p:cNvPicPr>
+            <a:picLocks noChangeAspect="1"/>
+          </p:cNvPicPr>
+          <p:nvPr/>
+        </p:nvPicPr>
+        <p:blipFill>
+          <a:blip r:embed="rId18"/>
+          <a:srcRect l="0" r="0" t="0" b="0"/>
+          <a:stretch/>
+        </p:blipFill>
+        <p:spPr>
+          <a:xfrm>
+            <a:off x="2133600" y="4220505"/>
+            <a:ext cx="177800" cy="177800"/>
+          </a:xfrm>
+          <a:prstGeom prst="rect">
+            <a:avLst/>
+          </a:prstGeom>
+        </p:spPr>
+      </p:pic>
+      <p:sp>
+        <p:nvSpPr>
+          <p:cNvPr id="72" name="Text 52"/>
+          <p:cNvSpPr/>
+          <p:nvPr/>
+        </p:nvSpPr>
+        <p:spPr>
+          <a:xfrm>
+            <a:off x="2374900" y="4202776"/>
+            <a:ext cx="266105" cy="238720"/>
+          </a:xfrm>
+          <a:prstGeom prst="rect">
+            <a:avLst/>
+          </a:prstGeom>
+          <a:noFill/>
+          <a:ln/>
+        </p:spPr>
+        <p:txBody>
+          <a:bodyPr wrap="square" lIns="0" tIns="0" rIns="0" bIns="0" rtlCol="0" anchor="t">
+            <a:normAutofit/>
+          </a:bodyPr>
+          <a:lstStyle/>
+          <a:p>
+            <a:pPr algn="l" indent="0" marL="0">
+              <a:lnSpc>
+                <a:spcPts val="1680"/>
+              </a:lnSpc>
+              <a:buNone/>
+            </a:pPr>
+            <a:r>
+              <a:rPr lang="en-US" sz="1200" dirty="0">
+                <a:solidFill>
+                  <a:srgbClr val="ECEAF0"/>
+                </a:solidFill>
+                <a:latin typeface="Manrope" pitchFamily="34" charset="0"/>
+                <a:ea typeface="Manrope" pitchFamily="34" charset="-122"/>
+                <a:cs typeface="Manrope" pitchFamily="34" charset="-120"/>
+              </a:rPr>
+              <a:t>4,5</a:t>
+            </a:r>
+            <a:endParaRPr lang="en-US" sz="1200" dirty="0"/>
+          </a:p>
+        </p:txBody>
+      </p:sp>
+      <p:pic>
+        <p:nvPicPr>
+          <p:cNvPr id="73" name="Image 18" descr="sin ejecutar">    </p:cNvPr>
+          <p:cNvPicPr>
+            <a:picLocks noChangeAspect="1"/>
+          </p:cNvPicPr>
+          <p:nvPr/>
+        </p:nvPicPr>
+        <p:blipFill>
+          <a:blip r:embed="rId19"/>
+          <a:srcRect l="0" r="0" t="0" b="0"/>
+          <a:stretch/>
+        </p:blipFill>
+        <p:spPr>
+          <a:xfrm>
+            <a:off x="3251200" y="4220567"/>
+            <a:ext cx="177800" cy="177800"/>
+          </a:xfrm>
+          <a:prstGeom prst="rect">
+            <a:avLst/>
+          </a:prstGeom>
+        </p:spPr>
+      </p:pic>
+      <p:pic>
+        <p:nvPicPr>
+          <p:cNvPr id="74" name="Image 19" descr="sin ejecutar">    </p:cNvPr>
+          <p:cNvPicPr>
+            <a:picLocks noChangeAspect="1"/>
+          </p:cNvPicPr>
+          <p:nvPr/>
+        </p:nvPicPr>
+        <p:blipFill>
+          <a:blip r:embed="rId20"/>
+          <a:srcRect l="0" r="0" t="0" b="0"/>
+          <a:stretch/>
+        </p:blipFill>
+        <p:spPr>
+          <a:xfrm>
+            <a:off x="4368800" y="4220567"/>
+            <a:ext cx="177800" cy="177800"/>
+          </a:xfrm>
+          <a:prstGeom prst="rect">
+            <a:avLst/>
+          </a:prstGeom>
+        </p:spPr>
+      </p:pic>
+      <p:pic>
+        <p:nvPicPr>
+          <p:cNvPr id="75" name="Image 20" descr="sin ejecutar">    </p:cNvPr>
+          <p:cNvPicPr>
+            <a:picLocks noChangeAspect="1"/>
+          </p:cNvPicPr>
+          <p:nvPr/>
+        </p:nvPicPr>
+        <p:blipFill>
+          <a:blip r:embed="rId21"/>
+          <a:srcRect l="0" r="0" t="0" b="0"/>
+          <a:stretch/>
+        </p:blipFill>
+        <p:spPr>
+          <a:xfrm>
+            <a:off x="5486400" y="4220567"/>
+            <a:ext cx="177800" cy="177800"/>
+          </a:xfrm>
+          <a:prstGeom prst="rect">
+            <a:avLst/>
+          </a:prstGeom>
+        </p:spPr>
+      </p:pic>
+      <p:pic>
+        <p:nvPicPr>
+          <p:cNvPr id="76" name="Image 21" descr="sin ejecutar">    </p:cNvPr>
+          <p:cNvPicPr>
+            <a:picLocks noChangeAspect="1"/>
+          </p:cNvPicPr>
+          <p:nvPr/>
+        </p:nvPicPr>
+        <p:blipFill>
+          <a:blip r:embed="rId22"/>
+          <a:srcRect l="0" r="0" t="0" b="0"/>
+          <a:stretch/>
+        </p:blipFill>
+        <p:spPr>
+          <a:xfrm>
+            <a:off x="6604000" y="4220567"/>
+            <a:ext cx="177800" cy="177800"/>
+          </a:xfrm>
+          <a:prstGeom prst="rect">
+            <a:avLst/>
+          </a:prstGeom>
+        </p:spPr>
+      </p:pic>
+      <p:sp>
+        <p:nvSpPr>
+          <p:cNvPr id="77" name="Shape 53"/>
+          <p:cNvSpPr/>
+          <p:nvPr/>
+        </p:nvSpPr>
+        <p:spPr>
+          <a:xfrm>
+            <a:off x="812800" y="4860863"/>
+            <a:ext cx="6858000" cy="0"/>
+          </a:xfrm>
+          <a:prstGeom prst="line">
+            <a:avLst/>
+          </a:prstGeom>
+          <a:noFill/>
+          <a:ln w="6350">
+            <a:solidFill>
+              <a:srgbClr val="211E28"/>
+            </a:solidFill>
+            <a:prstDash val="solid"/>
+          </a:ln>
+        </p:spPr>
+      </p:sp>
+      <p:sp>
+        <p:nvSpPr>
+          <p:cNvPr id="78" name="Text 54"/>
+          <p:cNvSpPr/>
+          <p:nvPr/>
+        </p:nvSpPr>
+        <p:spPr>
+          <a:xfrm>
+            <a:off x="812800" y="4571076"/>
+            <a:ext cx="1320800" cy="238720"/>
+          </a:xfrm>
+          <a:prstGeom prst="rect">
+            <a:avLst/>
+          </a:prstGeom>
+          <a:noFill/>
+          <a:ln/>
+        </p:spPr>
+        <p:txBody>
+          <a:bodyPr wrap="square" lIns="0" tIns="0" rIns="0" bIns="0" rtlCol="0" anchor="t">
+            <a:normAutofit/>
+          </a:bodyPr>
+          <a:lstStyle/>
+          <a:p>
+            <a:pPr algn="l" indent="0" marL="0">
+              <a:lnSpc>
+                <a:spcPts val="1680"/>
+              </a:lnSpc>
+              <a:buNone/>
+            </a:pPr>
+            <a:r>
+              <a:rPr lang="en-US" sz="1200" dirty="0">
+                <a:solidFill>
+                  <a:srgbClr val="A9A4B5"/>
+                </a:solidFill>
+                <a:latin typeface="Manrope" pitchFamily="34" charset="0"/>
+                <a:ea typeface="Manrope" pitchFamily="34" charset="-122"/>
+                <a:cs typeface="Manrope" pitchFamily="34" charset="-120"/>
+              </a:rPr>
+              <a:t>P6 Lean 4</a:t>
+            </a:r>
+            <a:endParaRPr lang="en-US" sz="1200" dirty="0"/>
+          </a:p>
+        </p:txBody>
+      </p:sp>
+      <p:pic>
+        <p:nvPicPr>
+          <p:cNvPr id="79" name="Image 22" descr="pasa">    </p:cNvPr>
+          <p:cNvPicPr>
+            <a:picLocks noChangeAspect="1"/>
+          </p:cNvPicPr>
+          <p:nvPr/>
+        </p:nvPicPr>
+        <p:blipFill>
+          <a:blip r:embed="rId23"/>
+          <a:srcRect l="0" r="0" t="0" b="0"/>
+          <a:stretch/>
+        </p:blipFill>
+        <p:spPr>
+          <a:xfrm>
+            <a:off x="2133600" y="4588805"/>
+            <a:ext cx="177800" cy="177800"/>
+          </a:xfrm>
+          <a:prstGeom prst="rect">
+            <a:avLst/>
+          </a:prstGeom>
+        </p:spPr>
+      </p:pic>
+      <p:sp>
+        <p:nvSpPr>
+          <p:cNvPr id="80" name="Text 55"/>
+          <p:cNvSpPr/>
+          <p:nvPr/>
+        </p:nvSpPr>
+        <p:spPr>
+          <a:xfrm>
+            <a:off x="2374900" y="4571076"/>
+            <a:ext cx="478102" cy="238720"/>
+          </a:xfrm>
+          <a:prstGeom prst="rect">
+            <a:avLst/>
+          </a:prstGeom>
+          <a:noFill/>
+          <a:ln/>
+        </p:spPr>
+        <p:txBody>
+          <a:bodyPr wrap="square" lIns="0" tIns="0" rIns="0" bIns="0" rtlCol="0" anchor="t">
+            <a:normAutofit/>
+          </a:bodyPr>
+          <a:lstStyle/>
+          <a:p>
+            <a:pPr algn="l" indent="0" marL="0">
+              <a:lnSpc>
+                <a:spcPts val="1680"/>
+              </a:lnSpc>
+              <a:buNone/>
+            </a:pPr>
+            <a:r>
+              <a:rPr lang="en-US" sz="1200" dirty="0">
+                <a:solidFill>
+                  <a:srgbClr val="ECEAF0"/>
+                </a:solidFill>
+                <a:latin typeface="Manrope" pitchFamily="34" charset="0"/>
+                <a:ea typeface="Manrope" pitchFamily="34" charset="-122"/>
+                <a:cs typeface="Manrope" pitchFamily="34" charset="-120"/>
+              </a:rPr>
+              <a:t>115 ev.</a:t>
+            </a:r>
+            <a:endParaRPr lang="en-US" sz="1200" dirty="0"/>
+          </a:p>
+        </p:txBody>
+      </p:sp>
+      <p:pic>
+        <p:nvPicPr>
+          <p:cNvPr id="81" name="Image 23" descr="sin ejecutar">    </p:cNvPr>
+          <p:cNvPicPr>
+            <a:picLocks noChangeAspect="1"/>
+          </p:cNvPicPr>
+          <p:nvPr/>
+        </p:nvPicPr>
+        <p:blipFill>
+          <a:blip r:embed="rId24"/>
+          <a:srcRect l="0" r="0" t="0" b="0"/>
+          <a:stretch/>
+        </p:blipFill>
+        <p:spPr>
+          <a:xfrm>
+            <a:off x="3251200" y="4588867"/>
+            <a:ext cx="177800" cy="177800"/>
+          </a:xfrm>
+          <a:prstGeom prst="rect">
+            <a:avLst/>
+          </a:prstGeom>
+        </p:spPr>
+      </p:pic>
+      <p:pic>
+        <p:nvPicPr>
+          <p:cNvPr id="82" name="Image 24" descr="sin ejecutar">    </p:cNvPr>
+          <p:cNvPicPr>
+            <a:picLocks noChangeAspect="1"/>
+          </p:cNvPicPr>
+          <p:nvPr/>
+        </p:nvPicPr>
+        <p:blipFill>
+          <a:blip r:embed="rId25"/>
+          <a:srcRect l="0" r="0" t="0" b="0"/>
+          <a:stretch/>
+        </p:blipFill>
+        <p:spPr>
+          <a:xfrm>
+            <a:off x="4368800" y="4588867"/>
+            <a:ext cx="177800" cy="177800"/>
+          </a:xfrm>
+          <a:prstGeom prst="rect">
+            <a:avLst/>
+          </a:prstGeom>
+        </p:spPr>
+      </p:pic>
+      <p:pic>
+        <p:nvPicPr>
+          <p:cNvPr id="83" name="Image 25" descr="sin ejecutar">    </p:cNvPr>
+          <p:cNvPicPr>
+            <a:picLocks noChangeAspect="1"/>
+          </p:cNvPicPr>
+          <p:nvPr/>
+        </p:nvPicPr>
+        <p:blipFill>
+          <a:blip r:embed="rId26"/>
+          <a:srcRect l="0" r="0" t="0" b="0"/>
+          <a:stretch/>
+        </p:blipFill>
+        <p:spPr>
+          <a:xfrm>
+            <a:off x="5486400" y="4588867"/>
+            <a:ext cx="177800" cy="177800"/>
+          </a:xfrm>
+          <a:prstGeom prst="rect">
+            <a:avLst/>
+          </a:prstGeom>
+        </p:spPr>
+      </p:pic>
+      <p:pic>
+        <p:nvPicPr>
+          <p:cNvPr id="84" name="Image 26" descr="sin ejecutar">    </p:cNvPr>
+          <p:cNvPicPr>
+            <a:picLocks noChangeAspect="1"/>
+          </p:cNvPicPr>
+          <p:nvPr/>
+        </p:nvPicPr>
+        <p:blipFill>
+          <a:blip r:embed="rId27"/>
+          <a:srcRect l="0" r="0" t="0" b="0"/>
+          <a:stretch/>
+        </p:blipFill>
+        <p:spPr>
+          <a:xfrm>
+            <a:off x="6604000" y="4588867"/>
+            <a:ext cx="177800" cy="177800"/>
+          </a:xfrm>
+          <a:prstGeom prst="rect">
+            <a:avLst/>
+          </a:prstGeom>
+        </p:spPr>
+      </p:pic>
+      <p:sp>
+        <p:nvSpPr>
+          <p:cNvPr id="85" name="Text 56"/>
+          <p:cNvSpPr/>
+          <p:nvPr/>
+        </p:nvSpPr>
+        <p:spPr>
+          <a:xfrm>
+            <a:off x="812800" y="4941491"/>
+            <a:ext cx="1320800" cy="238720"/>
+          </a:xfrm>
+          <a:prstGeom prst="rect">
+            <a:avLst/>
+          </a:prstGeom>
+          <a:noFill/>
+          <a:ln/>
+        </p:spPr>
+        <p:txBody>
+          <a:bodyPr wrap="square" lIns="0" tIns="0" rIns="0" bIns="0" rtlCol="0" anchor="t">
+            <a:normAutofit/>
+          </a:bodyPr>
+          <a:lstStyle/>
+          <a:p>
+            <a:pPr algn="l" indent="0" marL="0">
+              <a:lnSpc>
+                <a:spcPts val="1680"/>
+              </a:lnSpc>
+              <a:buNone/>
+            </a:pPr>
+            <a:r>
+              <a:rPr lang="en-US" sz="1200" dirty="0">
+                <a:solidFill>
+                  <a:srgbClr val="A9A4B5"/>
+                </a:solidFill>
+                <a:latin typeface="Manrope" pitchFamily="34" charset="0"/>
+                <a:ea typeface="Manrope" pitchFamily="34" charset="-122"/>
+                <a:cs typeface="Manrope" pitchFamily="34" charset="-120"/>
+              </a:rPr>
+              <a:t>Coste</a:t>
+            </a:r>
+            <a:endParaRPr lang="en-US" sz="1200" dirty="0"/>
+          </a:p>
+        </p:txBody>
+      </p:sp>
+      <p:sp>
+        <p:nvSpPr>
+          <p:cNvPr id="86" name="Text 57"/>
+          <p:cNvSpPr/>
+          <p:nvPr/>
+        </p:nvSpPr>
+        <p:spPr>
+          <a:xfrm>
+            <a:off x="2133600" y="4941491"/>
+            <a:ext cx="1117600" cy="238720"/>
+          </a:xfrm>
+          <a:prstGeom prst="rect">
+            <a:avLst/>
+          </a:prstGeom>
+          <a:noFill/>
+          <a:ln/>
+        </p:spPr>
+        <p:txBody>
+          <a:bodyPr wrap="square" lIns="0" tIns="0" rIns="0" bIns="0" rtlCol="0" anchor="t">
+            <a:normAutofit/>
+          </a:bodyPr>
+          <a:lstStyle/>
+          <a:p>
+            <a:pPr algn="l" indent="0" marL="0">
+              <a:lnSpc>
+                <a:spcPts val="1680"/>
+              </a:lnSpc>
+              <a:buNone/>
+            </a:pPr>
+            <a:r>
+              <a:rPr lang="en-US" sz="1200" dirty="0">
+                <a:solidFill>
+                  <a:srgbClr val="ECEAF0"/>
+                </a:solidFill>
+                <a:latin typeface="Manrope" pitchFamily="34" charset="0"/>
+                <a:ea typeface="Manrope" pitchFamily="34" charset="-122"/>
+                <a:cs typeface="Manrope" pitchFamily="34" charset="-120"/>
+              </a:rPr>
+              <a:t>41,47 $</a:t>
+            </a:r>
+            <a:endParaRPr lang="en-US" sz="1200" dirty="0"/>
+          </a:p>
+        </p:txBody>
+      </p:sp>
+      <p:sp>
+        <p:nvSpPr>
+          <p:cNvPr id="87" name="Text 58"/>
+          <p:cNvSpPr/>
+          <p:nvPr/>
+        </p:nvSpPr>
+        <p:spPr>
+          <a:xfrm>
+            <a:off x="3251200" y="4941491"/>
+            <a:ext cx="1117600" cy="238720"/>
+          </a:xfrm>
+          <a:prstGeom prst="rect">
+            <a:avLst/>
+          </a:prstGeom>
+          <a:noFill/>
+          <a:ln/>
+        </p:spPr>
+        <p:txBody>
+          <a:bodyPr wrap="square" lIns="0" tIns="0" rIns="0" bIns="0" rtlCol="0" anchor="t">
+            <a:normAutofit/>
+          </a:bodyPr>
+          <a:lstStyle/>
+          <a:p>
+            <a:pPr algn="l" indent="0" marL="0">
+              <a:lnSpc>
+                <a:spcPts val="1680"/>
+              </a:lnSpc>
+              <a:buNone/>
+            </a:pPr>
+            <a:r>
+              <a:rPr lang="en-US" sz="1200" dirty="0">
+                <a:solidFill>
+                  <a:srgbClr val="ECEAF0"/>
+                </a:solidFill>
+                <a:latin typeface="Manrope" pitchFamily="34" charset="0"/>
+                <a:ea typeface="Manrope" pitchFamily="34" charset="-122"/>
+                <a:cs typeface="Manrope" pitchFamily="34" charset="-120"/>
+              </a:rPr>
+              <a:t>12,00 $</a:t>
+            </a:r>
+            <a:endParaRPr lang="en-US" sz="1200" dirty="0"/>
+          </a:p>
+        </p:txBody>
+      </p:sp>
+      <p:sp>
+        <p:nvSpPr>
+          <p:cNvPr id="88" name="Text 59"/>
+          <p:cNvSpPr/>
+          <p:nvPr/>
+        </p:nvSpPr>
+        <p:spPr>
+          <a:xfrm>
+            <a:off x="4368800" y="4941491"/>
+            <a:ext cx="1117600" cy="238720"/>
+          </a:xfrm>
+          <a:prstGeom prst="rect">
+            <a:avLst/>
+          </a:prstGeom>
+          <a:noFill/>
+          <a:ln/>
+        </p:spPr>
+        <p:txBody>
+          <a:bodyPr wrap="square" lIns="0" tIns="0" rIns="0" bIns="0" rtlCol="0" anchor="t">
+            <a:normAutofit/>
+          </a:bodyPr>
+          <a:lstStyle/>
+          <a:p>
+            <a:pPr algn="l" indent="0" marL="0">
+              <a:lnSpc>
+                <a:spcPts val="1680"/>
+              </a:lnSpc>
+              <a:buNone/>
+            </a:pPr>
+            <a:r>
+              <a:rPr lang="en-US" sz="1200" dirty="0">
+                <a:solidFill>
+                  <a:srgbClr val="ECEAF0"/>
+                </a:solidFill>
+                <a:latin typeface="Manrope" pitchFamily="34" charset="0"/>
+                <a:ea typeface="Manrope" pitchFamily="34" charset="-122"/>
+                <a:cs typeface="Manrope" pitchFamily="34" charset="-120"/>
+              </a:rPr>
+              <a:t>18,62 $</a:t>
+            </a:r>
+            <a:endParaRPr lang="en-US" sz="1200" dirty="0"/>
+          </a:p>
+        </p:txBody>
+      </p:sp>
+      <p:sp>
+        <p:nvSpPr>
+          <p:cNvPr id="89" name="Text 60"/>
+          <p:cNvSpPr/>
+          <p:nvPr/>
+        </p:nvSpPr>
+        <p:spPr>
+          <a:xfrm>
+            <a:off x="5486400" y="4941491"/>
+            <a:ext cx="1117600" cy="238720"/>
+          </a:xfrm>
+          <a:prstGeom prst="rect">
+            <a:avLst/>
+          </a:prstGeom>
+          <a:noFill/>
+          <a:ln/>
+        </p:spPr>
+        <p:txBody>
+          <a:bodyPr wrap="square" lIns="0" tIns="0" rIns="0" bIns="0" rtlCol="0" anchor="t">
+            <a:normAutofit/>
+          </a:bodyPr>
+          <a:lstStyle/>
+          <a:p>
+            <a:pPr algn="l" indent="0" marL="0">
+              <a:lnSpc>
+                <a:spcPts val="1680"/>
+              </a:lnSpc>
+              <a:buNone/>
+            </a:pPr>
+            <a:r>
+              <a:rPr lang="en-US" sz="1200" dirty="0">
+                <a:solidFill>
+                  <a:srgbClr val="ECEAF0"/>
+                </a:solidFill>
+                <a:latin typeface="Manrope" pitchFamily="34" charset="0"/>
+                <a:ea typeface="Manrope" pitchFamily="34" charset="-122"/>
+                <a:cs typeface="Manrope" pitchFamily="34" charset="-120"/>
+              </a:rPr>
+              <a:t>7,37 $</a:t>
+            </a:r>
+            <a:endParaRPr lang="en-US" sz="1200" dirty="0"/>
+          </a:p>
+        </p:txBody>
+      </p:sp>
+      <p:sp>
+        <p:nvSpPr>
+          <p:cNvPr id="90" name="Text 61"/>
+          <p:cNvSpPr/>
+          <p:nvPr/>
+        </p:nvSpPr>
+        <p:spPr>
+          <a:xfrm>
+            <a:off x="6604000" y="4941491"/>
+            <a:ext cx="1117600" cy="238720"/>
+          </a:xfrm>
+          <a:prstGeom prst="rect">
+            <a:avLst/>
+          </a:prstGeom>
+          <a:noFill/>
+          <a:ln/>
+        </p:spPr>
+        <p:txBody>
+          <a:bodyPr wrap="square" lIns="0" tIns="0" rIns="0" bIns="0" rtlCol="0" anchor="t">
+            <a:normAutofit/>
+          </a:bodyPr>
+          <a:lstStyle/>
+          <a:p>
+            <a:pPr algn="l" indent="0" marL="0">
+              <a:lnSpc>
+                <a:spcPts val="1680"/>
+              </a:lnSpc>
+              <a:buNone/>
+            </a:pPr>
+            <a:r>
+              <a:rPr lang="en-US" sz="1200" dirty="0">
+                <a:solidFill>
+                  <a:srgbClr val="ECEAF0"/>
+                </a:solidFill>
+                <a:latin typeface="Manrope" pitchFamily="34" charset="0"/>
+                <a:ea typeface="Manrope" pitchFamily="34" charset="-122"/>
+                <a:cs typeface="Manrope" pitchFamily="34" charset="-120"/>
+              </a:rPr>
+              <a:t>7,47 $</a:t>
+            </a:r>
+            <a:endParaRPr lang="en-US" sz="1200" dirty="0"/>
+          </a:p>
+        </p:txBody>
+      </p:sp>
+      <p:sp>
+        <p:nvSpPr>
+          <p:cNvPr id="91" name="Shape 62"/>
+          <p:cNvSpPr/>
+          <p:nvPr/>
+        </p:nvSpPr>
+        <p:spPr>
+          <a:xfrm>
+            <a:off x="8029575" y="1654110"/>
+            <a:ext cx="3346450" cy="944430"/>
+          </a:xfrm>
+          <a:prstGeom prst="roundRect">
+            <a:avLst>
+              <a:gd name="adj" fmla="val 10422"/>
+            </a:avLst>
+          </a:prstGeom>
+          <a:solidFill>
+            <a:srgbClr val="211E28"/>
+          </a:solidFill>
+          <a:ln w="6350">
+            <a:solidFill>
+              <a:srgbClr val="5B5078"/>
+            </a:solidFill>
+            <a:prstDash val="solid"/>
+          </a:ln>
+        </p:spPr>
+      </p:sp>
+      <p:sp>
+        <p:nvSpPr>
+          <p:cNvPr id="92" name="Text 63"/>
+          <p:cNvSpPr/>
+          <p:nvPr/>
+        </p:nvSpPr>
+        <p:spPr>
+          <a:xfrm>
+            <a:off x="8208434" y="1794867"/>
+            <a:ext cx="3078395" cy="431800"/>
+          </a:xfrm>
+          <a:prstGeom prst="rect">
+            <a:avLst/>
+          </a:prstGeom>
+          <a:noFill/>
+          <a:ln/>
+        </p:spPr>
+        <p:txBody>
+          <a:bodyPr wrap="square" lIns="0" tIns="0" rIns="0" bIns="0" rtlCol="0" anchor="t">
+            <a:normAutofit/>
+          </a:bodyPr>
+          <a:lstStyle/>
+          <a:p>
+            <a:pPr algn="l" indent="0" marL="0">
+              <a:lnSpc>
+                <a:spcPts val="3200"/>
+              </a:lnSpc>
+              <a:buNone/>
+            </a:pPr>
+            <a:r>
+              <a:rPr lang="en-US" sz="3200" dirty="0">
+                <a:solidFill>
+                  <a:srgbClr val="E0975A"/>
+                </a:solidFill>
+                <a:latin typeface="Fraunces" pitchFamily="34" charset="0"/>
+                <a:ea typeface="Fraunces" pitchFamily="34" charset="-122"/>
+                <a:cs typeface="Fraunces" pitchFamily="34" charset="-120"/>
+              </a:rPr>
+              <a:t>10/10</a:t>
+            </a:r>
+            <a:endParaRPr lang="en-US" sz="3200" dirty="0"/>
+          </a:p>
+        </p:txBody>
+      </p:sp>
+      <p:sp>
+        <p:nvSpPr>
+          <p:cNvPr id="93" name="Text 64"/>
+          <p:cNvSpPr/>
+          <p:nvPr/>
+        </p:nvSpPr>
+        <p:spPr>
+          <a:xfrm>
+            <a:off x="8208434" y="2252067"/>
+            <a:ext cx="3078395" cy="231114"/>
+          </a:xfrm>
+          <a:prstGeom prst="rect">
+            <a:avLst/>
+          </a:prstGeom>
+          <a:noFill/>
+          <a:ln/>
+        </p:spPr>
+        <p:txBody>
+          <a:bodyPr wrap="square" lIns="0" tIns="0" rIns="0" bIns="0" rtlCol="0" anchor="t">
+            <a:normAutofit/>
+          </a:bodyPr>
+          <a:lstStyle/>
+          <a:p>
+            <a:pPr algn="l" indent="0" marL="0">
+              <a:lnSpc>
+                <a:spcPts val="1620"/>
+              </a:lnSpc>
+              <a:buNone/>
+            </a:pPr>
+            <a:r>
+              <a:rPr lang="en-US" sz="1200" dirty="0">
+                <a:solidFill>
+                  <a:srgbClr val="ECEAF0"/>
+                </a:solidFill>
+                <a:latin typeface="Manrope" pitchFamily="34" charset="0"/>
+                <a:ea typeface="Manrope" pitchFamily="34" charset="-122"/>
+                <a:cs typeface="Manrope" pitchFamily="34" charset="-120"/>
+              </a:rPr>
+              <a:t>capítulos · rúbrica 4,5 · Lean pasa</a:t>
+            </a:r>
+            <a:endParaRPr lang="en-US" sz="1200" dirty="0"/>
+          </a:p>
+        </p:txBody>
+      </p:sp>
+      <p:sp>
+        <p:nvSpPr>
+          <p:cNvPr id="94" name="Shape 65"/>
+          <p:cNvSpPr/>
+          <p:nvPr/>
+        </p:nvSpPr>
+        <p:spPr>
+          <a:xfrm>
+            <a:off x="8029575" y="2731889"/>
+            <a:ext cx="3346450" cy="944430"/>
+          </a:xfrm>
+          <a:prstGeom prst="roundRect">
+            <a:avLst>
+              <a:gd name="adj" fmla="val 10422"/>
+            </a:avLst>
+          </a:prstGeom>
+          <a:solidFill>
+            <a:srgbClr val="211E28"/>
+          </a:solidFill>
+          <a:ln w="6350">
+            <a:solidFill>
+              <a:srgbClr val="5B5078"/>
+            </a:solidFill>
+            <a:prstDash val="solid"/>
+          </a:ln>
+        </p:spPr>
+      </p:sp>
+      <p:sp>
+        <p:nvSpPr>
+          <p:cNvPr id="95" name="Text 66"/>
+          <p:cNvSpPr/>
+          <p:nvPr/>
+        </p:nvSpPr>
+        <p:spPr>
+          <a:xfrm>
+            <a:off x="8208434" y="2872649"/>
+            <a:ext cx="3078395" cy="431800"/>
+          </a:xfrm>
+          <a:prstGeom prst="rect">
+            <a:avLst/>
+          </a:prstGeom>
+          <a:noFill/>
+          <a:ln/>
+        </p:spPr>
+        <p:txBody>
+          <a:bodyPr wrap="square" lIns="0" tIns="0" rIns="0" bIns="0" rtlCol="0" anchor="t">
+            <a:normAutofit/>
+          </a:bodyPr>
+          <a:lstStyle/>
+          <a:p>
+            <a:pPr algn="l" indent="0" marL="0">
+              <a:lnSpc>
+                <a:spcPts val="3200"/>
+              </a:lnSpc>
+              <a:buNone/>
+            </a:pPr>
+            <a:r>
+              <a:rPr lang="en-US" sz="3200" dirty="0">
+                <a:solidFill>
+                  <a:srgbClr val="E0975A"/>
+                </a:solidFill>
+                <a:latin typeface="Fraunces" pitchFamily="34" charset="0"/>
+                <a:ea typeface="Fraunces" pitchFamily="34" charset="-122"/>
+                <a:cs typeface="Fraunces" pitchFamily="34" charset="-120"/>
+              </a:rPr>
+              <a:t>3/3</a:t>
+            </a:r>
+            <a:endParaRPr lang="en-US" sz="3200" dirty="0"/>
+          </a:p>
+        </p:txBody>
+      </p:sp>
+      <p:sp>
+        <p:nvSpPr>
+          <p:cNvPr id="96" name="Text 67"/>
+          <p:cNvSpPr/>
+          <p:nvPr/>
+        </p:nvSpPr>
+        <p:spPr>
+          <a:xfrm>
+            <a:off x="8208434" y="3329849"/>
+            <a:ext cx="3078395" cy="231114"/>
+          </a:xfrm>
+          <a:prstGeom prst="rect">
+            <a:avLst/>
+          </a:prstGeom>
+          <a:noFill/>
+          <a:ln/>
+        </p:spPr>
+        <p:txBody>
+          <a:bodyPr wrap="square" lIns="0" tIns="0" rIns="0" bIns="0" rtlCol="0" anchor="t">
+            <a:normAutofit/>
+          </a:bodyPr>
+          <a:lstStyle/>
+          <a:p>
+            <a:pPr algn="l" indent="0" marL="0">
+              <a:lnSpc>
+                <a:spcPts val="1620"/>
+              </a:lnSpc>
+              <a:buNone/>
+            </a:pPr>
+            <a:r>
+              <a:rPr lang="en-US" sz="1200" dirty="0">
+                <a:solidFill>
+                  <a:srgbClr val="ECEAF0"/>
+                </a:solidFill>
+                <a:latin typeface="Manrope" pitchFamily="34" charset="0"/>
+                <a:ea typeface="Manrope" pitchFamily="34" charset="-122"/>
+                <a:cs typeface="Manrope" pitchFamily="34" charset="-120"/>
+              </a:rPr>
+              <a:t>inyecciones detectadas</a:t>
+            </a:r>
+            <a:endParaRPr lang="en-US" sz="1200" dirty="0"/>
+          </a:p>
+        </p:txBody>
+      </p:sp>
+      <p:sp>
+        <p:nvSpPr>
+          <p:cNvPr id="97" name="Shape 68"/>
+          <p:cNvSpPr/>
+          <p:nvPr/>
+        </p:nvSpPr>
+        <p:spPr>
+          <a:xfrm>
+            <a:off x="8029575" y="3809671"/>
+            <a:ext cx="3346450" cy="1150144"/>
+          </a:xfrm>
+          <a:prstGeom prst="roundRect">
+            <a:avLst>
+              <a:gd name="adj" fmla="val 8558"/>
+            </a:avLst>
+          </a:prstGeom>
+          <a:solidFill>
+            <a:srgbClr val="211E28"/>
+          </a:solidFill>
+          <a:ln w="6350">
+            <a:solidFill>
+              <a:srgbClr val="5B5078"/>
+            </a:solidFill>
+            <a:prstDash val="solid"/>
+          </a:ln>
+        </p:spPr>
+      </p:sp>
+      <p:sp>
+        <p:nvSpPr>
+          <p:cNvPr id="98" name="Text 69"/>
+          <p:cNvSpPr/>
+          <p:nvPr/>
+        </p:nvSpPr>
+        <p:spPr>
+          <a:xfrm>
+            <a:off x="8208434" y="3950429"/>
+            <a:ext cx="3078395" cy="431800"/>
+          </a:xfrm>
+          <a:prstGeom prst="rect">
+            <a:avLst/>
+          </a:prstGeom>
+          <a:noFill/>
+          <a:ln/>
+        </p:spPr>
+        <p:txBody>
+          <a:bodyPr wrap="square" lIns="0" tIns="0" rIns="0" bIns="0" rtlCol="0" anchor="t">
+            <a:normAutofit/>
+          </a:bodyPr>
+          <a:lstStyle/>
+          <a:p>
+            <a:pPr algn="l" indent="0" marL="0">
+              <a:lnSpc>
+                <a:spcPts val="3200"/>
+              </a:lnSpc>
+              <a:buNone/>
+            </a:pPr>
+            <a:r>
+              <a:rPr lang="en-US" sz="3200" dirty="0">
+                <a:solidFill>
+                  <a:srgbClr val="E0975A"/>
+                </a:solidFill>
+                <a:latin typeface="Fraunces" pitchFamily="34" charset="0"/>
+                <a:ea typeface="Fraunces" pitchFamily="34" charset="-122"/>
+                <a:cs typeface="Fraunces" pitchFamily="34" charset="-120"/>
+              </a:rPr>
+              <a:t>5 de 6</a:t>
+            </a:r>
+            <a:endParaRPr lang="en-US" sz="3200" dirty="0"/>
+          </a:p>
+        </p:txBody>
+      </p:sp>
+      <p:sp>
+        <p:nvSpPr>
+          <p:cNvPr id="99" name="Text 70"/>
+          <p:cNvSpPr/>
+          <p:nvPr/>
+        </p:nvSpPr>
+        <p:spPr>
+          <a:xfrm>
+            <a:off x="8208434" y="4407632"/>
+            <a:ext cx="3078395" cy="436827"/>
+          </a:xfrm>
+          <a:prstGeom prst="rect">
+            <a:avLst/>
+          </a:prstGeom>
+          <a:noFill/>
+          <a:ln/>
+        </p:spPr>
+        <p:txBody>
+          <a:bodyPr wrap="square" lIns="0" tIns="0" rIns="0" bIns="0" rtlCol="0" anchor="t">
+            <a:normAutofit/>
+          </a:bodyPr>
+          <a:lstStyle/>
+          <a:p>
+            <a:pPr algn="l" indent="0" marL="0">
+              <a:lnSpc>
+                <a:spcPts val="1620"/>
+              </a:lnSpc>
+              <a:buNone/>
+            </a:pPr>
+            <a:r>
+              <a:rPr lang="en-US" sz="1200" dirty="0">
+                <a:solidFill>
+                  <a:srgbClr val="ECEAF0"/>
+                </a:solidFill>
+                <a:latin typeface="Manrope" pitchFamily="34" charset="0"/>
+                <a:ea typeface="Manrope" pitchFamily="34" charset="-122"/>
+                <a:cs typeface="Manrope" pitchFamily="34" charset="-120"/>
+              </a:rPr>
+              <a:t>intentos de Sonnet rechazados (4 por clichés): </a:t>
+            </a:r>
+            <a:r>
+              <a:rPr lang="en-US" sz="1200" dirty="0">
+                <a:solidFill>
+                  <a:srgbClr val="E0975A"/>
+                </a:solidFill>
+                <a:latin typeface="Manrope" pitchFamily="34" charset="0"/>
+                <a:ea typeface="Manrope" pitchFamily="34" charset="-122"/>
+                <a:cs typeface="Manrope" pitchFamily="34" charset="-120"/>
+              </a:rPr>
+              <a:t>el editor no rebaja el listón.</a:t>
+            </a:r>
+            <a:endParaRPr lang="en-US" sz="1200" dirty="0"/>
+          </a:p>
+        </p:txBody>
+      </p:sp>
+      <p:pic>
+        <p:nvPicPr>
+          <p:cNvPr id="100" name="Image 27" descr="pasa">    </p:cNvPr>
+          <p:cNvPicPr>
+            <a:picLocks noChangeAspect="1"/>
+          </p:cNvPicPr>
+          <p:nvPr/>
+        </p:nvPicPr>
+        <p:blipFill>
+          <a:blip r:embed="rId28"/>
+          <a:srcRect l="0" r="0" t="0" b="0"/>
+          <a:stretch/>
+        </p:blipFill>
+        <p:spPr>
+          <a:xfrm>
+            <a:off x="812800" y="5478661"/>
+            <a:ext cx="177800" cy="177800"/>
+          </a:xfrm>
+          <a:prstGeom prst="rect">
+            <a:avLst/>
+          </a:prstGeom>
+        </p:spPr>
+      </p:pic>
+      <p:sp>
+        <p:nvSpPr>
+          <p:cNvPr id="101" name="Text 71"/>
+          <p:cNvSpPr/>
+          <p:nvPr/>
+        </p:nvSpPr>
+        <p:spPr>
+          <a:xfrm>
+            <a:off x="1054100" y="5460938"/>
+            <a:ext cx="390393" cy="238720"/>
+          </a:xfrm>
+          <a:prstGeom prst="rect">
+            <a:avLst/>
+          </a:prstGeom>
+          <a:noFill/>
+          <a:ln/>
+        </p:spPr>
+        <p:txBody>
+          <a:bodyPr wrap="square" lIns="0" tIns="0" rIns="0" bIns="0" rtlCol="0" anchor="t">
+            <a:normAutofit/>
+          </a:bodyPr>
+          <a:lstStyle/>
+          <a:p>
+            <a:pPr algn="l" indent="0" marL="0">
+              <a:lnSpc>
+                <a:spcPts val="1680"/>
+              </a:lnSpc>
+              <a:buNone/>
+            </a:pPr>
+            <a:r>
+              <a:rPr lang="en-US" sz="1200" dirty="0">
+                <a:solidFill>
+                  <a:srgbClr val="A9A4B5"/>
+                </a:solidFill>
+                <a:latin typeface="Manrope" pitchFamily="34" charset="0"/>
+                <a:ea typeface="Manrope" pitchFamily="34" charset="-122"/>
+                <a:cs typeface="Manrope" pitchFamily="34" charset="-120"/>
+              </a:rPr>
+              <a:t>pasa</a:t>
+            </a:r>
+            <a:endParaRPr lang="en-US" sz="1200" dirty="0"/>
+          </a:p>
+        </p:txBody>
+      </p:sp>
+      <p:pic>
+        <p:nvPicPr>
+          <p:cNvPr id="102" name="Image 28" descr="rechaza">    </p:cNvPr>
+          <p:cNvPicPr>
+            <a:picLocks noChangeAspect="1"/>
+          </p:cNvPicPr>
+          <p:nvPr/>
+        </p:nvPicPr>
+        <p:blipFill>
+          <a:blip r:embed="rId29"/>
+          <a:srcRect l="0" r="0" t="0" b="0"/>
+          <a:stretch/>
+        </p:blipFill>
+        <p:spPr>
+          <a:xfrm>
+            <a:off x="1622293" y="5478661"/>
+            <a:ext cx="177800" cy="177800"/>
+          </a:xfrm>
+          <a:prstGeom prst="rect">
+            <a:avLst/>
+          </a:prstGeom>
+        </p:spPr>
+      </p:pic>
+      <p:sp>
+        <p:nvSpPr>
+          <p:cNvPr id="103" name="Text 72"/>
+          <p:cNvSpPr/>
+          <p:nvPr/>
+        </p:nvSpPr>
+        <p:spPr>
+          <a:xfrm>
+            <a:off x="1863593" y="5460938"/>
+            <a:ext cx="2599168" cy="238720"/>
+          </a:xfrm>
+          <a:prstGeom prst="rect">
+            <a:avLst/>
+          </a:prstGeom>
+          <a:noFill/>
+          <a:ln/>
+        </p:spPr>
+        <p:txBody>
+          <a:bodyPr wrap="square" lIns="0" tIns="0" rIns="0" bIns="0" rtlCol="0" anchor="t">
+            <a:normAutofit/>
+          </a:bodyPr>
+          <a:lstStyle/>
+          <a:p>
+            <a:pPr algn="l" indent="0" marL="0">
+              <a:lnSpc>
+                <a:spcPts val="1680"/>
+              </a:lnSpc>
+              <a:buNone/>
+            </a:pPr>
+            <a:r>
+              <a:rPr lang="en-US" sz="1200" dirty="0">
+                <a:solidFill>
+                  <a:srgbClr val="A9A4B5"/>
+                </a:solidFill>
+                <a:latin typeface="Manrope" pitchFamily="34" charset="0"/>
+                <a:ea typeface="Manrope" pitchFamily="34" charset="-122"/>
+                <a:cs typeface="Manrope" pitchFamily="34" charset="-120"/>
+              </a:rPr>
+              <a:t>rechaza (n/m = rechazos / intentos)</a:t>
+            </a:r>
+            <a:endParaRPr lang="en-US" sz="1200" dirty="0"/>
+          </a:p>
+        </p:txBody>
+      </p:sp>
+      <p:pic>
+        <p:nvPicPr>
+          <p:cNvPr id="104" name="Image 29" descr="sin ejecutar">    </p:cNvPr>
+          <p:cNvPicPr>
+            <a:picLocks noChangeAspect="1"/>
+          </p:cNvPicPr>
+          <p:nvPr/>
+        </p:nvPicPr>
+        <p:blipFill>
+          <a:blip r:embed="rId30"/>
+          <a:srcRect l="0" r="0" t="0" b="0"/>
+          <a:stretch/>
+        </p:blipFill>
+        <p:spPr>
+          <a:xfrm>
+            <a:off x="4615656" y="5478661"/>
+            <a:ext cx="177800" cy="177800"/>
+          </a:xfrm>
+          <a:prstGeom prst="rect">
+            <a:avLst/>
+          </a:prstGeom>
+        </p:spPr>
+      </p:pic>
+      <p:sp>
+        <p:nvSpPr>
+          <p:cNvPr id="105" name="Text 73"/>
+          <p:cNvSpPr/>
+          <p:nvPr/>
+        </p:nvSpPr>
+        <p:spPr>
+          <a:xfrm>
+            <a:off x="4856956" y="5460938"/>
+            <a:ext cx="2449281" cy="238720"/>
+          </a:xfrm>
+          <a:prstGeom prst="rect">
+            <a:avLst/>
+          </a:prstGeom>
+          <a:noFill/>
+          <a:ln/>
+        </p:spPr>
+        <p:txBody>
+          <a:bodyPr wrap="square" lIns="0" tIns="0" rIns="0" bIns="0" rtlCol="0" anchor="t">
+            <a:normAutofit/>
+          </a:bodyPr>
+          <a:lstStyle/>
+          <a:p>
+            <a:pPr algn="l" indent="0" marL="0">
+              <a:lnSpc>
+                <a:spcPts val="1680"/>
+              </a:lnSpc>
+              <a:buNone/>
+            </a:pPr>
+            <a:r>
+              <a:rPr lang="en-US" sz="1200" dirty="0">
+                <a:solidFill>
+                  <a:srgbClr val="A9A4B5"/>
+                </a:solidFill>
+                <a:latin typeface="Manrope" pitchFamily="34" charset="0"/>
+                <a:ea typeface="Manrope" pitchFamily="34" charset="-122"/>
+                <a:cs typeface="Manrope" pitchFamily="34" charset="-120"/>
+              </a:rPr>
+              <a:t>sin ejecutar (la novela paró antes)</a:t>
+            </a:r>
+            <a:endParaRPr lang="en-US" sz="1200" dirty="0"/>
+          </a:p>
+        </p:txBody>
+      </p:sp>
+      <p:sp>
+        <p:nvSpPr>
+          <p:cNvPr id="106" name="Text 74"/>
+          <p:cNvSpPr/>
+          <p:nvPr/>
+        </p:nvSpPr>
+        <p:spPr>
+          <a:xfrm>
+            <a:off x="7463499" y="5460938"/>
+            <a:ext cx="825368" cy="238720"/>
+          </a:xfrm>
+          <a:prstGeom prst="rect">
+            <a:avLst/>
+          </a:prstGeom>
+          <a:noFill/>
+          <a:ln/>
+        </p:spPr>
+        <p:txBody>
+          <a:bodyPr wrap="square" lIns="0" tIns="0" rIns="0" bIns="0" rtlCol="0" anchor="t">
+            <a:normAutofit/>
+          </a:bodyPr>
+          <a:lstStyle/>
+          <a:p>
+            <a:pPr algn="l" indent="0" marL="0">
+              <a:lnSpc>
+                <a:spcPts val="1680"/>
+              </a:lnSpc>
+              <a:buNone/>
+            </a:pPr>
+            <a:r>
+              <a:rPr lang="en-US" sz="1200" dirty="0">
+                <a:solidFill>
+                  <a:srgbClr val="A9A4B5"/>
+                </a:solidFill>
+                <a:latin typeface="Manrope" pitchFamily="34" charset="0"/>
+                <a:ea typeface="Manrope" pitchFamily="34" charset="-122"/>
+                <a:cs typeface="Manrope" pitchFamily="34" charset="-120"/>
+              </a:rPr>
+              <a:t>— no aplica</a:t>
+            </a:r>
+            <a:endParaRPr lang="en-US" sz="1200" dirty="0"/>
+          </a:p>
+        </p:txBody>
+      </p:sp>
+      <p:pic>
+        <p:nvPicPr>
+          <p:cNvPr id="107" name="Image 30" descr="SpaceMaker">    </p:cNvPr>
+          <p:cNvPicPr>
+            <a:picLocks noChangeAspect="1"/>
+          </p:cNvPicPr>
+          <p:nvPr/>
+        </p:nvPicPr>
+        <p:blipFill>
+          <a:blip r:embed="rId31"/>
+          <a:srcRect l="0" r="0" t="0" b="0"/>
+          <a:stretch/>
+        </p:blipFill>
+        <p:spPr>
+          <a:xfrm>
+            <a:off x="812800" y="6146800"/>
+            <a:ext cx="304800" cy="304800"/>
+          </a:xfrm>
+          <a:prstGeom prst="rect">
+            <a:avLst/>
+          </a:prstGeom>
+        </p:spPr>
+      </p:pic>
+      <p:sp>
+        <p:nvSpPr>
+          <p:cNvPr id="108" name="Text 75"/>
+          <p:cNvSpPr/>
+          <p:nvPr/>
+        </p:nvSpPr>
+        <p:spPr>
+          <a:xfrm>
+            <a:off x="1244600" y="6192509"/>
+            <a:ext cx="828543" cy="238720"/>
+          </a:xfrm>
+          <a:prstGeom prst="rect">
+            <a:avLst/>
+          </a:prstGeom>
+          <a:noFill/>
+          <a:ln/>
+        </p:spPr>
+        <p:txBody>
+          <a:bodyPr wrap="square" lIns="0" tIns="0" rIns="0" bIns="0" rtlCol="0" anchor="t">
+            <a:normAutofit/>
+          </a:bodyPr>
+          <a:lstStyle/>
+          <a:p>
+            <a:pPr algn="l" indent="0" marL="0">
+              <a:lnSpc>
+                <a:spcPts val="1680"/>
+              </a:lnSpc>
+              <a:buNone/>
+            </a:pPr>
+            <a:r>
+              <a:rPr lang="en-US" sz="1200" spc="50" kern="0" dirty="0">
+                <a:solidFill>
+                  <a:srgbClr val="A9A4B5"/>
+                </a:solidFill>
+                <a:latin typeface="Manrope" pitchFamily="34" charset="0"/>
+                <a:ea typeface="Manrope" pitchFamily="34" charset="-122"/>
+                <a:cs typeface="Manrope" pitchFamily="34" charset="-120"/>
+              </a:rPr>
+              <a:t>Validación</a:t>
+            </a:r>
+            <a:endParaRPr lang="en-US" sz="1200" dirty="0"/>
+          </a:p>
+        </p:txBody>
+      </p:sp>
+      <p:pic>
+        <p:nvPicPr>
+          <p:cNvPr id="109" name="Image 31" descr="Tres destellos">    </p:cNvPr>
+          <p:cNvPicPr>
+            <a:picLocks noChangeAspect="1"/>
+          </p:cNvPicPr>
+          <p:nvPr/>
+        </p:nvPicPr>
+        <p:blipFill>
+          <a:blip r:embed="rId32"/>
+          <a:srcRect l="0" r="0" t="0" b="0"/>
+          <a:stretch/>
+        </p:blipFill>
+        <p:spPr>
+          <a:xfrm>
             <a:off x="10693400" y="6261100"/>
             <a:ext cx="304800" cy="76200"/>
           </a:xfrm>
@@ -41731,7 +40484,7 @@
       </p:pic>
       <p:sp>
         <p:nvSpPr>
-          <p:cNvPr id="13" name="Text 7"/>
+          <p:cNvPr id="110" name="Text 76"/>
           <p:cNvSpPr/>
           <p:nvPr/>
         </p:nvSpPr>
